--- a/presentation/drafts/Balls_into_Bins_Cisco_Interview_Deck.pptx
+++ b/presentation/drafts/Balls_into_Bins_Cisco_Interview_Deck.pptx
@@ -19,9 +19,10 @@
     <p:sldId id="267" r:id="rId13"/>
     <p:sldId id="268" r:id="rId14"/>
     <p:sldId id="269" r:id="rId15"/>
+    <p:sldId id="270" r:id="rId16"/>
   </p:sldIdLst>
   <p:notesMasterIdLst>
-    <p:notesMasterId r:id="rId16"/>
+    <p:notesMasterId r:id="rId17"/>
   </p:notesMasterIdLst>
   <p:sldSz cx="12192000" cy="6858000"/>
   <p:notesSz cx="6858000" cy="12192000"/>
@@ -979,6 +980,94 @@
             <a:fld id="{F7021451-1387-4CA6-816F-3879F97B5CBC}" type="slidenum">
               <a:rPr lang="en-US"/>
               <a:t>14</a:t>
+            </a:fld>
+            <a:endParaRPr lang="en-US"/>
+          </a:p>
+        </p:txBody>
+      </p:sp>
+    </p:spTree>
+    <p:extLst>
+      <p:ext uri="{BB962C8B-B14F-4D97-AF65-F5344CB8AC3E}">
+        <p14:creationId xmlns:p14="http://schemas.microsoft.com/office/powerpoint/2010/main" val="1024086991"/>
+      </p:ext>
+    </p:extLst>
+  </p:cSld>
+  <p:clrMapOvr>
+    <a:masterClrMapping/>
+  </p:clrMapOvr>
+</p:notes>
+</file>
+
+<file path=ppt/notesSlides/notesSlide15.xml><?xml version="1.0" encoding="utf-8"?>
+<p:notes xmlns:a="http://schemas.openxmlformats.org/drawingml/2006/main" xmlns:r="http://schemas.openxmlformats.org/officeDocument/2006/relationships" xmlns:p="http://schemas.openxmlformats.org/presentationml/2006/main">
+  <p:cSld>
+    <p:spTree>
+      <p:nvGrpSpPr>
+        <p:cNvPr id="1" name=""/>
+        <p:cNvGrpSpPr/>
+        <p:nvPr/>
+      </p:nvGrpSpPr>
+      <p:grpSpPr>
+        <a:xfrm>
+          <a:off x="0" y="0"/>
+          <a:ext cx="0" cy="0"/>
+          <a:chOff x="0" y="0"/>
+          <a:chExt cx="0" cy="0"/>
+        </a:xfrm>
+      </p:grpSpPr>
+      <p:sp>
+        <p:nvSpPr>
+          <p:cNvPr id="2" name="Slide Image Placeholder 1"/>
+          <p:cNvSpPr>
+            <a:spLocks noGrp="1" noRot="1" noChangeAspect="1"/>
+          </p:cNvSpPr>
+          <p:nvPr>
+            <p:ph type="sldImg"/>
+          </p:nvPr>
+        </p:nvSpPr>
+        <p:spPr/>
+      </p:sp>
+      <p:sp>
+        <p:nvSpPr>
+          <p:cNvPr id="3" name="Notes Placeholder 2"/>
+          <p:cNvSpPr>
+            <a:spLocks noGrp="1"/>
+          </p:cNvSpPr>
+          <p:nvPr>
+            <p:ph type="body" idx="1"/>
+          </p:nvPr>
+        </p:nvSpPr>
+        <p:spPr/>
+        <p:txBody>
+          <a:bodyPr/>
+          <a:lstStyle/>
+          <a:p>
+            <a:r>
+              <a:rPr lang="en-US" dirty="0"/>
+              <a:t/>
+            </a:r>
+            <a:endParaRPr lang="en-US" dirty="0"/>
+          </a:p>
+        </p:txBody>
+      </p:sp>
+      <p:sp>
+        <p:nvSpPr>
+          <p:cNvPr id="4" name="Slide Number Placeholder 3"/>
+          <p:cNvSpPr>
+            <a:spLocks noGrp="1"/>
+          </p:cNvSpPr>
+          <p:nvPr>
+            <p:ph type="sldNum" sz="quarter" idx="10"/>
+          </p:nvPr>
+        </p:nvSpPr>
+        <p:spPr/>
+        <p:txBody>
+          <a:bodyPr/>
+          <a:lstStyle/>
+          <a:p>
+            <a:fld id="{F7021451-1387-4CA6-816F-3879F97B5CBC}" type="slidenum">
+              <a:rPr lang="en-US"/>
+              <a:t>15</a:t>
             </a:fld>
             <a:endParaRPr lang="en-US"/>
           </a:p>
@@ -2659,7 +2748,7 @@
                 <a:ea typeface="Cambria" pitchFamily="34" charset="-122"/>
                 <a:cs typeface="Cambria" pitchFamily="34" charset="-120"/>
               </a:rPr>
-              <a:t>Stateful Heap: When Maintained State Helps</a:t>
+              <a:t>Weighted Balls Break Count Fairness</a:t>
             </a:r>
             <a:endParaRPr lang="en-US" sz="2900" dirty="0"/>
           </a:p>
@@ -2706,7 +2795,7 @@
       </p:sp>
       <p:pic>
         <p:nvPicPr>
-          <p:cNvPr id="4" name="Image 0" descr="/home/claude/work/assets/plot_heap_sweep.png">    </p:cNvPr>
+          <p:cNvPr id="4" name="Image 0" descr="/home/claude/work/assets/plot_weighted_breaks.png">    </p:cNvPr>
           <p:cNvPicPr>
             <a:picLocks noChangeAspect="1"/>
           </p:cNvPicPr>
@@ -2737,11 +2826,11 @@
         <p:spPr>
           <a:xfrm>
             <a:off x="7635240" y="1188720"/>
-            <a:ext cx="4007815" cy="1554480"/>
+            <a:ext cx="4007815" cy="1417320"/>
           </a:xfrm>
           <a:prstGeom prst="roundRect">
             <a:avLst>
-              <a:gd name="adj" fmla="val 4706"/>
+              <a:gd name="adj" fmla="val 5161"/>
             </a:avLst>
           </a:prstGeom>
           <a:solidFill>
@@ -2759,7 +2848,7 @@
         <p:spPr>
           <a:xfrm>
             <a:off x="7799832" y="1261872"/>
-            <a:ext cx="3678631" cy="901598"/>
+            <a:ext cx="3678631" cy="822046"/>
           </a:xfrm>
           <a:prstGeom prst="rect">
             <a:avLst/>
@@ -2777,13 +2866,13 @@
             <a:r>
               <a:rPr lang="en-US" sz="2200" b="1" dirty="0">
                 <a:solidFill>
-                  <a:srgbClr val="C2660D"/>
+                  <a:srgbClr val="15803D"/>
                 </a:solidFill>
                 <a:latin typeface="Cambria" pitchFamily="34" charset="0"/>
                 <a:ea typeface="Cambria" pitchFamily="34" charset="-122"/>
                 <a:cs typeface="Cambria" pitchFamily="34" charset="-120"/>
               </a:rPr>
-              <a:t>≈ 38.3  vs  ≈ 159</a:t>
+              <a:t>1812.6  vs  1731.6</a:t>
             </a:r>
             <a:endParaRPr lang="en-US" sz="2200" dirty="0"/>
           </a:p>
@@ -2797,8 +2886,8 @@
         </p:nvSpPr>
         <p:spPr>
           <a:xfrm>
-            <a:off x="7799832" y="2121408"/>
-            <a:ext cx="3678631" cy="559613"/>
+            <a:off x="7799832" y="2039112"/>
+            <a:ext cx="3678631" cy="510235"/>
           </a:xfrm>
           <a:prstGeom prst="rect">
             <a:avLst/>
@@ -2822,7 +2911,7 @@
                 <a:ea typeface="Calibri" pitchFamily="34" charset="-122"/>
                 <a:cs typeface="Calibri" pitchFamily="34" charset="-120"/>
               </a:rPr>
-              <a:t>COST PER BALL — FULL HEAP vs ABSOLUTE MINIMUM</a:t>
+              <a:t>MAX LOAD, WEIGHTED n=32 — ROUND-ROBIN vs POWER-2</a:t>
             </a:r>
             <a:endParaRPr lang="en-US" sz="1050" dirty="0"/>
           </a:p>
@@ -2836,8 +2925,8 @@
         </p:nvSpPr>
         <p:spPr>
           <a:xfrm>
-            <a:off x="7635240" y="2697480"/>
-            <a:ext cx="4007815" cy="822960"/>
+            <a:off x="7635240" y="2788920"/>
+            <a:ext cx="4007815" cy="1005840"/>
           </a:xfrm>
           <a:prstGeom prst="rect">
             <a:avLst/>
@@ -2856,7 +2945,7 @@
               <a:buNone/>
             </a:pPr>
             <a:r>
-              <a:rPr lang="en-US" sz="1250" dirty="0">
+              <a:rPr lang="en-US" sz="1300" dirty="0">
                 <a:solidFill>
                   <a:srgbClr val="1E293B"/>
                 </a:solidFill>
@@ -2864,9 +2953,9 @@
                 <a:ea typeface="Calibri" pitchFamily="34" charset="-122"/>
                 <a:cs typeface="Calibri" pitchFamily="34" charset="-120"/>
               </a:rPr>
-              <a:t>Full heap matches absolute-minimum quality (max load ≈ 1724.7) at a fraction of the cost.</a:t>
-            </a:r>
-            <a:endParaRPr lang="en-US" sz="1250" dirty="0"/>
+              <a:t>Fair by count can still be bad by load. Power-2 reads current load and adapts; round-robin does not.</a:t>
+            </a:r>
+            <a:endParaRPr lang="en-US" sz="1300" dirty="0"/>
           </a:p>
         </p:txBody>
       </p:sp>
@@ -2878,7 +2967,7 @@
         </p:nvSpPr>
         <p:spPr>
           <a:xfrm>
-            <a:off x="7635240" y="3611880"/>
+            <a:off x="7635240" y="3977640"/>
             <a:ext cx="4007815" cy="1005840"/>
           </a:xfrm>
           <a:prstGeom prst="rect">
@@ -2906,7 +2995,7 @@
                 <a:ea typeface="Calibri" pitchFamily="34" charset="-122"/>
                 <a:cs typeface="Calibri" pitchFamily="34" charset="-120"/>
               </a:rPr>
-              <a:t>Partial heap tracks s bins; full heap tracks all bins. More state steadily improves quality, at rising update cost.</a:t>
+              <a:t>The same pattern appears at n=16: round-robin's clean-case advantage disappears once balls carry weight.</a:t>
             </a:r>
             <a:endParaRPr lang="en-US" sz="1250" dirty="0"/>
           </a:p>
@@ -2967,7 +3056,7 @@
                 <a:ea typeface="Calibri" pitchFamily="34" charset="-122"/>
                 <a:cs typeface="Calibri" pitchFamily="34" charset="-120"/>
               </a:rPr>
-              <a:t>A maintained heap can approach global-min quality without scanning all bins every time.</a:t>
+              <a:t>Round-robin balances counts, not load — weighted balls expose that weakness.</a:t>
             </a:r>
             <a:endParaRPr lang="en-US" sz="1350" dirty="0"/>
           </a:p>
@@ -3038,7 +3127,7 @@
                 <a:ea typeface="Cambria" pitchFamily="34" charset="-122"/>
                 <a:cs typeface="Cambria" pitchFamily="34" charset="-120"/>
               </a:rPr>
-              <a:t>Initialization Tests Robustness</a:t>
+              <a:t>Stateful Heap: When Maintained State Helps</a:t>
             </a:r>
             <a:endParaRPr lang="en-US" sz="2900" dirty="0"/>
           </a:p>
@@ -3085,7 +3174,7 @@
       </p:sp>
       <p:pic>
         <p:nvPicPr>
-          <p:cNvPr id="4" name="Image 0" descr="/home/claude/work/assets/plot_initialized.png">    </p:cNvPr>
+          <p:cNvPr id="4" name="Image 0" descr="/home/claude/work/assets/plot_heap_sweep.png">    </p:cNvPr>
           <p:cNvPicPr>
             <a:picLocks noChangeAspect="1"/>
           </p:cNvPicPr>
@@ -3116,11 +3205,11 @@
         <p:spPr>
           <a:xfrm>
             <a:off x="7635240" y="1188720"/>
-            <a:ext cx="4007815" cy="1417320"/>
+            <a:ext cx="4007815" cy="1554480"/>
           </a:xfrm>
           <a:prstGeom prst="roundRect">
             <a:avLst>
-              <a:gd name="adj" fmla="val 5161"/>
+              <a:gd name="adj" fmla="val 4706"/>
             </a:avLst>
           </a:prstGeom>
           <a:solidFill>
@@ -3138,7 +3227,7 @@
         <p:spPr>
           <a:xfrm>
             <a:off x="7799832" y="1261872"/>
-            <a:ext cx="3678631" cy="822046"/>
+            <a:ext cx="3678631" cy="901598"/>
           </a:xfrm>
           <a:prstGeom prst="rect">
             <a:avLst/>
@@ -3156,13 +3245,13 @@
             <a:r>
               <a:rPr lang="en-US" sz="2200" b="1" dirty="0">
                 <a:solidFill>
-                  <a:srgbClr val="475569"/>
+                  <a:srgbClr val="C2660D"/>
                 </a:solidFill>
                 <a:latin typeface="Cambria" pitchFamily="34" charset="0"/>
                 <a:ea typeface="Cambria" pitchFamily="34" charset="-122"/>
                 <a:cs typeface="Cambria" pitchFamily="34" charset="-120"/>
               </a:rPr>
-              <a:t>679.3  vs  678.0</a:t>
+              <a:t>≈ 38.3  vs  ≈ 159</a:t>
             </a:r>
             <a:endParaRPr lang="en-US" sz="2200" dirty="0"/>
           </a:p>
@@ -3176,8 +3265,8 @@
         </p:nvSpPr>
         <p:spPr>
           <a:xfrm>
-            <a:off x="7799832" y="2039112"/>
-            <a:ext cx="3678631" cy="510235"/>
+            <a:off x="7799832" y="2121408"/>
+            <a:ext cx="3678631" cy="559613"/>
           </a:xfrm>
           <a:prstGeom prst="rect">
             <a:avLst/>
@@ -3201,7 +3290,7 @@
                 <a:ea typeface="Calibri" pitchFamily="34" charset="-122"/>
                 <a:cs typeface="Calibri" pitchFamily="34" charset="-120"/>
               </a:rPr>
-              <a:t>MAX LOAD, n=16 — POWER-2 vs REFERENCE</a:t>
+              <a:t>COST PER BALL — FULL HEAP vs ABSOLUTE MINIMUM</a:t>
             </a:r>
             <a:endParaRPr lang="en-US" sz="1050" dirty="0"/>
           </a:p>
@@ -3209,114 +3298,14 @@
       </p:sp>
       <p:sp>
         <p:nvSpPr>
-          <p:cNvPr id="8" name="Shape 5"/>
-          <p:cNvSpPr/>
-          <p:nvPr/>
-        </p:nvSpPr>
-        <p:spPr>
-          <a:xfrm>
-            <a:off x="7635240" y="2743200"/>
-            <a:ext cx="4007815" cy="1417320"/>
-          </a:xfrm>
-          <a:prstGeom prst="roundRect">
-            <a:avLst>
-              <a:gd name="adj" fmla="val 5161"/>
-            </a:avLst>
-          </a:prstGeom>
-          <a:solidFill>
-            <a:srgbClr val="F1F5F9"/>
-          </a:solidFill>
-          <a:ln/>
-        </p:spPr>
-      </p:sp>
-      <p:sp>
-        <p:nvSpPr>
-          <p:cNvPr id="9" name="Text 6"/>
-          <p:cNvSpPr/>
-          <p:nvPr/>
-        </p:nvSpPr>
-        <p:spPr>
-          <a:xfrm>
-            <a:off x="7799832" y="2816352"/>
-            <a:ext cx="3678631" cy="822046"/>
-          </a:xfrm>
-          <a:prstGeom prst="rect">
-            <a:avLst/>
-          </a:prstGeom>
-          <a:noFill/>
-          <a:ln/>
-        </p:spPr>
-        <p:txBody>
-          <a:bodyPr wrap="square" lIns="0" tIns="0" rIns="0" bIns="0" rtlCol="0" anchor="b"/>
-          <a:lstStyle/>
-          <a:p>
-            <a:pPr algn="l" indent="0" marL="0">
-              <a:buNone/>
-            </a:pPr>
-            <a:r>
-              <a:rPr lang="en-US" sz="2200" b="1" dirty="0">
-                <a:solidFill>
-                  <a:srgbClr val="475569"/>
-                </a:solidFill>
-                <a:latin typeface="Cambria" pitchFamily="34" charset="0"/>
-                <a:ea typeface="Cambria" pitchFamily="34" charset="-122"/>
-                <a:cs typeface="Cambria" pitchFamily="34" charset="-120"/>
-              </a:rPr>
-              <a:t>365.4  vs  364.0</a:t>
-            </a:r>
-            <a:endParaRPr lang="en-US" sz="2200" dirty="0"/>
-          </a:p>
-        </p:txBody>
-      </p:sp>
-      <p:sp>
-        <p:nvSpPr>
-          <p:cNvPr id="10" name="Text 7"/>
-          <p:cNvSpPr/>
-          <p:nvPr/>
-        </p:nvSpPr>
-        <p:spPr>
-          <a:xfrm>
-            <a:off x="7799832" y="3593592"/>
-            <a:ext cx="3678631" cy="510235"/>
-          </a:xfrm>
-          <a:prstGeom prst="rect">
-            <a:avLst/>
-          </a:prstGeom>
-          <a:noFill/>
-          <a:ln/>
-        </p:spPr>
-        <p:txBody>
-          <a:bodyPr wrap="square" lIns="0" tIns="0" rIns="0" bIns="0" rtlCol="0" anchor="t"/>
-          <a:lstStyle/>
-          <a:p>
-            <a:pPr algn="l" indent="0" marL="0">
-              <a:buNone/>
-            </a:pPr>
-            <a:r>
-              <a:rPr lang="en-US" sz="1050" dirty="0">
-                <a:solidFill>
-                  <a:srgbClr val="64748B"/>
-                </a:solidFill>
-                <a:latin typeface="Calibri" pitchFamily="34" charset="0"/>
-                <a:ea typeface="Calibri" pitchFamily="34" charset="-122"/>
-                <a:cs typeface="Calibri" pitchFamily="34" charset="-120"/>
-              </a:rPr>
-              <a:t>MAX LOAD, n=32 — POWER-2 vs REFERENCE</a:t>
-            </a:r>
-            <a:endParaRPr lang="en-US" sz="1050" dirty="0"/>
-          </a:p>
-        </p:txBody>
-      </p:sp>
-      <p:sp>
-        <p:nvSpPr>
-          <p:cNvPr id="11" name="Text 8"/>
-          <p:cNvSpPr/>
-          <p:nvPr/>
-        </p:nvSpPr>
-        <p:spPr>
-          <a:xfrm>
-            <a:off x="7635240" y="4343400"/>
-            <a:ext cx="4007815" cy="1097280"/>
+          <p:cNvPr id="8" name="Text 5"/>
+          <p:cNvSpPr/>
+          <p:nvPr/>
+        </p:nvSpPr>
+        <p:spPr>
+          <a:xfrm>
+            <a:off x="7635240" y="2697480"/>
+            <a:ext cx="4007815" cy="822960"/>
           </a:xfrm>
           <a:prstGeom prst="rect">
             <a:avLst/>
@@ -3335,6 +3324,48 @@
               <a:buNone/>
             </a:pPr>
             <a:r>
+              <a:rPr lang="en-US" sz="1250" dirty="0">
+                <a:solidFill>
+                  <a:srgbClr val="1E293B"/>
+                </a:solidFill>
+                <a:latin typeface="Calibri" pitchFamily="34" charset="0"/>
+                <a:ea typeface="Calibri" pitchFamily="34" charset="-122"/>
+                <a:cs typeface="Calibri" pitchFamily="34" charset="-120"/>
+              </a:rPr>
+              <a:t>Full heap matches absolute-minimum quality (max load ≈ 1724.7) at a fraction of the cost.</a:t>
+            </a:r>
+            <a:endParaRPr lang="en-US" sz="1250" dirty="0"/>
+          </a:p>
+        </p:txBody>
+      </p:sp>
+      <p:sp>
+        <p:nvSpPr>
+          <p:cNvPr id="9" name="Text 6"/>
+          <p:cNvSpPr/>
+          <p:nvPr/>
+        </p:nvSpPr>
+        <p:spPr>
+          <a:xfrm>
+            <a:off x="7635240" y="3611880"/>
+            <a:ext cx="4007815" cy="1005840"/>
+          </a:xfrm>
+          <a:prstGeom prst="rect">
+            <a:avLst/>
+          </a:prstGeom>
+          <a:noFill/>
+          <a:ln/>
+        </p:spPr>
+        <p:txBody>
+          <a:bodyPr wrap="square" lIns="0" tIns="0" rIns="0" bIns="0" rtlCol="0" anchor="t"/>
+          <a:lstStyle/>
+          <a:p>
+            <a:pPr indent="0" marL="0">
+              <a:lnSpc>
+                <a:spcPct val="115000"/>
+              </a:lnSpc>
+              <a:buNone/>
+            </a:pPr>
+            <a:r>
               <a:rPr lang="en-US" sz="1250" i="1" dirty="0">
                 <a:solidFill>
                   <a:srgbClr val="64748B"/>
@@ -3343,7 +3374,7 @@
                 <a:ea typeface="Calibri" pitchFamily="34" charset="-122"/>
                 <a:cs typeface="Calibri" pitchFamily="34" charset="-120"/>
               </a:rPr>
-              <a:t>Real systems rarely start from zero. Round-robin can preserve — rather than correct — initial imbalance.</a:t>
+              <a:t>Partial heap tracks s bins; full heap tracks all bins. More state steadily improves quality, at rising update cost.</a:t>
             </a:r>
             <a:endParaRPr lang="en-US" sz="1250" dirty="0"/>
           </a:p>
@@ -3351,7 +3382,7 @@
       </p:sp>
       <p:sp>
         <p:nvSpPr>
-          <p:cNvPr id="12" name="Shape 9"/>
+          <p:cNvPr id="10" name="Shape 7"/>
           <p:cNvSpPr/>
           <p:nvPr/>
         </p:nvSpPr>
@@ -3373,7 +3404,7 @@
       </p:sp>
       <p:sp>
         <p:nvSpPr>
-          <p:cNvPr id="13" name="Text 10"/>
+          <p:cNvPr id="11" name="Text 8"/>
           <p:cNvSpPr/>
           <p:nvPr/>
         </p:nvSpPr>
@@ -3404,7 +3435,7 @@
                 <a:ea typeface="Calibri" pitchFamily="34" charset="-122"/>
                 <a:cs typeface="Calibri" pitchFamily="34" charset="-120"/>
               </a:rPr>
-              <a:t>Starting from non-empty bins exposes whether a policy corrects imbalance or just preserves it.</a:t>
+              <a:t>A maintained heap can approach global-min quality without scanning all bins every time.</a:t>
             </a:r>
             <a:endParaRPr lang="en-US" sz="1350" dirty="0"/>
           </a:p>
@@ -3475,7 +3506,7 @@
                 <a:ea typeface="Cambria" pitchFamily="34" charset="-122"/>
                 <a:cs typeface="Cambria" pitchFamily="34" charset="-120"/>
               </a:rPr>
-              <a:t>Final Realistic Tradeoff: Weighted + Initialized</a:t>
+              <a:t>Initialization Tests Robustness</a:t>
             </a:r>
             <a:endParaRPr lang="en-US" sz="2900" dirty="0"/>
           </a:p>
@@ -3522,7 +3553,7 @@
       </p:sp>
       <p:pic>
         <p:nvPicPr>
-          <p:cNvPr id="4" name="Image 0" descr="/home/claude/work/assets/plot_cost_quality_final.png">    </p:cNvPr>
+          <p:cNvPr id="4" name="Image 0" descr="/home/claude/work/assets/plot_initialized.png">    </p:cNvPr>
           <p:cNvPicPr>
             <a:picLocks noChangeAspect="1"/>
           </p:cNvPicPr>
@@ -3536,8 +3567,8 @@
         </p:blipFill>
         <p:spPr>
           <a:xfrm>
-            <a:off x="1340968" y="1143000"/>
-            <a:ext cx="9509760" cy="4075611"/>
+            <a:off x="548640" y="1188720"/>
+            <a:ext cx="6858000" cy="4572000"/>
           </a:xfrm>
           <a:prstGeom prst="rect">
             <a:avLst/>
@@ -3552,12 +3583,12 @@
         </p:nvSpPr>
         <p:spPr>
           <a:xfrm>
-            <a:off x="548640" y="5440680"/>
-            <a:ext cx="2636444" cy="502920"/>
+            <a:off x="7635240" y="1188720"/>
+            <a:ext cx="4007815" cy="1417320"/>
           </a:xfrm>
           <a:prstGeom prst="roundRect">
             <a:avLst>
-              <a:gd name="adj" fmla="val 10909"/>
+              <a:gd name="adj" fmla="val 5161"/>
             </a:avLst>
           </a:prstGeom>
           <a:solidFill>
@@ -3574,43 +3605,59 @@
         </p:nvSpPr>
         <p:spPr>
           <a:xfrm>
-            <a:off x="685800" y="5440680"/>
-            <a:ext cx="2362124" cy="502920"/>
-          </a:xfrm>
-          <a:prstGeom prst="rect">
-            <a:avLst/>
-          </a:prstGeom>
-          <a:noFill/>
-          <a:ln/>
-        </p:spPr>
-        <p:txBody>
-          <a:bodyPr wrap="square" lIns="0" tIns="0" rIns="0" bIns="0" rtlCol="0" anchor="ctr"/>
-          <a:lstStyle/>
-          <a:p>
-            <a:pPr indent="0" marL="0">
-              <a:lnSpc>
-                <a:spcPct val="100000"/>
-              </a:lnSpc>
-              <a:buNone/>
-            </a:pPr>
-            <a:r>
-              <a:rPr lang="en-US" sz="1150" b="1" dirty="0">
+            <a:off x="7799832" y="1261872"/>
+            <a:ext cx="3678631" cy="822046"/>
+          </a:xfrm>
+          <a:prstGeom prst="rect">
+            <a:avLst/>
+          </a:prstGeom>
+          <a:noFill/>
+          <a:ln/>
+        </p:spPr>
+        <p:txBody>
+          <a:bodyPr wrap="square" lIns="0" tIns="0" rIns="0" bIns="0" rtlCol="0" anchor="b"/>
+          <a:lstStyle/>
+          <a:p>
+            <a:pPr algn="l" indent="0" marL="0">
+              <a:buNone/>
+            </a:pPr>
+            <a:r>
+              <a:rPr lang="en-US" sz="2200" b="1" dirty="0">
                 <a:solidFill>
                   <a:srgbClr val="475569"/>
                 </a:solidFill>
-                <a:latin typeface="Calibri" pitchFamily="34" charset="0"/>
-                <a:ea typeface="Calibri" pitchFamily="34" charset="-122"/>
-                <a:cs typeface="Calibri" pitchFamily="34" charset="-120"/>
-              </a:rPr>
-              <a:t>Random</a:t>
-            </a:r>
-            <a:endParaRPr lang="en-US" sz="1150" dirty="0"/>
-          </a:p>
-          <a:p>
-            <a:pPr indent="0" marL="0">
-              <a:lnSpc>
-                <a:spcPct val="100000"/>
-              </a:lnSpc>
+                <a:latin typeface="Cambria" pitchFamily="34" charset="0"/>
+                <a:ea typeface="Cambria" pitchFamily="34" charset="-122"/>
+                <a:cs typeface="Cambria" pitchFamily="34" charset="-120"/>
+              </a:rPr>
+              <a:t>679.3  vs  678.0</a:t>
+            </a:r>
+            <a:endParaRPr lang="en-US" sz="2200" dirty="0"/>
+          </a:p>
+        </p:txBody>
+      </p:sp>
+      <p:sp>
+        <p:nvSpPr>
+          <p:cNvPr id="7" name="Text 4"/>
+          <p:cNvSpPr/>
+          <p:nvPr/>
+        </p:nvSpPr>
+        <p:spPr>
+          <a:xfrm>
+            <a:off x="7799832" y="2039112"/>
+            <a:ext cx="3678631" cy="510235"/>
+          </a:xfrm>
+          <a:prstGeom prst="rect">
+            <a:avLst/>
+          </a:prstGeom>
+          <a:noFill/>
+          <a:ln/>
+        </p:spPr>
+        <p:txBody>
+          <a:bodyPr wrap="square" lIns="0" tIns="0" rIns="0" bIns="0" rtlCol="0" anchor="t"/>
+          <a:lstStyle/>
+          <a:p>
+            <a:pPr algn="l" indent="0" marL="0">
               <a:buNone/>
             </a:pPr>
             <a:r>
@@ -3622,26 +3669,26 @@
                 <a:ea typeface="Calibri" pitchFamily="34" charset="-122"/>
                 <a:cs typeface="Calibri" pitchFamily="34" charset="-120"/>
               </a:rPr>
-              <a:t>Too weak</a:t>
-            </a:r>
-            <a:endParaRPr lang="en-US" sz="1150" dirty="0"/>
-          </a:p>
-        </p:txBody>
-      </p:sp>
-      <p:sp>
-        <p:nvSpPr>
-          <p:cNvPr id="7" name="Shape 4"/>
-          <p:cNvSpPr/>
-          <p:nvPr/>
-        </p:nvSpPr>
-        <p:spPr>
-          <a:xfrm>
-            <a:off x="3367964" y="5440680"/>
-            <a:ext cx="2636444" cy="502920"/>
+              <a:t>MAX LOAD, n=16 — POWER-2 vs REFERENCE</a:t>
+            </a:r>
+            <a:endParaRPr lang="en-US" sz="1050" dirty="0"/>
+          </a:p>
+        </p:txBody>
+      </p:sp>
+      <p:sp>
+        <p:nvSpPr>
+          <p:cNvPr id="8" name="Shape 5"/>
+          <p:cNvSpPr/>
+          <p:nvPr/>
+        </p:nvSpPr>
+        <p:spPr>
+          <a:xfrm>
+            <a:off x="7635240" y="2743200"/>
+            <a:ext cx="4007815" cy="1417320"/>
           </a:xfrm>
           <a:prstGeom prst="roundRect">
             <a:avLst>
-              <a:gd name="adj" fmla="val 10909"/>
+              <a:gd name="adj" fmla="val 5161"/>
             </a:avLst>
           </a:prstGeom>
           <a:solidFill>
@@ -3652,53 +3699,111 @@
       </p:sp>
       <p:sp>
         <p:nvSpPr>
-          <p:cNvPr id="8" name="Text 5"/>
-          <p:cNvSpPr/>
-          <p:nvPr/>
-        </p:nvSpPr>
-        <p:spPr>
-          <a:xfrm>
-            <a:off x="3505124" y="5440680"/>
-            <a:ext cx="2362124" cy="502920"/>
-          </a:xfrm>
-          <a:prstGeom prst="rect">
-            <a:avLst/>
-          </a:prstGeom>
-          <a:noFill/>
-          <a:ln/>
-        </p:spPr>
-        <p:txBody>
-          <a:bodyPr wrap="square" lIns="0" tIns="0" rIns="0" bIns="0" rtlCol="0" anchor="ctr"/>
+          <p:cNvPr id="9" name="Text 6"/>
+          <p:cNvSpPr/>
+          <p:nvPr/>
+        </p:nvSpPr>
+        <p:spPr>
+          <a:xfrm>
+            <a:off x="7799832" y="2816352"/>
+            <a:ext cx="3678631" cy="822046"/>
+          </a:xfrm>
+          <a:prstGeom prst="rect">
+            <a:avLst/>
+          </a:prstGeom>
+          <a:noFill/>
+          <a:ln/>
+        </p:spPr>
+        <p:txBody>
+          <a:bodyPr wrap="square" lIns="0" tIns="0" rIns="0" bIns="0" rtlCol="0" anchor="b"/>
+          <a:lstStyle/>
+          <a:p>
+            <a:pPr algn="l" indent="0" marL="0">
+              <a:buNone/>
+            </a:pPr>
+            <a:r>
+              <a:rPr lang="en-US" sz="2200" b="1" dirty="0">
+                <a:solidFill>
+                  <a:srgbClr val="475569"/>
+                </a:solidFill>
+                <a:latin typeface="Cambria" pitchFamily="34" charset="0"/>
+                <a:ea typeface="Cambria" pitchFamily="34" charset="-122"/>
+                <a:cs typeface="Cambria" pitchFamily="34" charset="-120"/>
+              </a:rPr>
+              <a:t>365.4  vs  364.0</a:t>
+            </a:r>
+            <a:endParaRPr lang="en-US" sz="2200" dirty="0"/>
+          </a:p>
+        </p:txBody>
+      </p:sp>
+      <p:sp>
+        <p:nvSpPr>
+          <p:cNvPr id="10" name="Text 7"/>
+          <p:cNvSpPr/>
+          <p:nvPr/>
+        </p:nvSpPr>
+        <p:spPr>
+          <a:xfrm>
+            <a:off x="7799832" y="3593592"/>
+            <a:ext cx="3678631" cy="510235"/>
+          </a:xfrm>
+          <a:prstGeom prst="rect">
+            <a:avLst/>
+          </a:prstGeom>
+          <a:noFill/>
+          <a:ln/>
+        </p:spPr>
+        <p:txBody>
+          <a:bodyPr wrap="square" lIns="0" tIns="0" rIns="0" bIns="0" rtlCol="0" anchor="t"/>
+          <a:lstStyle/>
+          <a:p>
+            <a:pPr algn="l" indent="0" marL="0">
+              <a:buNone/>
+            </a:pPr>
+            <a:r>
+              <a:rPr lang="en-US" sz="1050" dirty="0">
+                <a:solidFill>
+                  <a:srgbClr val="64748B"/>
+                </a:solidFill>
+                <a:latin typeface="Calibri" pitchFamily="34" charset="0"/>
+                <a:ea typeface="Calibri" pitchFamily="34" charset="-122"/>
+                <a:cs typeface="Calibri" pitchFamily="34" charset="-120"/>
+              </a:rPr>
+              <a:t>MAX LOAD, n=32 — POWER-2 vs REFERENCE</a:t>
+            </a:r>
+            <a:endParaRPr lang="en-US" sz="1050" dirty="0"/>
+          </a:p>
+        </p:txBody>
+      </p:sp>
+      <p:sp>
+        <p:nvSpPr>
+          <p:cNvPr id="11" name="Text 8"/>
+          <p:cNvSpPr/>
+          <p:nvPr/>
+        </p:nvSpPr>
+        <p:spPr>
+          <a:xfrm>
+            <a:off x="7635240" y="4343400"/>
+            <a:ext cx="4007815" cy="1097280"/>
+          </a:xfrm>
+          <a:prstGeom prst="rect">
+            <a:avLst/>
+          </a:prstGeom>
+          <a:noFill/>
+          <a:ln/>
+        </p:spPr>
+        <p:txBody>
+          <a:bodyPr wrap="square" lIns="0" tIns="0" rIns="0" bIns="0" rtlCol="0" anchor="t"/>
           <a:lstStyle/>
           <a:p>
             <a:pPr indent="0" marL="0">
               <a:lnSpc>
-                <a:spcPct val="100000"/>
+                <a:spcPct val="115000"/>
               </a:lnSpc>
               <a:buNone/>
             </a:pPr>
             <a:r>
-              <a:rPr lang="en-US" sz="1150" b="1" dirty="0">
-                <a:solidFill>
-                  <a:srgbClr val="2563EB"/>
-                </a:solidFill>
-                <a:latin typeface="Calibri" pitchFamily="34" charset="0"/>
-                <a:ea typeface="Calibri" pitchFamily="34" charset="-122"/>
-                <a:cs typeface="Calibri" pitchFamily="34" charset="-120"/>
-              </a:rPr>
-              <a:t>Absolute minimum</a:t>
-            </a:r>
-            <a:endParaRPr lang="en-US" sz="1150" dirty="0"/>
-          </a:p>
-          <a:p>
-            <a:pPr indent="0" marL="0">
-              <a:lnSpc>
-                <a:spcPct val="100000"/>
-              </a:lnSpc>
-              <a:buNone/>
-            </a:pPr>
-            <a:r>
-              <a:rPr lang="en-US" sz="1050" dirty="0">
+              <a:rPr lang="en-US" sz="1250" i="1" dirty="0">
                 <a:solidFill>
                   <a:srgbClr val="64748B"/>
                 </a:solidFill>
@@ -3706,183 +3811,15 @@
                 <a:ea typeface="Calibri" pitchFamily="34" charset="-122"/>
                 <a:cs typeface="Calibri" pitchFamily="34" charset="-120"/>
               </a:rPr>
-              <a:t>Expensive</a:t>
-            </a:r>
-            <a:endParaRPr lang="en-US" sz="1150" dirty="0"/>
-          </a:p>
-        </p:txBody>
-      </p:sp>
-      <p:sp>
-        <p:nvSpPr>
-          <p:cNvPr id="9" name="Shape 6"/>
-          <p:cNvSpPr/>
-          <p:nvPr/>
-        </p:nvSpPr>
-        <p:spPr>
-          <a:xfrm>
-            <a:off x="6187288" y="5440680"/>
-            <a:ext cx="2636444" cy="502920"/>
-          </a:xfrm>
-          <a:prstGeom prst="roundRect">
-            <a:avLst>
-              <a:gd name="adj" fmla="val 10909"/>
-            </a:avLst>
-          </a:prstGeom>
-          <a:solidFill>
-            <a:srgbClr val="F1F5F9"/>
-          </a:solidFill>
-          <a:ln/>
-        </p:spPr>
-      </p:sp>
-      <p:sp>
-        <p:nvSpPr>
-          <p:cNvPr id="10" name="Text 7"/>
-          <p:cNvSpPr/>
-          <p:nvPr/>
-        </p:nvSpPr>
-        <p:spPr>
-          <a:xfrm>
-            <a:off x="6324448" y="5440680"/>
-            <a:ext cx="2362124" cy="502920"/>
-          </a:xfrm>
-          <a:prstGeom prst="rect">
-            <a:avLst/>
-          </a:prstGeom>
-          <a:noFill/>
-          <a:ln/>
-        </p:spPr>
-        <p:txBody>
-          <a:bodyPr wrap="square" lIns="0" tIns="0" rIns="0" bIns="0" rtlCol="0" anchor="ctr"/>
-          <a:lstStyle/>
-          <a:p>
-            <a:pPr indent="0" marL="0">
-              <a:lnSpc>
-                <a:spcPct val="100000"/>
-              </a:lnSpc>
-              <a:buNone/>
-            </a:pPr>
-            <a:r>
-              <a:rPr lang="en-US" sz="1150" b="1" dirty="0">
-                <a:solidFill>
-                  <a:srgbClr val="15803D"/>
-                </a:solidFill>
-                <a:latin typeface="Calibri" pitchFamily="34" charset="0"/>
-                <a:ea typeface="Calibri" pitchFamily="34" charset="-122"/>
-                <a:cs typeface="Calibri" pitchFamily="34" charset="-120"/>
-              </a:rPr>
-              <a:t>Round-robin</a:t>
-            </a:r>
-            <a:endParaRPr lang="en-US" sz="1150" dirty="0"/>
-          </a:p>
-          <a:p>
-            <a:pPr indent="0" marL="0">
-              <a:lnSpc>
-                <a:spcPct val="100000"/>
-              </a:lnSpc>
-              <a:buNone/>
-            </a:pPr>
-            <a:r>
-              <a:rPr lang="en-US" sz="1050" dirty="0">
-                <a:solidFill>
-                  <a:srgbClr val="64748B"/>
-                </a:solidFill>
-                <a:latin typeface="Calibri" pitchFamily="34" charset="0"/>
-                <a:ea typeface="Calibri" pitchFamily="34" charset="-122"/>
-                <a:cs typeface="Calibri" pitchFamily="34" charset="-120"/>
-              </a:rPr>
-              <a:t>Fragile</a:t>
-            </a:r>
-            <a:endParaRPr lang="en-US" sz="1150" dirty="0"/>
-          </a:p>
-        </p:txBody>
-      </p:sp>
-      <p:sp>
-        <p:nvSpPr>
-          <p:cNvPr id="11" name="Shape 8"/>
-          <p:cNvSpPr/>
-          <p:nvPr/>
-        </p:nvSpPr>
-        <p:spPr>
-          <a:xfrm>
-            <a:off x="9006611" y="5440680"/>
-            <a:ext cx="2636444" cy="502920"/>
-          </a:xfrm>
-          <a:prstGeom prst="roundRect">
-            <a:avLst>
-              <a:gd name="adj" fmla="val 10909"/>
-            </a:avLst>
-          </a:prstGeom>
-          <a:solidFill>
-            <a:srgbClr val="F1F5F9"/>
-          </a:solidFill>
-          <a:ln/>
-        </p:spPr>
-      </p:sp>
-      <p:sp>
-        <p:nvSpPr>
-          <p:cNvPr id="12" name="Text 9"/>
-          <p:cNvSpPr/>
-          <p:nvPr/>
-        </p:nvSpPr>
-        <p:spPr>
-          <a:xfrm>
-            <a:off x="9143771" y="5440680"/>
-            <a:ext cx="2362124" cy="502920"/>
-          </a:xfrm>
-          <a:prstGeom prst="rect">
-            <a:avLst/>
-          </a:prstGeom>
-          <a:noFill/>
-          <a:ln/>
-        </p:spPr>
-        <p:txBody>
-          <a:bodyPr wrap="square" lIns="0" tIns="0" rIns="0" bIns="0" rtlCol="0" anchor="ctr"/>
-          <a:lstStyle/>
-          <a:p>
-            <a:pPr indent="0" marL="0">
-              <a:lnSpc>
-                <a:spcPct val="100000"/>
-              </a:lnSpc>
-              <a:buNone/>
-            </a:pPr>
-            <a:r>
-              <a:rPr lang="en-US" sz="1150" b="1" dirty="0">
-                <a:solidFill>
-                  <a:srgbClr val="C2660D"/>
-                </a:solidFill>
-                <a:latin typeface="Calibri" pitchFamily="34" charset="0"/>
-                <a:ea typeface="Calibri" pitchFamily="34" charset="-122"/>
-                <a:cs typeface="Calibri" pitchFamily="34" charset="-120"/>
-              </a:rPr>
-              <a:t>Power-2</a:t>
-            </a:r>
-            <a:endParaRPr lang="en-US" sz="1150" dirty="0"/>
-          </a:p>
-          <a:p>
-            <a:pPr indent="0" marL="0">
-              <a:lnSpc>
-                <a:spcPct val="100000"/>
-              </a:lnSpc>
-              <a:buNone/>
-            </a:pPr>
-            <a:r>
-              <a:rPr lang="en-US" sz="1050" dirty="0">
-                <a:solidFill>
-                  <a:srgbClr val="64748B"/>
-                </a:solidFill>
-                <a:latin typeface="Calibri" pitchFamily="34" charset="0"/>
-                <a:ea typeface="Calibri" pitchFamily="34" charset="-122"/>
-                <a:cs typeface="Calibri" pitchFamily="34" charset="-120"/>
-              </a:rPr>
-              <a:t>Simple, stateless, robust</a:t>
-            </a:r>
-            <a:endParaRPr lang="en-US" sz="1150" dirty="0"/>
-          </a:p>
-        </p:txBody>
-      </p:sp>
-      <p:sp>
-        <p:nvSpPr>
-          <p:cNvPr id="13" name="Shape 10"/>
+              <a:t>Real systems rarely start from zero. Round-robin can preserve — rather than correct — initial imbalance.</a:t>
+            </a:r>
+            <a:endParaRPr lang="en-US" sz="1250" dirty="0"/>
+          </a:p>
+        </p:txBody>
+      </p:sp>
+      <p:sp>
+        <p:nvSpPr>
+          <p:cNvPr id="12" name="Shape 9"/>
           <p:cNvSpPr/>
           <p:nvPr/>
         </p:nvSpPr>
@@ -3904,7 +3841,7 @@
       </p:sp>
       <p:sp>
         <p:nvSpPr>
-          <p:cNvPr id="14" name="Text 11"/>
+          <p:cNvPr id="13" name="Text 10"/>
           <p:cNvSpPr/>
           <p:nvPr/>
         </p:nvSpPr>
@@ -3935,7 +3872,7 @@
                 <a:ea typeface="Calibri" pitchFamily="34" charset="-122"/>
                 <a:cs typeface="Calibri" pitchFamily="34" charset="-120"/>
               </a:rPr>
-              <a:t>Under weighted, initialized conditions, Power-2 is the strongest simple default.</a:t>
+              <a:t>Starting from non-empty bins exposes whether a policy corrects imbalance or just preserves it.</a:t>
             </a:r>
             <a:endParaRPr lang="en-US" sz="1350" dirty="0"/>
           </a:p>
@@ -4006,7 +3943,7 @@
                 <a:ea typeface="Cambria" pitchFamily="34" charset="-122"/>
                 <a:cs typeface="Cambria" pitchFamily="34" charset="-120"/>
               </a:rPr>
-              <a:t>C++ Implementation Overview</a:t>
+              <a:t>Final Realistic Tradeoff: Weighted + Initialized</a:t>
             </a:r>
             <a:endParaRPr lang="en-US" sz="2900" dirty="0"/>
           </a:p>
@@ -4051,43 +3988,62 @@
           </a:p>
         </p:txBody>
       </p:sp>
-      <p:sp>
-        <p:nvSpPr>
-          <p:cNvPr id="4" name="Shape 2"/>
-          <p:cNvSpPr/>
-          <p:nvPr/>
-        </p:nvSpPr>
-        <p:spPr>
-          <a:xfrm>
-            <a:off x="700888" y="1417320"/>
-            <a:ext cx="1828800" cy="777240"/>
+      <p:pic>
+        <p:nvPicPr>
+          <p:cNvPr id="4" name="Image 0" descr="/home/claude/work/assets/plot_cost_quality_final.png">    </p:cNvPr>
+          <p:cNvPicPr>
+            <a:picLocks noChangeAspect="1"/>
+          </p:cNvPicPr>
+          <p:nvPr/>
+        </p:nvPicPr>
+        <p:blipFill>
+          <a:blip r:embed="rId1"/>
+          <a:stretch>
+            <a:fillRect/>
+          </a:stretch>
+        </p:blipFill>
+        <p:spPr>
+          <a:xfrm>
+            <a:off x="1340968" y="1143000"/>
+            <a:ext cx="9509760" cy="4075611"/>
+          </a:xfrm>
+          <a:prstGeom prst="rect">
+            <a:avLst/>
+          </a:prstGeom>
+        </p:spPr>
+      </p:pic>
+      <p:sp>
+        <p:nvSpPr>
+          <p:cNvPr id="5" name="Shape 2"/>
+          <p:cNvSpPr/>
+          <p:nvPr/>
+        </p:nvSpPr>
+        <p:spPr>
+          <a:xfrm>
+            <a:off x="548640" y="5440680"/>
+            <a:ext cx="2636444" cy="502920"/>
           </a:xfrm>
           <a:prstGeom prst="roundRect">
             <a:avLst>
-              <a:gd name="adj" fmla="val 9412"/>
+              <a:gd name="adj" fmla="val 10909"/>
             </a:avLst>
           </a:prstGeom>
           <a:solidFill>
             <a:srgbClr val="F1F5F9"/>
           </a:solidFill>
-          <a:ln w="12700">
-            <a:solidFill>
-              <a:srgbClr val="E2E8F0"/>
-            </a:solidFill>
-            <a:prstDash val="solid"/>
-          </a:ln>
-        </p:spPr>
-      </p:sp>
-      <p:sp>
-        <p:nvSpPr>
-          <p:cNvPr id="5" name="Text 3"/>
-          <p:cNvSpPr/>
-          <p:nvPr/>
-        </p:nvSpPr>
-        <p:spPr>
-          <a:xfrm>
-            <a:off x="700888" y="1417320"/>
-            <a:ext cx="1828800" cy="777240"/>
+          <a:ln/>
+        </p:spPr>
+      </p:sp>
+      <p:sp>
+        <p:nvSpPr>
+          <p:cNvPr id="6" name="Text 3"/>
+          <p:cNvSpPr/>
+          <p:nvPr/>
+        </p:nvSpPr>
+        <p:spPr>
+          <a:xfrm>
+            <a:off x="685800" y="5440680"/>
+            <a:ext cx="2362124" cy="502920"/>
           </a:xfrm>
           <a:prstGeom prst="rect">
             <a:avLst/>
@@ -4099,85 +4055,79 @@
           <a:bodyPr wrap="square" lIns="0" tIns="0" rIns="0" bIns="0" rtlCol="0" anchor="ctr"/>
           <a:lstStyle/>
           <a:p>
-            <a:pPr algn="ctr" indent="0" marL="0">
-              <a:buNone/>
-            </a:pPr>
-            <a:r>
-              <a:rPr lang="en-US" sz="1300" b="1" dirty="0">
-                <a:solidFill>
-                  <a:srgbClr val="1E293B"/>
-                </a:solidFill>
-                <a:latin typeface="Calibri" pitchFamily="34" charset="0"/>
-                <a:ea typeface="Calibri" pitchFamily="34" charset="-122"/>
-                <a:cs typeface="Calibri" pitchFamily="34" charset="-120"/>
-              </a:rPr>
-              <a:t>Scenarios</a:t>
-            </a:r>
-            <a:endParaRPr lang="en-US" sz="1300" dirty="0"/>
-          </a:p>
-        </p:txBody>
-      </p:sp>
-      <p:sp>
-        <p:nvSpPr>
-          <p:cNvPr id="6" name="Shape 4"/>
-          <p:cNvSpPr/>
-          <p:nvPr/>
-        </p:nvSpPr>
-        <p:spPr>
-          <a:xfrm>
-            <a:off x="2529688" y="1805940"/>
-            <a:ext cx="411480" cy="0"/>
-          </a:xfrm>
-          <a:prstGeom prst="line">
-            <a:avLst/>
-          </a:prstGeom>
-          <a:noFill/>
-          <a:ln w="19050">
-            <a:solidFill>
-              <a:srgbClr val="64748B"/>
-            </a:solidFill>
-            <a:prstDash val="solid"/>
-            <a:tailEnd type="triangle"/>
-          </a:ln>
-        </p:spPr>
-      </p:sp>
-      <p:sp>
-        <p:nvSpPr>
-          <p:cNvPr id="7" name="Shape 5"/>
-          <p:cNvSpPr/>
-          <p:nvPr/>
-        </p:nvSpPr>
-        <p:spPr>
-          <a:xfrm>
-            <a:off x="2941168" y="1417320"/>
-            <a:ext cx="1828800" cy="777240"/>
+            <a:pPr indent="0" marL="0">
+              <a:lnSpc>
+                <a:spcPct val="100000"/>
+              </a:lnSpc>
+              <a:buNone/>
+            </a:pPr>
+            <a:r>
+              <a:rPr lang="en-US" sz="1150" b="1" dirty="0">
+                <a:solidFill>
+                  <a:srgbClr val="475569"/>
+                </a:solidFill>
+                <a:latin typeface="Calibri" pitchFamily="34" charset="0"/>
+                <a:ea typeface="Calibri" pitchFamily="34" charset="-122"/>
+                <a:cs typeface="Calibri" pitchFamily="34" charset="-120"/>
+              </a:rPr>
+              <a:t>Random</a:t>
+            </a:r>
+            <a:endParaRPr lang="en-US" sz="1150" dirty="0"/>
+          </a:p>
+          <a:p>
+            <a:pPr indent="0" marL="0">
+              <a:lnSpc>
+                <a:spcPct val="100000"/>
+              </a:lnSpc>
+              <a:buNone/>
+            </a:pPr>
+            <a:r>
+              <a:rPr lang="en-US" sz="1050" dirty="0">
+                <a:solidFill>
+                  <a:srgbClr val="64748B"/>
+                </a:solidFill>
+                <a:latin typeface="Calibri" pitchFamily="34" charset="0"/>
+                <a:ea typeface="Calibri" pitchFamily="34" charset="-122"/>
+                <a:cs typeface="Calibri" pitchFamily="34" charset="-120"/>
+              </a:rPr>
+              <a:t>Too weak</a:t>
+            </a:r>
+            <a:endParaRPr lang="en-US" sz="1150" dirty="0"/>
+          </a:p>
+        </p:txBody>
+      </p:sp>
+      <p:sp>
+        <p:nvSpPr>
+          <p:cNvPr id="7" name="Shape 4"/>
+          <p:cNvSpPr/>
+          <p:nvPr/>
+        </p:nvSpPr>
+        <p:spPr>
+          <a:xfrm>
+            <a:off x="3367964" y="5440680"/>
+            <a:ext cx="2636444" cy="502920"/>
           </a:xfrm>
           <a:prstGeom prst="roundRect">
             <a:avLst>
-              <a:gd name="adj" fmla="val 9412"/>
+              <a:gd name="adj" fmla="val 10909"/>
             </a:avLst>
           </a:prstGeom>
           <a:solidFill>
             <a:srgbClr val="F1F5F9"/>
           </a:solidFill>
-          <a:ln w="12700">
-            <a:solidFill>
-              <a:srgbClr val="E2E8F0"/>
-            </a:solidFill>
-            <a:prstDash val="solid"/>
-          </a:ln>
-        </p:spPr>
-      </p:sp>
-      <p:sp>
-        <p:nvSpPr>
-          <p:cNvPr id="8" name="Text 6"/>
-          <p:cNvSpPr/>
-          <p:nvPr/>
-        </p:nvSpPr>
-        <p:spPr>
-          <a:xfrm>
-            <a:off x="2941168" y="1417320"/>
-            <a:ext cx="1828800" cy="777240"/>
+          <a:ln/>
+        </p:spPr>
+      </p:sp>
+      <p:sp>
+        <p:nvSpPr>
+          <p:cNvPr id="8" name="Text 5"/>
+          <p:cNvSpPr/>
+          <p:nvPr/>
+        </p:nvSpPr>
+        <p:spPr>
+          <a:xfrm>
+            <a:off x="3505124" y="5440680"/>
+            <a:ext cx="2362124" cy="502920"/>
           </a:xfrm>
           <a:prstGeom prst="rect">
             <a:avLst/>
@@ -4189,175 +4139,79 @@
           <a:bodyPr wrap="square" lIns="0" tIns="0" rIns="0" bIns="0" rtlCol="0" anchor="ctr"/>
           <a:lstStyle/>
           <a:p>
-            <a:pPr algn="ctr" indent="0" marL="0">
-              <a:buNone/>
-            </a:pPr>
-            <a:r>
-              <a:rPr lang="en-US" sz="1300" b="1" dirty="0">
-                <a:solidFill>
-                  <a:srgbClr val="1E293B"/>
-                </a:solidFill>
-                <a:latin typeface="Calibri" pitchFamily="34" charset="0"/>
-                <a:ea typeface="Calibri" pitchFamily="34" charset="-122"/>
-                <a:cs typeface="Calibri" pitchFamily="34" charset="-120"/>
-              </a:rPr>
-              <a:t>Simulators</a:t>
-            </a:r>
-            <a:endParaRPr lang="en-US" sz="1300" dirty="0"/>
-          </a:p>
-        </p:txBody>
-      </p:sp>
-      <p:sp>
-        <p:nvSpPr>
-          <p:cNvPr id="9" name="Shape 7"/>
-          <p:cNvSpPr/>
-          <p:nvPr/>
-        </p:nvSpPr>
-        <p:spPr>
-          <a:xfrm>
-            <a:off x="4769968" y="1805940"/>
-            <a:ext cx="411480" cy="0"/>
-          </a:xfrm>
-          <a:prstGeom prst="line">
-            <a:avLst/>
-          </a:prstGeom>
-          <a:noFill/>
-          <a:ln w="19050">
-            <a:solidFill>
-              <a:srgbClr val="64748B"/>
-            </a:solidFill>
-            <a:prstDash val="solid"/>
-            <a:tailEnd type="triangle"/>
-          </a:ln>
-        </p:spPr>
-      </p:sp>
-      <p:sp>
-        <p:nvSpPr>
-          <p:cNvPr id="10" name="Shape 8"/>
-          <p:cNvSpPr/>
-          <p:nvPr/>
-        </p:nvSpPr>
-        <p:spPr>
-          <a:xfrm>
-            <a:off x="5181448" y="1417320"/>
-            <a:ext cx="1828800" cy="777240"/>
+            <a:pPr indent="0" marL="0">
+              <a:lnSpc>
+                <a:spcPct val="100000"/>
+              </a:lnSpc>
+              <a:buNone/>
+            </a:pPr>
+            <a:r>
+              <a:rPr lang="en-US" sz="1150" b="1" dirty="0">
+                <a:solidFill>
+                  <a:srgbClr val="2563EB"/>
+                </a:solidFill>
+                <a:latin typeface="Calibri" pitchFamily="34" charset="0"/>
+                <a:ea typeface="Calibri" pitchFamily="34" charset="-122"/>
+                <a:cs typeface="Calibri" pitchFamily="34" charset="-120"/>
+              </a:rPr>
+              <a:t>Absolute minimum</a:t>
+            </a:r>
+            <a:endParaRPr lang="en-US" sz="1150" dirty="0"/>
+          </a:p>
+          <a:p>
+            <a:pPr indent="0" marL="0">
+              <a:lnSpc>
+                <a:spcPct val="100000"/>
+              </a:lnSpc>
+              <a:buNone/>
+            </a:pPr>
+            <a:r>
+              <a:rPr lang="en-US" sz="1050" dirty="0">
+                <a:solidFill>
+                  <a:srgbClr val="64748B"/>
+                </a:solidFill>
+                <a:latin typeface="Calibri" pitchFamily="34" charset="0"/>
+                <a:ea typeface="Calibri" pitchFamily="34" charset="-122"/>
+                <a:cs typeface="Calibri" pitchFamily="34" charset="-120"/>
+              </a:rPr>
+              <a:t>Expensive</a:t>
+            </a:r>
+            <a:endParaRPr lang="en-US" sz="1150" dirty="0"/>
+          </a:p>
+        </p:txBody>
+      </p:sp>
+      <p:sp>
+        <p:nvSpPr>
+          <p:cNvPr id="9" name="Shape 6"/>
+          <p:cNvSpPr/>
+          <p:nvPr/>
+        </p:nvSpPr>
+        <p:spPr>
+          <a:xfrm>
+            <a:off x="6187288" y="5440680"/>
+            <a:ext cx="2636444" cy="502920"/>
           </a:xfrm>
           <a:prstGeom prst="roundRect">
             <a:avLst>
-              <a:gd name="adj" fmla="val 9412"/>
-            </a:avLst>
-          </a:prstGeom>
-          <a:solidFill>
-            <a:srgbClr val="E8EFFD"/>
-          </a:solidFill>
-          <a:ln w="12700">
-            <a:solidFill>
-              <a:srgbClr val="E2E8F0"/>
-            </a:solidFill>
-            <a:prstDash val="solid"/>
-          </a:ln>
-        </p:spPr>
-      </p:sp>
-      <p:sp>
-        <p:nvSpPr>
-          <p:cNvPr id="11" name="Text 9"/>
-          <p:cNvSpPr/>
-          <p:nvPr/>
-        </p:nvSpPr>
-        <p:spPr>
-          <a:xfrm>
-            <a:off x="5181448" y="1417320"/>
-            <a:ext cx="1828800" cy="777240"/>
-          </a:xfrm>
-          <a:prstGeom prst="rect">
-            <a:avLst/>
-          </a:prstGeom>
-          <a:noFill/>
-          <a:ln/>
-        </p:spPr>
-        <p:txBody>
-          <a:bodyPr wrap="square" lIns="0" tIns="0" rIns="0" bIns="0" rtlCol="0" anchor="ctr"/>
-          <a:lstStyle/>
-          <a:p>
-            <a:pPr algn="ctr" indent="0" marL="0">
-              <a:buNone/>
-            </a:pPr>
-            <a:r>
-              <a:rPr lang="en-US" sz="1300" b="1" dirty="0">
-                <a:solidFill>
-                  <a:srgbClr val="1E293B"/>
-                </a:solidFill>
-                <a:latin typeface="Calibri" pitchFamily="34" charset="0"/>
-                <a:ea typeface="Calibri" pitchFamily="34" charset="-122"/>
-                <a:cs typeface="Calibri" pitchFamily="34" charset="-120"/>
-              </a:rPr>
-              <a:t>Metrics CSV</a:t>
-            </a:r>
-            <a:endParaRPr lang="en-US" sz="1300" dirty="0"/>
-          </a:p>
-        </p:txBody>
-      </p:sp>
-      <p:sp>
-        <p:nvSpPr>
-          <p:cNvPr id="12" name="Shape 10"/>
-          <p:cNvSpPr/>
-          <p:nvPr/>
-        </p:nvSpPr>
-        <p:spPr>
-          <a:xfrm>
-            <a:off x="7010248" y="1805940"/>
-            <a:ext cx="411480" cy="0"/>
-          </a:xfrm>
-          <a:prstGeom prst="line">
-            <a:avLst/>
-          </a:prstGeom>
-          <a:noFill/>
-          <a:ln w="19050">
-            <a:solidFill>
-              <a:srgbClr val="64748B"/>
-            </a:solidFill>
-            <a:prstDash val="solid"/>
-            <a:tailEnd type="triangle"/>
-          </a:ln>
-        </p:spPr>
-      </p:sp>
-      <p:sp>
-        <p:nvSpPr>
-          <p:cNvPr id="13" name="Shape 11"/>
-          <p:cNvSpPr/>
-          <p:nvPr/>
-        </p:nvSpPr>
-        <p:spPr>
-          <a:xfrm>
-            <a:off x="7421728" y="1417320"/>
-            <a:ext cx="1828800" cy="777240"/>
-          </a:xfrm>
-          <a:prstGeom prst="roundRect">
-            <a:avLst>
-              <a:gd name="adj" fmla="val 9412"/>
+              <a:gd name="adj" fmla="val 10909"/>
             </a:avLst>
           </a:prstGeom>
           <a:solidFill>
             <a:srgbClr val="F1F5F9"/>
           </a:solidFill>
-          <a:ln w="12700">
-            <a:solidFill>
-              <a:srgbClr val="E2E8F0"/>
-            </a:solidFill>
-            <a:prstDash val="solid"/>
-          </a:ln>
-        </p:spPr>
-      </p:sp>
-      <p:sp>
-        <p:nvSpPr>
-          <p:cNvPr id="14" name="Text 12"/>
-          <p:cNvSpPr/>
-          <p:nvPr/>
-        </p:nvSpPr>
-        <p:spPr>
-          <a:xfrm>
-            <a:off x="7421728" y="1417320"/>
-            <a:ext cx="1828800" cy="777240"/>
+          <a:ln/>
+        </p:spPr>
+      </p:sp>
+      <p:sp>
+        <p:nvSpPr>
+          <p:cNvPr id="10" name="Text 7"/>
+          <p:cNvSpPr/>
+          <p:nvPr/>
+        </p:nvSpPr>
+        <p:spPr>
+          <a:xfrm>
+            <a:off x="6324448" y="5440680"/>
+            <a:ext cx="2362124" cy="502920"/>
           </a:xfrm>
           <a:prstGeom prst="rect">
             <a:avLst/>
@@ -4369,85 +4223,79 @@
           <a:bodyPr wrap="square" lIns="0" tIns="0" rIns="0" bIns="0" rtlCol="0" anchor="ctr"/>
           <a:lstStyle/>
           <a:p>
-            <a:pPr algn="ctr" indent="0" marL="0">
-              <a:buNone/>
-            </a:pPr>
-            <a:r>
-              <a:rPr lang="en-US" sz="1300" b="1" dirty="0">
-                <a:solidFill>
-                  <a:srgbClr val="1E293B"/>
-                </a:solidFill>
-                <a:latin typeface="Calibri" pitchFamily="34" charset="0"/>
-                <a:ea typeface="Calibri" pitchFamily="34" charset="-122"/>
-                <a:cs typeface="Calibri" pitchFamily="34" charset="-120"/>
-              </a:rPr>
-              <a:t>Plots</a:t>
-            </a:r>
-            <a:endParaRPr lang="en-US" sz="1300" dirty="0"/>
-          </a:p>
-        </p:txBody>
-      </p:sp>
-      <p:sp>
-        <p:nvSpPr>
-          <p:cNvPr id="15" name="Shape 13"/>
-          <p:cNvSpPr/>
-          <p:nvPr/>
-        </p:nvSpPr>
-        <p:spPr>
-          <a:xfrm>
-            <a:off x="9250528" y="1805940"/>
-            <a:ext cx="411480" cy="0"/>
-          </a:xfrm>
-          <a:prstGeom prst="line">
-            <a:avLst/>
-          </a:prstGeom>
-          <a:noFill/>
-          <a:ln w="19050">
-            <a:solidFill>
-              <a:srgbClr val="64748B"/>
-            </a:solidFill>
-            <a:prstDash val="solid"/>
-            <a:tailEnd type="triangle"/>
-          </a:ln>
-        </p:spPr>
-      </p:sp>
-      <p:sp>
-        <p:nvSpPr>
-          <p:cNvPr id="16" name="Shape 14"/>
-          <p:cNvSpPr/>
-          <p:nvPr/>
-        </p:nvSpPr>
-        <p:spPr>
-          <a:xfrm>
-            <a:off x="9662008" y="1417320"/>
-            <a:ext cx="1828800" cy="777240"/>
+            <a:pPr indent="0" marL="0">
+              <a:lnSpc>
+                <a:spcPct val="100000"/>
+              </a:lnSpc>
+              <a:buNone/>
+            </a:pPr>
+            <a:r>
+              <a:rPr lang="en-US" sz="1150" b="1" dirty="0">
+                <a:solidFill>
+                  <a:srgbClr val="15803D"/>
+                </a:solidFill>
+                <a:latin typeface="Calibri" pitchFamily="34" charset="0"/>
+                <a:ea typeface="Calibri" pitchFamily="34" charset="-122"/>
+                <a:cs typeface="Calibri" pitchFamily="34" charset="-120"/>
+              </a:rPr>
+              <a:t>Round-robin</a:t>
+            </a:r>
+            <a:endParaRPr lang="en-US" sz="1150" dirty="0"/>
+          </a:p>
+          <a:p>
+            <a:pPr indent="0" marL="0">
+              <a:lnSpc>
+                <a:spcPct val="100000"/>
+              </a:lnSpc>
+              <a:buNone/>
+            </a:pPr>
+            <a:r>
+              <a:rPr lang="en-US" sz="1050" dirty="0">
+                <a:solidFill>
+                  <a:srgbClr val="64748B"/>
+                </a:solidFill>
+                <a:latin typeface="Calibri" pitchFamily="34" charset="0"/>
+                <a:ea typeface="Calibri" pitchFamily="34" charset="-122"/>
+                <a:cs typeface="Calibri" pitchFamily="34" charset="-120"/>
+              </a:rPr>
+              <a:t>Fragile</a:t>
+            </a:r>
+            <a:endParaRPr lang="en-US" sz="1150" dirty="0"/>
+          </a:p>
+        </p:txBody>
+      </p:sp>
+      <p:sp>
+        <p:nvSpPr>
+          <p:cNvPr id="11" name="Shape 8"/>
+          <p:cNvSpPr/>
+          <p:nvPr/>
+        </p:nvSpPr>
+        <p:spPr>
+          <a:xfrm>
+            <a:off x="9006611" y="5440680"/>
+            <a:ext cx="2636444" cy="502920"/>
           </a:xfrm>
           <a:prstGeom prst="roundRect">
             <a:avLst>
-              <a:gd name="adj" fmla="val 9412"/>
+              <a:gd name="adj" fmla="val 10909"/>
             </a:avLst>
           </a:prstGeom>
           <a:solidFill>
             <a:srgbClr val="F1F5F9"/>
           </a:solidFill>
-          <a:ln w="12700">
-            <a:solidFill>
-              <a:srgbClr val="E2E8F0"/>
-            </a:solidFill>
-            <a:prstDash val="solid"/>
-          </a:ln>
-        </p:spPr>
-      </p:sp>
-      <p:sp>
-        <p:nvSpPr>
-          <p:cNvPr id="17" name="Text 15"/>
-          <p:cNvSpPr/>
-          <p:nvPr/>
-        </p:nvSpPr>
-        <p:spPr>
-          <a:xfrm>
-            <a:off x="9662008" y="1417320"/>
-            <a:ext cx="1828800" cy="777240"/>
+          <a:ln/>
+        </p:spPr>
+      </p:sp>
+      <p:sp>
+        <p:nvSpPr>
+          <p:cNvPr id="12" name="Text 9"/>
+          <p:cNvSpPr/>
+          <p:nvPr/>
+        </p:nvSpPr>
+        <p:spPr>
+          <a:xfrm>
+            <a:off x="9143771" y="5440680"/>
+            <a:ext cx="2362124" cy="502920"/>
           </a:xfrm>
           <a:prstGeom prst="rect">
             <a:avLst/>
@@ -4457,522 +4305,52 @@
         </p:spPr>
         <p:txBody>
           <a:bodyPr wrap="square" lIns="0" tIns="0" rIns="0" bIns="0" rtlCol="0" anchor="ctr"/>
-          <a:lstStyle/>
-          <a:p>
-            <a:pPr algn="ctr" indent="0" marL="0">
-              <a:buNone/>
-            </a:pPr>
-            <a:r>
-              <a:rPr lang="en-US" sz="1300" b="1" dirty="0">
-                <a:solidFill>
-                  <a:srgbClr val="1E293B"/>
-                </a:solidFill>
-                <a:latin typeface="Calibri" pitchFamily="34" charset="0"/>
-                <a:ea typeface="Calibri" pitchFamily="34" charset="-122"/>
-                <a:cs typeface="Calibri" pitchFamily="34" charset="-120"/>
-              </a:rPr>
-              <a:t>Conclusions</a:t>
-            </a:r>
-            <a:endParaRPr lang="en-US" sz="1300" dirty="0"/>
-          </a:p>
-        </p:txBody>
-      </p:sp>
-      <p:sp>
-        <p:nvSpPr>
-          <p:cNvPr id="18" name="Text 16"/>
-          <p:cNvSpPr/>
-          <p:nvPr/>
-        </p:nvSpPr>
-        <p:spPr>
-          <a:xfrm>
-            <a:off x="548640" y="2606040"/>
-            <a:ext cx="11094415" cy="365760"/>
-          </a:xfrm>
-          <a:prstGeom prst="rect">
-            <a:avLst/>
-          </a:prstGeom>
-          <a:noFill/>
-          <a:ln/>
-        </p:spPr>
-        <p:txBody>
-          <a:bodyPr wrap="square" lIns="0" tIns="0" rIns="0" bIns="0" rtlCol="0" anchor="ctr"/>
-          <a:lstStyle/>
-          <a:p>
-            <a:pPr indent="0" marL="0">
-              <a:buNone/>
-            </a:pPr>
-            <a:r>
-              <a:rPr lang="en-US" sz="1350" b="1" dirty="0">
-                <a:solidFill>
-                  <a:srgbClr val="1E293B"/>
-                </a:solidFill>
-                <a:latin typeface="Calibri" pitchFamily="34" charset="0"/>
-                <a:ea typeface="Calibri" pitchFamily="34" charset="-122"/>
-                <a:cs typeface="Calibri" pitchFamily="34" charset="-120"/>
-              </a:rPr>
-              <a:t>src/main.cpp</a:t>
-            </a:r>
-            <a:pPr indent="0" marL="0">
-              <a:buNone/>
-            </a:pPr>
-            <a:r>
-              <a:rPr lang="en-US" sz="1350" dirty="0">
-                <a:solidFill>
-                  <a:srgbClr val="1E293B"/>
-                </a:solidFill>
-                <a:latin typeface="Calibri" pitchFamily="34" charset="0"/>
-                <a:ea typeface="Calibri" pitchFamily="34" charset="-122"/>
-                <a:cs typeface="Calibri" pitchFamily="34" charset="-120"/>
-              </a:rPr>
-              <a:t> builds scenarios, runs them, and exports </a:t>
-            </a:r>
-            <a:pPr indent="0" marL="0">
-              <a:buNone/>
-            </a:pPr>
-            <a:r>
-              <a:rPr lang="en-US" sz="1350" b="1" dirty="0">
-                <a:solidFill>
-                  <a:srgbClr val="1E293B"/>
-                </a:solidFill>
-                <a:latin typeface="Calibri" pitchFamily="34" charset="0"/>
-                <a:ea typeface="Calibri" pitchFamily="34" charset="-122"/>
-                <a:cs typeface="Calibri" pitchFamily="34" charset="-120"/>
-              </a:rPr>
-              <a:t>results/simulation_results.csv</a:t>
-            </a:r>
-            <a:pPr indent="0" marL="0">
-              <a:buNone/>
-            </a:pPr>
-            <a:r>
-              <a:rPr lang="en-US" sz="1350" dirty="0">
-                <a:solidFill>
-                  <a:srgbClr val="1E293B"/>
-                </a:solidFill>
-                <a:latin typeface="Calibri" pitchFamily="34" charset="0"/>
-                <a:ea typeface="Calibri" pitchFamily="34" charset="-122"/>
-                <a:cs typeface="Calibri" pitchFamily="34" charset="-120"/>
-              </a:rPr>
-              <a:t>.</a:t>
-            </a:r>
-            <a:endParaRPr lang="en-US" sz="1350" dirty="0"/>
-          </a:p>
-        </p:txBody>
-      </p:sp>
-      <p:sp>
-        <p:nvSpPr>
-          <p:cNvPr id="19" name="Text 17"/>
-          <p:cNvSpPr/>
-          <p:nvPr/>
-        </p:nvSpPr>
-        <p:spPr>
-          <a:xfrm>
-            <a:off x="548640" y="2990088"/>
-            <a:ext cx="11094415" cy="365760"/>
-          </a:xfrm>
-          <a:prstGeom prst="rect">
-            <a:avLst/>
-          </a:prstGeom>
-          <a:noFill/>
-          <a:ln/>
-        </p:spPr>
-        <p:txBody>
-          <a:bodyPr wrap="square" lIns="0" tIns="0" rIns="0" bIns="0" rtlCol="0" anchor="ctr"/>
-          <a:lstStyle/>
-          <a:p>
-            <a:pPr indent="0" marL="0">
-              <a:buNone/>
-            </a:pPr>
-            <a:r>
-              <a:rPr lang="en-US" sz="1350" b="1" dirty="0">
-                <a:solidFill>
-                  <a:srgbClr val="1E293B"/>
-                </a:solidFill>
-                <a:latin typeface="Calibri" pitchFamily="34" charset="0"/>
-                <a:ea typeface="Calibri" pitchFamily="34" charset="-122"/>
-                <a:cs typeface="Calibri" pitchFamily="34" charset="-120"/>
-              </a:rPr>
-              <a:t>ExperimentRunner</a:t>
-            </a:r>
-            <a:pPr indent="0" marL="0">
-              <a:buNone/>
-            </a:pPr>
-            <a:r>
-              <a:rPr lang="en-US" sz="1350" dirty="0">
-                <a:solidFill>
-                  <a:srgbClr val="1E293B"/>
-                </a:solidFill>
-                <a:latin typeface="Calibri" pitchFamily="34" charset="0"/>
-                <a:ea typeface="Calibri" pitchFamily="34" charset="-122"/>
-                <a:cs typeface="Calibri" pitchFamily="34" charset="-120"/>
-              </a:rPr>
-              <a:t> creates all experiment scenarios.</a:t>
-            </a:r>
-            <a:endParaRPr lang="en-US" sz="1350" dirty="0"/>
-          </a:p>
-        </p:txBody>
-      </p:sp>
-      <p:sp>
-        <p:nvSpPr>
-          <p:cNvPr id="20" name="Shape 18"/>
-          <p:cNvSpPr/>
-          <p:nvPr/>
-        </p:nvSpPr>
-        <p:spPr>
-          <a:xfrm>
-            <a:off x="548640" y="3611880"/>
-            <a:ext cx="3576218" cy="1051560"/>
-          </a:xfrm>
-          <a:prstGeom prst="roundRect">
-            <a:avLst>
-              <a:gd name="adj" fmla="val 6087"/>
-            </a:avLst>
-          </a:prstGeom>
-          <a:solidFill>
-            <a:srgbClr val="F1F5F9"/>
-          </a:solidFill>
-          <a:ln/>
-        </p:spPr>
-      </p:sp>
-      <p:sp>
-        <p:nvSpPr>
-          <p:cNvPr id="21" name="Text 19"/>
-          <p:cNvSpPr/>
-          <p:nvPr/>
-        </p:nvSpPr>
-        <p:spPr>
-          <a:xfrm>
-            <a:off x="713232" y="3721608"/>
-            <a:ext cx="3247034" cy="457200"/>
-          </a:xfrm>
-          <a:prstGeom prst="rect">
-            <a:avLst/>
-          </a:prstGeom>
-          <a:noFill/>
-          <a:ln/>
-        </p:spPr>
-        <p:txBody>
-          <a:bodyPr wrap="square" lIns="0" tIns="0" rIns="0" bIns="0" rtlCol="0" anchor="t"/>
-          <a:lstStyle/>
-          <a:p>
-            <a:pPr indent="0" marL="0">
-              <a:buNone/>
-            </a:pPr>
-            <a:r>
-              <a:rPr lang="en-US" sz="1300" b="1" dirty="0">
-                <a:solidFill>
-                  <a:srgbClr val="2563EB"/>
-                </a:solidFill>
-                <a:latin typeface="Calibri" pitchFamily="34" charset="0"/>
-                <a:ea typeface="Calibri" pitchFamily="34" charset="-122"/>
-                <a:cs typeface="Calibri" pitchFamily="34" charset="-120"/>
-              </a:rPr>
-              <a:t>PowerKSimulator</a:t>
-            </a:r>
-            <a:endParaRPr lang="en-US" sz="1300" dirty="0"/>
-          </a:p>
-        </p:txBody>
-      </p:sp>
-      <p:sp>
-        <p:nvSpPr>
-          <p:cNvPr id="22" name="Text 20"/>
-          <p:cNvSpPr/>
-          <p:nvPr/>
-        </p:nvSpPr>
-        <p:spPr>
-          <a:xfrm>
-            <a:off x="713232" y="4178808"/>
-            <a:ext cx="3247034" cy="411480"/>
-          </a:xfrm>
-          <a:prstGeom prst="rect">
-            <a:avLst/>
-          </a:prstGeom>
-          <a:noFill/>
-          <a:ln/>
-        </p:spPr>
-        <p:txBody>
-          <a:bodyPr wrap="square" lIns="0" tIns="0" rIns="0" bIns="0" rtlCol="0" anchor="t"/>
-          <a:lstStyle/>
-          <a:p>
-            <a:pPr indent="0" marL="0">
-              <a:buNone/>
-            </a:pPr>
-            <a:r>
-              <a:rPr lang="en-US" sz="1150" dirty="0">
-                <a:solidFill>
-                  <a:srgbClr val="64748B"/>
-                </a:solidFill>
-                <a:latin typeface="Calibri" pitchFamily="34" charset="0"/>
-                <a:ea typeface="Calibri" pitchFamily="34" charset="-122"/>
-                <a:cs typeface="Calibri" pitchFamily="34" charset="-120"/>
-              </a:rPr>
-              <a:t>Random, Power-k, Absolute minimum</a:t>
-            </a:r>
-            <a:endParaRPr lang="en-US" sz="1150" dirty="0"/>
-          </a:p>
-        </p:txBody>
-      </p:sp>
-      <p:sp>
-        <p:nvSpPr>
-          <p:cNvPr id="23" name="Shape 21"/>
-          <p:cNvSpPr/>
-          <p:nvPr/>
-        </p:nvSpPr>
-        <p:spPr>
-          <a:xfrm>
-            <a:off x="4307738" y="3611880"/>
-            <a:ext cx="3576218" cy="1051560"/>
-          </a:xfrm>
-          <a:prstGeom prst="roundRect">
-            <a:avLst>
-              <a:gd name="adj" fmla="val 6087"/>
-            </a:avLst>
-          </a:prstGeom>
-          <a:solidFill>
-            <a:srgbClr val="F1F5F9"/>
-          </a:solidFill>
-          <a:ln/>
-        </p:spPr>
-      </p:sp>
-      <p:sp>
-        <p:nvSpPr>
-          <p:cNvPr id="24" name="Text 22"/>
-          <p:cNvSpPr/>
-          <p:nvPr/>
-        </p:nvSpPr>
-        <p:spPr>
-          <a:xfrm>
-            <a:off x="4472330" y="3721608"/>
-            <a:ext cx="3247034" cy="457200"/>
-          </a:xfrm>
-          <a:prstGeom prst="rect">
-            <a:avLst/>
-          </a:prstGeom>
-          <a:noFill/>
-          <a:ln/>
-        </p:spPr>
-        <p:txBody>
-          <a:bodyPr wrap="square" lIns="0" tIns="0" rIns="0" bIns="0" rtlCol="0" anchor="t"/>
-          <a:lstStyle/>
-          <a:p>
-            <a:pPr indent="0" marL="0">
-              <a:buNone/>
-            </a:pPr>
-            <a:r>
-              <a:rPr lang="en-US" sz="1300" b="1" dirty="0">
-                <a:solidFill>
-                  <a:srgbClr val="15803D"/>
-                </a:solidFill>
-                <a:latin typeface="Calibri" pitchFamily="34" charset="0"/>
-                <a:ea typeface="Calibri" pitchFamily="34" charset="-122"/>
-                <a:cs typeface="Calibri" pitchFamily="34" charset="-120"/>
-              </a:rPr>
-              <a:t>StatefulRoundRobinSimulator</a:t>
-            </a:r>
-            <a:endParaRPr lang="en-US" sz="1300" dirty="0"/>
-          </a:p>
-        </p:txBody>
-      </p:sp>
-      <p:sp>
-        <p:nvSpPr>
-          <p:cNvPr id="25" name="Text 23"/>
-          <p:cNvSpPr/>
-          <p:nvPr/>
-        </p:nvSpPr>
-        <p:spPr>
-          <a:xfrm>
-            <a:off x="4472330" y="4178808"/>
-            <a:ext cx="3247034" cy="411480"/>
-          </a:xfrm>
-          <a:prstGeom prst="rect">
-            <a:avLst/>
-          </a:prstGeom>
-          <a:noFill/>
-          <a:ln/>
-        </p:spPr>
-        <p:txBody>
-          <a:bodyPr wrap="square" lIns="0" tIns="0" rIns="0" bIns="0" rtlCol="0" anchor="t"/>
-          <a:lstStyle/>
-          <a:p>
-            <a:pPr indent="0" marL="0">
-              <a:buNone/>
-            </a:pPr>
-            <a:r>
-              <a:rPr lang="en-US" sz="1150" dirty="0">
-                <a:solidFill>
-                  <a:srgbClr val="64748B"/>
-                </a:solidFill>
-                <a:latin typeface="Calibri" pitchFamily="34" charset="0"/>
-                <a:ea typeface="Calibri" pitchFamily="34" charset="-122"/>
-                <a:cs typeface="Calibri" pitchFamily="34" charset="-120"/>
-              </a:rPr>
-              <a:t>Round-robin</a:t>
-            </a:r>
-            <a:endParaRPr lang="en-US" sz="1150" dirty="0"/>
-          </a:p>
-        </p:txBody>
-      </p:sp>
-      <p:sp>
-        <p:nvSpPr>
-          <p:cNvPr id="26" name="Shape 24"/>
-          <p:cNvSpPr/>
-          <p:nvPr/>
-        </p:nvSpPr>
-        <p:spPr>
-          <a:xfrm>
-            <a:off x="8066837" y="3611880"/>
-            <a:ext cx="3576218" cy="1051560"/>
-          </a:xfrm>
-          <a:prstGeom prst="roundRect">
-            <a:avLst>
-              <a:gd name="adj" fmla="val 6087"/>
-            </a:avLst>
-          </a:prstGeom>
-          <a:solidFill>
-            <a:srgbClr val="F1F5F9"/>
-          </a:solidFill>
-          <a:ln/>
-        </p:spPr>
-      </p:sp>
-      <p:sp>
-        <p:nvSpPr>
-          <p:cNvPr id="27" name="Text 25"/>
-          <p:cNvSpPr/>
-          <p:nvPr/>
-        </p:nvSpPr>
-        <p:spPr>
-          <a:xfrm>
-            <a:off x="8231429" y="3721608"/>
-            <a:ext cx="3247034" cy="457200"/>
-          </a:xfrm>
-          <a:prstGeom prst="rect">
-            <a:avLst/>
-          </a:prstGeom>
-          <a:noFill/>
-          <a:ln/>
-        </p:spPr>
-        <p:txBody>
-          <a:bodyPr wrap="square" lIns="0" tIns="0" rIns="0" bIns="0" rtlCol="0" anchor="t"/>
-          <a:lstStyle/>
-          <a:p>
-            <a:pPr indent="0" marL="0">
-              <a:buNone/>
-            </a:pPr>
-            <a:r>
-              <a:rPr lang="en-US" sz="1300" b="1" dirty="0">
-                <a:solidFill>
-                  <a:srgbClr val="C2660D"/>
-                </a:solidFill>
-                <a:latin typeface="Calibri" pitchFamily="34" charset="0"/>
-                <a:ea typeface="Calibri" pitchFamily="34" charset="-122"/>
-                <a:cs typeface="Calibri" pitchFamily="34" charset="-120"/>
-              </a:rPr>
-              <a:t>HeapSizeSPowerOfKSimulator</a:t>
-            </a:r>
-            <a:endParaRPr lang="en-US" sz="1300" dirty="0"/>
-          </a:p>
-        </p:txBody>
-      </p:sp>
-      <p:sp>
-        <p:nvSpPr>
-          <p:cNvPr id="28" name="Text 26"/>
-          <p:cNvSpPr/>
-          <p:nvPr/>
-        </p:nvSpPr>
-        <p:spPr>
-          <a:xfrm>
-            <a:off x="8231429" y="4178808"/>
-            <a:ext cx="3247034" cy="411480"/>
-          </a:xfrm>
-          <a:prstGeom prst="rect">
-            <a:avLst/>
-          </a:prstGeom>
-          <a:noFill/>
-          <a:ln/>
-        </p:spPr>
-        <p:txBody>
-          <a:bodyPr wrap="square" lIns="0" tIns="0" rIns="0" bIns="0" rtlCol="0" anchor="t"/>
-          <a:lstStyle/>
-          <a:p>
-            <a:pPr indent="0" marL="0">
-              <a:buNone/>
-            </a:pPr>
-            <a:r>
-              <a:rPr lang="en-US" sz="1150" dirty="0">
-                <a:solidFill>
-                  <a:srgbClr val="64748B"/>
-                </a:solidFill>
-                <a:latin typeface="Calibri" pitchFamily="34" charset="0"/>
-                <a:ea typeface="Calibri" pitchFamily="34" charset="-122"/>
-                <a:cs typeface="Calibri" pitchFamily="34" charset="-120"/>
-              </a:rPr>
-              <a:t>Heap size s / full heap</a:t>
-            </a:r>
-            <a:endParaRPr lang="en-US" sz="1150" dirty="0"/>
-          </a:p>
-        </p:txBody>
-      </p:sp>
-      <p:sp>
-        <p:nvSpPr>
-          <p:cNvPr id="29" name="Text 27"/>
-          <p:cNvSpPr/>
-          <p:nvPr/>
-        </p:nvSpPr>
-        <p:spPr>
-          <a:xfrm>
-            <a:off x="548640" y="4892040"/>
-            <a:ext cx="11094415" cy="640080"/>
-          </a:xfrm>
-          <a:prstGeom prst="rect">
-            <a:avLst/>
-          </a:prstGeom>
-          <a:noFill/>
-          <a:ln/>
-        </p:spPr>
-        <p:txBody>
-          <a:bodyPr wrap="square" lIns="0" tIns="0" rIns="0" bIns="0" rtlCol="0" anchor="t"/>
           <a:lstStyle/>
           <a:p>
             <a:pPr indent="0" marL="0">
               <a:lnSpc>
-                <a:spcPct val="115000"/>
+                <a:spcPct val="100000"/>
               </a:lnSpc>
               <a:buNone/>
             </a:pPr>
             <a:r>
-              <a:rPr lang="en-US" sz="1350" b="1" dirty="0">
-                <a:solidFill>
-                  <a:srgbClr val="1E293B"/>
-                </a:solidFill>
-                <a:latin typeface="Calibri" pitchFamily="34" charset="0"/>
-                <a:ea typeface="Calibri" pitchFamily="34" charset="-122"/>
-                <a:cs typeface="Calibri" pitchFamily="34" charset="-120"/>
-              </a:rPr>
-              <a:t>scripts/plot_results.py</a:t>
-            </a:r>
+              <a:rPr lang="en-US" sz="1150" b="1" dirty="0">
+                <a:solidFill>
+                  <a:srgbClr val="C2660D"/>
+                </a:solidFill>
+                <a:latin typeface="Calibri" pitchFamily="34" charset="0"/>
+                <a:ea typeface="Calibri" pitchFamily="34" charset="-122"/>
+                <a:cs typeface="Calibri" pitchFamily="34" charset="-120"/>
+              </a:rPr>
+              <a:t>Power-2</a:t>
+            </a:r>
+            <a:endParaRPr lang="en-US" sz="1150" dirty="0"/>
+          </a:p>
+          <a:p>
             <a:pPr indent="0" marL="0">
               <a:lnSpc>
-                <a:spcPct val="115000"/>
+                <a:spcPct val="100000"/>
               </a:lnSpc>
               <a:buNone/>
             </a:pPr>
             <a:r>
-              <a:rPr lang="en-US" sz="1350" dirty="0">
-                <a:solidFill>
-                  <a:srgbClr val="1E293B"/>
-                </a:solidFill>
-                <a:latin typeface="Calibri" pitchFamily="34" charset="0"/>
-                <a:ea typeface="Calibri" pitchFamily="34" charset="-122"/>
-                <a:cs typeface="Calibri" pitchFamily="34" charset="-120"/>
-              </a:rPr>
-              <a:t> reads the CSV and creates the plots. The deck uses repository outputs only.</a:t>
-            </a:r>
-            <a:endParaRPr lang="en-US" sz="1350" dirty="0"/>
-          </a:p>
-        </p:txBody>
-      </p:sp>
-      <p:sp>
-        <p:nvSpPr>
-          <p:cNvPr id="30" name="Shape 28"/>
+              <a:rPr lang="en-US" sz="1050" dirty="0">
+                <a:solidFill>
+                  <a:srgbClr val="64748B"/>
+                </a:solidFill>
+                <a:latin typeface="Calibri" pitchFamily="34" charset="0"/>
+                <a:ea typeface="Calibri" pitchFamily="34" charset="-122"/>
+                <a:cs typeface="Calibri" pitchFamily="34" charset="-120"/>
+              </a:rPr>
+              <a:t>Simple, stateless, robust</a:t>
+            </a:r>
+            <a:endParaRPr lang="en-US" sz="1150" dirty="0"/>
+          </a:p>
+        </p:txBody>
+      </p:sp>
+      <p:sp>
+        <p:nvSpPr>
+          <p:cNvPr id="13" name="Shape 10"/>
           <p:cNvSpPr/>
           <p:nvPr/>
         </p:nvSpPr>
@@ -4994,7 +4372,7 @@
       </p:sp>
       <p:sp>
         <p:nvSpPr>
-          <p:cNvPr id="31" name="Text 29"/>
+          <p:cNvPr id="14" name="Text 11"/>
           <p:cNvSpPr/>
           <p:nvPr/>
         </p:nvSpPr>
@@ -5025,7 +4403,7 @@
                 <a:ea typeface="Calibri" pitchFamily="34" charset="-122"/>
                 <a:cs typeface="Calibri" pitchFamily="34" charset="-120"/>
               </a:rPr>
-              <a:t>The project is structured as a repeatable performance-evaluation pipeline, not a one-off script.</a:t>
+              <a:t>Under weighted, initialized conditions, Power-2 is the strongest simple default.</a:t>
             </a:r>
             <a:endParaRPr lang="en-US" sz="1350" dirty="0"/>
           </a:p>
@@ -5042,6 +4420,1096 @@
 <file path=ppt/slides/slide14.xml><?xml version="1.0" encoding="utf-8"?>
 <p:sld xmlns:a="http://schemas.openxmlformats.org/drawingml/2006/main" xmlns:r="http://schemas.openxmlformats.org/officeDocument/2006/relationships" xmlns:p="http://schemas.openxmlformats.org/presentationml/2006/main">
   <p:cSld name="Slide 14">
+    <p:bg>
+      <p:bgPr>
+        <a:solidFill>
+          <a:srgbClr val="FFFFFF"/>
+        </a:solidFill>
+      </p:bgPr>
+    </p:bg>
+    <p:spTree>
+      <p:nvGrpSpPr>
+        <p:cNvPr id="1" name=""/>
+        <p:cNvGrpSpPr/>
+        <p:nvPr/>
+      </p:nvGrpSpPr>
+      <p:grpSpPr>
+        <a:xfrm>
+          <a:off x="0" y="0"/>
+          <a:ext cx="0" cy="0"/>
+          <a:chOff x="0" y="0"/>
+          <a:chExt cx="0" cy="0"/>
+        </a:xfrm>
+      </p:grpSpPr>
+      <p:sp>
+        <p:nvSpPr>
+          <p:cNvPr id="2" name="Text 0"/>
+          <p:cNvSpPr/>
+          <p:nvPr/>
+        </p:nvSpPr>
+        <p:spPr>
+          <a:xfrm>
+            <a:off x="548640" y="411480"/>
+            <a:ext cx="10515600" cy="594360"/>
+          </a:xfrm>
+          <a:prstGeom prst="rect">
+            <a:avLst/>
+          </a:prstGeom>
+          <a:noFill/>
+          <a:ln/>
+        </p:spPr>
+        <p:txBody>
+          <a:bodyPr wrap="square" lIns="0" tIns="0" rIns="0" bIns="0" rtlCol="0" anchor="ctr"/>
+          <a:lstStyle/>
+          <a:p>
+            <a:pPr algn="l" indent="0" marL="0">
+              <a:buNone/>
+            </a:pPr>
+            <a:r>
+              <a:rPr lang="en-US" sz="2900" b="1" dirty="0">
+                <a:solidFill>
+                  <a:srgbClr val="1E293B"/>
+                </a:solidFill>
+                <a:latin typeface="Cambria" pitchFamily="34" charset="0"/>
+                <a:ea typeface="Cambria" pitchFamily="34" charset="-122"/>
+                <a:cs typeface="Cambria" pitchFamily="34" charset="-120"/>
+              </a:rPr>
+              <a:t>C++ Implementation Overview</a:t>
+            </a:r>
+            <a:endParaRPr lang="en-US" sz="2900" dirty="0"/>
+          </a:p>
+        </p:txBody>
+      </p:sp>
+      <p:sp>
+        <p:nvSpPr>
+          <p:cNvPr id="3" name="Text 1"/>
+          <p:cNvSpPr/>
+          <p:nvPr/>
+        </p:nvSpPr>
+        <p:spPr>
+          <a:xfrm>
+            <a:off x="11505895" y="6473952"/>
+            <a:ext cx="411480" cy="274320"/>
+          </a:xfrm>
+          <a:prstGeom prst="rect">
+            <a:avLst/>
+          </a:prstGeom>
+          <a:noFill/>
+          <a:ln/>
+        </p:spPr>
+        <p:txBody>
+          <a:bodyPr wrap="square" lIns="0" tIns="0" rIns="0" bIns="0" rtlCol="0" anchor="ctr"/>
+          <a:lstStyle/>
+          <a:p>
+            <a:pPr algn="r" indent="0" marL="0">
+              <a:buNone/>
+            </a:pPr>
+            <a:r>
+              <a:rPr lang="en-US" sz="900" dirty="0">
+                <a:solidFill>
+                  <a:srgbClr val="64748B"/>
+                </a:solidFill>
+                <a:latin typeface="Calibri" pitchFamily="34" charset="0"/>
+                <a:ea typeface="Calibri" pitchFamily="34" charset="-122"/>
+                <a:cs typeface="Calibri" pitchFamily="34" charset="-120"/>
+              </a:rPr>
+              <a:t>14</a:t>
+            </a:r>
+            <a:endParaRPr lang="en-US" sz="900" dirty="0"/>
+          </a:p>
+        </p:txBody>
+      </p:sp>
+      <p:sp>
+        <p:nvSpPr>
+          <p:cNvPr id="4" name="Shape 2"/>
+          <p:cNvSpPr/>
+          <p:nvPr/>
+        </p:nvSpPr>
+        <p:spPr>
+          <a:xfrm>
+            <a:off x="700888" y="1417320"/>
+            <a:ext cx="1828800" cy="777240"/>
+          </a:xfrm>
+          <a:prstGeom prst="roundRect">
+            <a:avLst>
+              <a:gd name="adj" fmla="val 9412"/>
+            </a:avLst>
+          </a:prstGeom>
+          <a:solidFill>
+            <a:srgbClr val="F1F5F9"/>
+          </a:solidFill>
+          <a:ln w="12700">
+            <a:solidFill>
+              <a:srgbClr val="E2E8F0"/>
+            </a:solidFill>
+            <a:prstDash val="solid"/>
+          </a:ln>
+        </p:spPr>
+      </p:sp>
+      <p:sp>
+        <p:nvSpPr>
+          <p:cNvPr id="5" name="Text 3"/>
+          <p:cNvSpPr/>
+          <p:nvPr/>
+        </p:nvSpPr>
+        <p:spPr>
+          <a:xfrm>
+            <a:off x="700888" y="1417320"/>
+            <a:ext cx="1828800" cy="777240"/>
+          </a:xfrm>
+          <a:prstGeom prst="rect">
+            <a:avLst/>
+          </a:prstGeom>
+          <a:noFill/>
+          <a:ln/>
+        </p:spPr>
+        <p:txBody>
+          <a:bodyPr wrap="square" lIns="0" tIns="0" rIns="0" bIns="0" rtlCol="0" anchor="ctr"/>
+          <a:lstStyle/>
+          <a:p>
+            <a:pPr algn="ctr" indent="0" marL="0">
+              <a:buNone/>
+            </a:pPr>
+            <a:r>
+              <a:rPr lang="en-US" sz="1300" b="1" dirty="0">
+                <a:solidFill>
+                  <a:srgbClr val="1E293B"/>
+                </a:solidFill>
+                <a:latin typeface="Calibri" pitchFamily="34" charset="0"/>
+                <a:ea typeface="Calibri" pitchFamily="34" charset="-122"/>
+                <a:cs typeface="Calibri" pitchFamily="34" charset="-120"/>
+              </a:rPr>
+              <a:t>Scenarios</a:t>
+            </a:r>
+            <a:endParaRPr lang="en-US" sz="1300" dirty="0"/>
+          </a:p>
+        </p:txBody>
+      </p:sp>
+      <p:sp>
+        <p:nvSpPr>
+          <p:cNvPr id="6" name="Shape 4"/>
+          <p:cNvSpPr/>
+          <p:nvPr/>
+        </p:nvSpPr>
+        <p:spPr>
+          <a:xfrm>
+            <a:off x="2529688" y="1805940"/>
+            <a:ext cx="411480" cy="0"/>
+          </a:xfrm>
+          <a:prstGeom prst="line">
+            <a:avLst/>
+          </a:prstGeom>
+          <a:noFill/>
+          <a:ln w="19050">
+            <a:solidFill>
+              <a:srgbClr val="64748B"/>
+            </a:solidFill>
+            <a:prstDash val="solid"/>
+            <a:tailEnd type="triangle"/>
+          </a:ln>
+        </p:spPr>
+      </p:sp>
+      <p:sp>
+        <p:nvSpPr>
+          <p:cNvPr id="7" name="Shape 5"/>
+          <p:cNvSpPr/>
+          <p:nvPr/>
+        </p:nvSpPr>
+        <p:spPr>
+          <a:xfrm>
+            <a:off x="2941168" y="1417320"/>
+            <a:ext cx="1828800" cy="777240"/>
+          </a:xfrm>
+          <a:prstGeom prst="roundRect">
+            <a:avLst>
+              <a:gd name="adj" fmla="val 9412"/>
+            </a:avLst>
+          </a:prstGeom>
+          <a:solidFill>
+            <a:srgbClr val="F1F5F9"/>
+          </a:solidFill>
+          <a:ln w="12700">
+            <a:solidFill>
+              <a:srgbClr val="E2E8F0"/>
+            </a:solidFill>
+            <a:prstDash val="solid"/>
+          </a:ln>
+        </p:spPr>
+      </p:sp>
+      <p:sp>
+        <p:nvSpPr>
+          <p:cNvPr id="8" name="Text 6"/>
+          <p:cNvSpPr/>
+          <p:nvPr/>
+        </p:nvSpPr>
+        <p:spPr>
+          <a:xfrm>
+            <a:off x="2941168" y="1417320"/>
+            <a:ext cx="1828800" cy="777240"/>
+          </a:xfrm>
+          <a:prstGeom prst="rect">
+            <a:avLst/>
+          </a:prstGeom>
+          <a:noFill/>
+          <a:ln/>
+        </p:spPr>
+        <p:txBody>
+          <a:bodyPr wrap="square" lIns="0" tIns="0" rIns="0" bIns="0" rtlCol="0" anchor="ctr"/>
+          <a:lstStyle/>
+          <a:p>
+            <a:pPr algn="ctr" indent="0" marL="0">
+              <a:buNone/>
+            </a:pPr>
+            <a:r>
+              <a:rPr lang="en-US" sz="1300" b="1" dirty="0">
+                <a:solidFill>
+                  <a:srgbClr val="1E293B"/>
+                </a:solidFill>
+                <a:latin typeface="Calibri" pitchFamily="34" charset="0"/>
+                <a:ea typeface="Calibri" pitchFamily="34" charset="-122"/>
+                <a:cs typeface="Calibri" pitchFamily="34" charset="-120"/>
+              </a:rPr>
+              <a:t>Simulators</a:t>
+            </a:r>
+            <a:endParaRPr lang="en-US" sz="1300" dirty="0"/>
+          </a:p>
+        </p:txBody>
+      </p:sp>
+      <p:sp>
+        <p:nvSpPr>
+          <p:cNvPr id="9" name="Shape 7"/>
+          <p:cNvSpPr/>
+          <p:nvPr/>
+        </p:nvSpPr>
+        <p:spPr>
+          <a:xfrm>
+            <a:off x="4769968" y="1805940"/>
+            <a:ext cx="411480" cy="0"/>
+          </a:xfrm>
+          <a:prstGeom prst="line">
+            <a:avLst/>
+          </a:prstGeom>
+          <a:noFill/>
+          <a:ln w="19050">
+            <a:solidFill>
+              <a:srgbClr val="64748B"/>
+            </a:solidFill>
+            <a:prstDash val="solid"/>
+            <a:tailEnd type="triangle"/>
+          </a:ln>
+        </p:spPr>
+      </p:sp>
+      <p:sp>
+        <p:nvSpPr>
+          <p:cNvPr id="10" name="Shape 8"/>
+          <p:cNvSpPr/>
+          <p:nvPr/>
+        </p:nvSpPr>
+        <p:spPr>
+          <a:xfrm>
+            <a:off x="5181448" y="1417320"/>
+            <a:ext cx="1828800" cy="777240"/>
+          </a:xfrm>
+          <a:prstGeom prst="roundRect">
+            <a:avLst>
+              <a:gd name="adj" fmla="val 9412"/>
+            </a:avLst>
+          </a:prstGeom>
+          <a:solidFill>
+            <a:srgbClr val="E8EFFD"/>
+          </a:solidFill>
+          <a:ln w="12700">
+            <a:solidFill>
+              <a:srgbClr val="E2E8F0"/>
+            </a:solidFill>
+            <a:prstDash val="solid"/>
+          </a:ln>
+        </p:spPr>
+      </p:sp>
+      <p:sp>
+        <p:nvSpPr>
+          <p:cNvPr id="11" name="Text 9"/>
+          <p:cNvSpPr/>
+          <p:nvPr/>
+        </p:nvSpPr>
+        <p:spPr>
+          <a:xfrm>
+            <a:off x="5181448" y="1417320"/>
+            <a:ext cx="1828800" cy="777240"/>
+          </a:xfrm>
+          <a:prstGeom prst="rect">
+            <a:avLst/>
+          </a:prstGeom>
+          <a:noFill/>
+          <a:ln/>
+        </p:spPr>
+        <p:txBody>
+          <a:bodyPr wrap="square" lIns="0" tIns="0" rIns="0" bIns="0" rtlCol="0" anchor="ctr"/>
+          <a:lstStyle/>
+          <a:p>
+            <a:pPr algn="ctr" indent="0" marL="0">
+              <a:buNone/>
+            </a:pPr>
+            <a:r>
+              <a:rPr lang="en-US" sz="1300" b="1" dirty="0">
+                <a:solidFill>
+                  <a:srgbClr val="1E293B"/>
+                </a:solidFill>
+                <a:latin typeface="Calibri" pitchFamily="34" charset="0"/>
+                <a:ea typeface="Calibri" pitchFamily="34" charset="-122"/>
+                <a:cs typeface="Calibri" pitchFamily="34" charset="-120"/>
+              </a:rPr>
+              <a:t>Metrics CSV</a:t>
+            </a:r>
+            <a:endParaRPr lang="en-US" sz="1300" dirty="0"/>
+          </a:p>
+        </p:txBody>
+      </p:sp>
+      <p:sp>
+        <p:nvSpPr>
+          <p:cNvPr id="12" name="Shape 10"/>
+          <p:cNvSpPr/>
+          <p:nvPr/>
+        </p:nvSpPr>
+        <p:spPr>
+          <a:xfrm>
+            <a:off x="7010248" y="1805940"/>
+            <a:ext cx="411480" cy="0"/>
+          </a:xfrm>
+          <a:prstGeom prst="line">
+            <a:avLst/>
+          </a:prstGeom>
+          <a:noFill/>
+          <a:ln w="19050">
+            <a:solidFill>
+              <a:srgbClr val="64748B"/>
+            </a:solidFill>
+            <a:prstDash val="solid"/>
+            <a:tailEnd type="triangle"/>
+          </a:ln>
+        </p:spPr>
+      </p:sp>
+      <p:sp>
+        <p:nvSpPr>
+          <p:cNvPr id="13" name="Shape 11"/>
+          <p:cNvSpPr/>
+          <p:nvPr/>
+        </p:nvSpPr>
+        <p:spPr>
+          <a:xfrm>
+            <a:off x="7421728" y="1417320"/>
+            <a:ext cx="1828800" cy="777240"/>
+          </a:xfrm>
+          <a:prstGeom prst="roundRect">
+            <a:avLst>
+              <a:gd name="adj" fmla="val 9412"/>
+            </a:avLst>
+          </a:prstGeom>
+          <a:solidFill>
+            <a:srgbClr val="F1F5F9"/>
+          </a:solidFill>
+          <a:ln w="12700">
+            <a:solidFill>
+              <a:srgbClr val="E2E8F0"/>
+            </a:solidFill>
+            <a:prstDash val="solid"/>
+          </a:ln>
+        </p:spPr>
+      </p:sp>
+      <p:sp>
+        <p:nvSpPr>
+          <p:cNvPr id="14" name="Text 12"/>
+          <p:cNvSpPr/>
+          <p:nvPr/>
+        </p:nvSpPr>
+        <p:spPr>
+          <a:xfrm>
+            <a:off x="7421728" y="1417320"/>
+            <a:ext cx="1828800" cy="777240"/>
+          </a:xfrm>
+          <a:prstGeom prst="rect">
+            <a:avLst/>
+          </a:prstGeom>
+          <a:noFill/>
+          <a:ln/>
+        </p:spPr>
+        <p:txBody>
+          <a:bodyPr wrap="square" lIns="0" tIns="0" rIns="0" bIns="0" rtlCol="0" anchor="ctr"/>
+          <a:lstStyle/>
+          <a:p>
+            <a:pPr algn="ctr" indent="0" marL="0">
+              <a:buNone/>
+            </a:pPr>
+            <a:r>
+              <a:rPr lang="en-US" sz="1300" b="1" dirty="0">
+                <a:solidFill>
+                  <a:srgbClr val="1E293B"/>
+                </a:solidFill>
+                <a:latin typeface="Calibri" pitchFamily="34" charset="0"/>
+                <a:ea typeface="Calibri" pitchFamily="34" charset="-122"/>
+                <a:cs typeface="Calibri" pitchFamily="34" charset="-120"/>
+              </a:rPr>
+              <a:t>Plots</a:t>
+            </a:r>
+            <a:endParaRPr lang="en-US" sz="1300" dirty="0"/>
+          </a:p>
+        </p:txBody>
+      </p:sp>
+      <p:sp>
+        <p:nvSpPr>
+          <p:cNvPr id="15" name="Shape 13"/>
+          <p:cNvSpPr/>
+          <p:nvPr/>
+        </p:nvSpPr>
+        <p:spPr>
+          <a:xfrm>
+            <a:off x="9250528" y="1805940"/>
+            <a:ext cx="411480" cy="0"/>
+          </a:xfrm>
+          <a:prstGeom prst="line">
+            <a:avLst/>
+          </a:prstGeom>
+          <a:noFill/>
+          <a:ln w="19050">
+            <a:solidFill>
+              <a:srgbClr val="64748B"/>
+            </a:solidFill>
+            <a:prstDash val="solid"/>
+            <a:tailEnd type="triangle"/>
+          </a:ln>
+        </p:spPr>
+      </p:sp>
+      <p:sp>
+        <p:nvSpPr>
+          <p:cNvPr id="16" name="Shape 14"/>
+          <p:cNvSpPr/>
+          <p:nvPr/>
+        </p:nvSpPr>
+        <p:spPr>
+          <a:xfrm>
+            <a:off x="9662008" y="1417320"/>
+            <a:ext cx="1828800" cy="777240"/>
+          </a:xfrm>
+          <a:prstGeom prst="roundRect">
+            <a:avLst>
+              <a:gd name="adj" fmla="val 9412"/>
+            </a:avLst>
+          </a:prstGeom>
+          <a:solidFill>
+            <a:srgbClr val="F1F5F9"/>
+          </a:solidFill>
+          <a:ln w="12700">
+            <a:solidFill>
+              <a:srgbClr val="E2E8F0"/>
+            </a:solidFill>
+            <a:prstDash val="solid"/>
+          </a:ln>
+        </p:spPr>
+      </p:sp>
+      <p:sp>
+        <p:nvSpPr>
+          <p:cNvPr id="17" name="Text 15"/>
+          <p:cNvSpPr/>
+          <p:nvPr/>
+        </p:nvSpPr>
+        <p:spPr>
+          <a:xfrm>
+            <a:off x="9662008" y="1417320"/>
+            <a:ext cx="1828800" cy="777240"/>
+          </a:xfrm>
+          <a:prstGeom prst="rect">
+            <a:avLst/>
+          </a:prstGeom>
+          <a:noFill/>
+          <a:ln/>
+        </p:spPr>
+        <p:txBody>
+          <a:bodyPr wrap="square" lIns="0" tIns="0" rIns="0" bIns="0" rtlCol="0" anchor="ctr"/>
+          <a:lstStyle/>
+          <a:p>
+            <a:pPr algn="ctr" indent="0" marL="0">
+              <a:buNone/>
+            </a:pPr>
+            <a:r>
+              <a:rPr lang="en-US" sz="1300" b="1" dirty="0">
+                <a:solidFill>
+                  <a:srgbClr val="1E293B"/>
+                </a:solidFill>
+                <a:latin typeface="Calibri" pitchFamily="34" charset="0"/>
+                <a:ea typeface="Calibri" pitchFamily="34" charset="-122"/>
+                <a:cs typeface="Calibri" pitchFamily="34" charset="-120"/>
+              </a:rPr>
+              <a:t>Conclusions</a:t>
+            </a:r>
+            <a:endParaRPr lang="en-US" sz="1300" dirty="0"/>
+          </a:p>
+        </p:txBody>
+      </p:sp>
+      <p:sp>
+        <p:nvSpPr>
+          <p:cNvPr id="18" name="Text 16"/>
+          <p:cNvSpPr/>
+          <p:nvPr/>
+        </p:nvSpPr>
+        <p:spPr>
+          <a:xfrm>
+            <a:off x="548640" y="2606040"/>
+            <a:ext cx="11094415" cy="365760"/>
+          </a:xfrm>
+          <a:prstGeom prst="rect">
+            <a:avLst/>
+          </a:prstGeom>
+          <a:noFill/>
+          <a:ln/>
+        </p:spPr>
+        <p:txBody>
+          <a:bodyPr wrap="square" lIns="0" tIns="0" rIns="0" bIns="0" rtlCol="0" anchor="ctr"/>
+          <a:lstStyle/>
+          <a:p>
+            <a:pPr indent="0" marL="0">
+              <a:buNone/>
+            </a:pPr>
+            <a:r>
+              <a:rPr lang="en-US" sz="1350" b="1" dirty="0">
+                <a:solidFill>
+                  <a:srgbClr val="1E293B"/>
+                </a:solidFill>
+                <a:latin typeface="Calibri" pitchFamily="34" charset="0"/>
+                <a:ea typeface="Calibri" pitchFamily="34" charset="-122"/>
+                <a:cs typeface="Calibri" pitchFamily="34" charset="-120"/>
+              </a:rPr>
+              <a:t>src/main.cpp</a:t>
+            </a:r>
+            <a:pPr indent="0" marL="0">
+              <a:buNone/>
+            </a:pPr>
+            <a:r>
+              <a:rPr lang="en-US" sz="1350" dirty="0">
+                <a:solidFill>
+                  <a:srgbClr val="1E293B"/>
+                </a:solidFill>
+                <a:latin typeface="Calibri" pitchFamily="34" charset="0"/>
+                <a:ea typeface="Calibri" pitchFamily="34" charset="-122"/>
+                <a:cs typeface="Calibri" pitchFamily="34" charset="-120"/>
+              </a:rPr>
+              <a:t> builds scenarios, runs them, and exports </a:t>
+            </a:r>
+            <a:pPr indent="0" marL="0">
+              <a:buNone/>
+            </a:pPr>
+            <a:r>
+              <a:rPr lang="en-US" sz="1350" b="1" dirty="0">
+                <a:solidFill>
+                  <a:srgbClr val="1E293B"/>
+                </a:solidFill>
+                <a:latin typeface="Calibri" pitchFamily="34" charset="0"/>
+                <a:ea typeface="Calibri" pitchFamily="34" charset="-122"/>
+                <a:cs typeface="Calibri" pitchFamily="34" charset="-120"/>
+              </a:rPr>
+              <a:t>results/simulation_results.csv</a:t>
+            </a:r>
+            <a:pPr indent="0" marL="0">
+              <a:buNone/>
+            </a:pPr>
+            <a:r>
+              <a:rPr lang="en-US" sz="1350" dirty="0">
+                <a:solidFill>
+                  <a:srgbClr val="1E293B"/>
+                </a:solidFill>
+                <a:latin typeface="Calibri" pitchFamily="34" charset="0"/>
+                <a:ea typeface="Calibri" pitchFamily="34" charset="-122"/>
+                <a:cs typeface="Calibri" pitchFamily="34" charset="-120"/>
+              </a:rPr>
+              <a:t>.</a:t>
+            </a:r>
+            <a:endParaRPr lang="en-US" sz="1350" dirty="0"/>
+          </a:p>
+        </p:txBody>
+      </p:sp>
+      <p:sp>
+        <p:nvSpPr>
+          <p:cNvPr id="19" name="Text 17"/>
+          <p:cNvSpPr/>
+          <p:nvPr/>
+        </p:nvSpPr>
+        <p:spPr>
+          <a:xfrm>
+            <a:off x="548640" y="2990088"/>
+            <a:ext cx="11094415" cy="365760"/>
+          </a:xfrm>
+          <a:prstGeom prst="rect">
+            <a:avLst/>
+          </a:prstGeom>
+          <a:noFill/>
+          <a:ln/>
+        </p:spPr>
+        <p:txBody>
+          <a:bodyPr wrap="square" lIns="0" tIns="0" rIns="0" bIns="0" rtlCol="0" anchor="ctr"/>
+          <a:lstStyle/>
+          <a:p>
+            <a:pPr indent="0" marL="0">
+              <a:buNone/>
+            </a:pPr>
+            <a:r>
+              <a:rPr lang="en-US" sz="1350" b="1" dirty="0">
+                <a:solidFill>
+                  <a:srgbClr val="1E293B"/>
+                </a:solidFill>
+                <a:latin typeface="Calibri" pitchFamily="34" charset="0"/>
+                <a:ea typeface="Calibri" pitchFamily="34" charset="-122"/>
+                <a:cs typeface="Calibri" pitchFamily="34" charset="-120"/>
+              </a:rPr>
+              <a:t>ExperimentRunner</a:t>
+            </a:r>
+            <a:pPr indent="0" marL="0">
+              <a:buNone/>
+            </a:pPr>
+            <a:r>
+              <a:rPr lang="en-US" sz="1350" dirty="0">
+                <a:solidFill>
+                  <a:srgbClr val="1E293B"/>
+                </a:solidFill>
+                <a:latin typeface="Calibri" pitchFamily="34" charset="0"/>
+                <a:ea typeface="Calibri" pitchFamily="34" charset="-122"/>
+                <a:cs typeface="Calibri" pitchFamily="34" charset="-120"/>
+              </a:rPr>
+              <a:t> creates all experiment scenarios.</a:t>
+            </a:r>
+            <a:endParaRPr lang="en-US" sz="1350" dirty="0"/>
+          </a:p>
+        </p:txBody>
+      </p:sp>
+      <p:sp>
+        <p:nvSpPr>
+          <p:cNvPr id="20" name="Shape 18"/>
+          <p:cNvSpPr/>
+          <p:nvPr/>
+        </p:nvSpPr>
+        <p:spPr>
+          <a:xfrm>
+            <a:off x="548640" y="3611880"/>
+            <a:ext cx="3576218" cy="1051560"/>
+          </a:xfrm>
+          <a:prstGeom prst="roundRect">
+            <a:avLst>
+              <a:gd name="adj" fmla="val 6087"/>
+            </a:avLst>
+          </a:prstGeom>
+          <a:solidFill>
+            <a:srgbClr val="F1F5F9"/>
+          </a:solidFill>
+          <a:ln/>
+        </p:spPr>
+      </p:sp>
+      <p:sp>
+        <p:nvSpPr>
+          <p:cNvPr id="21" name="Text 19"/>
+          <p:cNvSpPr/>
+          <p:nvPr/>
+        </p:nvSpPr>
+        <p:spPr>
+          <a:xfrm>
+            <a:off x="713232" y="3721608"/>
+            <a:ext cx="3247034" cy="457200"/>
+          </a:xfrm>
+          <a:prstGeom prst="rect">
+            <a:avLst/>
+          </a:prstGeom>
+          <a:noFill/>
+          <a:ln/>
+        </p:spPr>
+        <p:txBody>
+          <a:bodyPr wrap="square" lIns="0" tIns="0" rIns="0" bIns="0" rtlCol="0" anchor="t"/>
+          <a:lstStyle/>
+          <a:p>
+            <a:pPr indent="0" marL="0">
+              <a:buNone/>
+            </a:pPr>
+            <a:r>
+              <a:rPr lang="en-US" sz="1300" b="1" dirty="0">
+                <a:solidFill>
+                  <a:srgbClr val="2563EB"/>
+                </a:solidFill>
+                <a:latin typeface="Calibri" pitchFamily="34" charset="0"/>
+                <a:ea typeface="Calibri" pitchFamily="34" charset="-122"/>
+                <a:cs typeface="Calibri" pitchFamily="34" charset="-120"/>
+              </a:rPr>
+              <a:t>PowerKSimulator</a:t>
+            </a:r>
+            <a:endParaRPr lang="en-US" sz="1300" dirty="0"/>
+          </a:p>
+        </p:txBody>
+      </p:sp>
+      <p:sp>
+        <p:nvSpPr>
+          <p:cNvPr id="22" name="Text 20"/>
+          <p:cNvSpPr/>
+          <p:nvPr/>
+        </p:nvSpPr>
+        <p:spPr>
+          <a:xfrm>
+            <a:off x="713232" y="4178808"/>
+            <a:ext cx="3247034" cy="411480"/>
+          </a:xfrm>
+          <a:prstGeom prst="rect">
+            <a:avLst/>
+          </a:prstGeom>
+          <a:noFill/>
+          <a:ln/>
+        </p:spPr>
+        <p:txBody>
+          <a:bodyPr wrap="square" lIns="0" tIns="0" rIns="0" bIns="0" rtlCol="0" anchor="t"/>
+          <a:lstStyle/>
+          <a:p>
+            <a:pPr indent="0" marL="0">
+              <a:buNone/>
+            </a:pPr>
+            <a:r>
+              <a:rPr lang="en-US" sz="1150" dirty="0">
+                <a:solidFill>
+                  <a:srgbClr val="64748B"/>
+                </a:solidFill>
+                <a:latin typeface="Calibri" pitchFamily="34" charset="0"/>
+                <a:ea typeface="Calibri" pitchFamily="34" charset="-122"/>
+                <a:cs typeface="Calibri" pitchFamily="34" charset="-120"/>
+              </a:rPr>
+              <a:t>Random, Power-k, Absolute minimum</a:t>
+            </a:r>
+            <a:endParaRPr lang="en-US" sz="1150" dirty="0"/>
+          </a:p>
+        </p:txBody>
+      </p:sp>
+      <p:sp>
+        <p:nvSpPr>
+          <p:cNvPr id="23" name="Shape 21"/>
+          <p:cNvSpPr/>
+          <p:nvPr/>
+        </p:nvSpPr>
+        <p:spPr>
+          <a:xfrm>
+            <a:off x="4307738" y="3611880"/>
+            <a:ext cx="3576218" cy="1051560"/>
+          </a:xfrm>
+          <a:prstGeom prst="roundRect">
+            <a:avLst>
+              <a:gd name="adj" fmla="val 6087"/>
+            </a:avLst>
+          </a:prstGeom>
+          <a:solidFill>
+            <a:srgbClr val="F1F5F9"/>
+          </a:solidFill>
+          <a:ln/>
+        </p:spPr>
+      </p:sp>
+      <p:sp>
+        <p:nvSpPr>
+          <p:cNvPr id="24" name="Text 22"/>
+          <p:cNvSpPr/>
+          <p:nvPr/>
+        </p:nvSpPr>
+        <p:spPr>
+          <a:xfrm>
+            <a:off x="4472330" y="3721608"/>
+            <a:ext cx="3247034" cy="457200"/>
+          </a:xfrm>
+          <a:prstGeom prst="rect">
+            <a:avLst/>
+          </a:prstGeom>
+          <a:noFill/>
+          <a:ln/>
+        </p:spPr>
+        <p:txBody>
+          <a:bodyPr wrap="square" lIns="0" tIns="0" rIns="0" bIns="0" rtlCol="0" anchor="t"/>
+          <a:lstStyle/>
+          <a:p>
+            <a:pPr indent="0" marL="0">
+              <a:buNone/>
+            </a:pPr>
+            <a:r>
+              <a:rPr lang="en-US" sz="1300" b="1" dirty="0">
+                <a:solidFill>
+                  <a:srgbClr val="15803D"/>
+                </a:solidFill>
+                <a:latin typeface="Calibri" pitchFamily="34" charset="0"/>
+                <a:ea typeface="Calibri" pitchFamily="34" charset="-122"/>
+                <a:cs typeface="Calibri" pitchFamily="34" charset="-120"/>
+              </a:rPr>
+              <a:t>StatefulRoundRobinSimulator</a:t>
+            </a:r>
+            <a:endParaRPr lang="en-US" sz="1300" dirty="0"/>
+          </a:p>
+        </p:txBody>
+      </p:sp>
+      <p:sp>
+        <p:nvSpPr>
+          <p:cNvPr id="25" name="Text 23"/>
+          <p:cNvSpPr/>
+          <p:nvPr/>
+        </p:nvSpPr>
+        <p:spPr>
+          <a:xfrm>
+            <a:off x="4472330" y="4178808"/>
+            <a:ext cx="3247034" cy="411480"/>
+          </a:xfrm>
+          <a:prstGeom prst="rect">
+            <a:avLst/>
+          </a:prstGeom>
+          <a:noFill/>
+          <a:ln/>
+        </p:spPr>
+        <p:txBody>
+          <a:bodyPr wrap="square" lIns="0" tIns="0" rIns="0" bIns="0" rtlCol="0" anchor="t"/>
+          <a:lstStyle/>
+          <a:p>
+            <a:pPr indent="0" marL="0">
+              <a:buNone/>
+            </a:pPr>
+            <a:r>
+              <a:rPr lang="en-US" sz="1150" dirty="0">
+                <a:solidFill>
+                  <a:srgbClr val="64748B"/>
+                </a:solidFill>
+                <a:latin typeface="Calibri" pitchFamily="34" charset="0"/>
+                <a:ea typeface="Calibri" pitchFamily="34" charset="-122"/>
+                <a:cs typeface="Calibri" pitchFamily="34" charset="-120"/>
+              </a:rPr>
+              <a:t>Round-robin</a:t>
+            </a:r>
+            <a:endParaRPr lang="en-US" sz="1150" dirty="0"/>
+          </a:p>
+        </p:txBody>
+      </p:sp>
+      <p:sp>
+        <p:nvSpPr>
+          <p:cNvPr id="26" name="Shape 24"/>
+          <p:cNvSpPr/>
+          <p:nvPr/>
+        </p:nvSpPr>
+        <p:spPr>
+          <a:xfrm>
+            <a:off x="8066837" y="3611880"/>
+            <a:ext cx="3576218" cy="1051560"/>
+          </a:xfrm>
+          <a:prstGeom prst="roundRect">
+            <a:avLst>
+              <a:gd name="adj" fmla="val 6087"/>
+            </a:avLst>
+          </a:prstGeom>
+          <a:solidFill>
+            <a:srgbClr val="F1F5F9"/>
+          </a:solidFill>
+          <a:ln/>
+        </p:spPr>
+      </p:sp>
+      <p:sp>
+        <p:nvSpPr>
+          <p:cNvPr id="27" name="Text 25"/>
+          <p:cNvSpPr/>
+          <p:nvPr/>
+        </p:nvSpPr>
+        <p:spPr>
+          <a:xfrm>
+            <a:off x="8231429" y="3721608"/>
+            <a:ext cx="3247034" cy="457200"/>
+          </a:xfrm>
+          <a:prstGeom prst="rect">
+            <a:avLst/>
+          </a:prstGeom>
+          <a:noFill/>
+          <a:ln/>
+        </p:spPr>
+        <p:txBody>
+          <a:bodyPr wrap="square" lIns="0" tIns="0" rIns="0" bIns="0" rtlCol="0" anchor="t"/>
+          <a:lstStyle/>
+          <a:p>
+            <a:pPr indent="0" marL="0">
+              <a:buNone/>
+            </a:pPr>
+            <a:r>
+              <a:rPr lang="en-US" sz="1300" b="1" dirty="0">
+                <a:solidFill>
+                  <a:srgbClr val="C2660D"/>
+                </a:solidFill>
+                <a:latin typeface="Calibri" pitchFamily="34" charset="0"/>
+                <a:ea typeface="Calibri" pitchFamily="34" charset="-122"/>
+                <a:cs typeface="Calibri" pitchFamily="34" charset="-120"/>
+              </a:rPr>
+              <a:t>HeapSizeSPowerOfKSimulator</a:t>
+            </a:r>
+            <a:endParaRPr lang="en-US" sz="1300" dirty="0"/>
+          </a:p>
+        </p:txBody>
+      </p:sp>
+      <p:sp>
+        <p:nvSpPr>
+          <p:cNvPr id="28" name="Text 26"/>
+          <p:cNvSpPr/>
+          <p:nvPr/>
+        </p:nvSpPr>
+        <p:spPr>
+          <a:xfrm>
+            <a:off x="8231429" y="4178808"/>
+            <a:ext cx="3247034" cy="411480"/>
+          </a:xfrm>
+          <a:prstGeom prst="rect">
+            <a:avLst/>
+          </a:prstGeom>
+          <a:noFill/>
+          <a:ln/>
+        </p:spPr>
+        <p:txBody>
+          <a:bodyPr wrap="square" lIns="0" tIns="0" rIns="0" bIns="0" rtlCol="0" anchor="t"/>
+          <a:lstStyle/>
+          <a:p>
+            <a:pPr indent="0" marL="0">
+              <a:buNone/>
+            </a:pPr>
+            <a:r>
+              <a:rPr lang="en-US" sz="1150" dirty="0">
+                <a:solidFill>
+                  <a:srgbClr val="64748B"/>
+                </a:solidFill>
+                <a:latin typeface="Calibri" pitchFamily="34" charset="0"/>
+                <a:ea typeface="Calibri" pitchFamily="34" charset="-122"/>
+                <a:cs typeface="Calibri" pitchFamily="34" charset="-120"/>
+              </a:rPr>
+              <a:t>Heap size s / full heap</a:t>
+            </a:r>
+            <a:endParaRPr lang="en-US" sz="1150" dirty="0"/>
+          </a:p>
+        </p:txBody>
+      </p:sp>
+      <p:sp>
+        <p:nvSpPr>
+          <p:cNvPr id="29" name="Text 27"/>
+          <p:cNvSpPr/>
+          <p:nvPr/>
+        </p:nvSpPr>
+        <p:spPr>
+          <a:xfrm>
+            <a:off x="548640" y="4892040"/>
+            <a:ext cx="11094415" cy="640080"/>
+          </a:xfrm>
+          <a:prstGeom prst="rect">
+            <a:avLst/>
+          </a:prstGeom>
+          <a:noFill/>
+          <a:ln/>
+        </p:spPr>
+        <p:txBody>
+          <a:bodyPr wrap="square" lIns="0" tIns="0" rIns="0" bIns="0" rtlCol="0" anchor="t"/>
+          <a:lstStyle/>
+          <a:p>
+            <a:pPr indent="0" marL="0">
+              <a:lnSpc>
+                <a:spcPct val="115000"/>
+              </a:lnSpc>
+              <a:buNone/>
+            </a:pPr>
+            <a:r>
+              <a:rPr lang="en-US" sz="1350" b="1" dirty="0">
+                <a:solidFill>
+                  <a:srgbClr val="1E293B"/>
+                </a:solidFill>
+                <a:latin typeface="Calibri" pitchFamily="34" charset="0"/>
+                <a:ea typeface="Calibri" pitchFamily="34" charset="-122"/>
+                <a:cs typeface="Calibri" pitchFamily="34" charset="-120"/>
+              </a:rPr>
+              <a:t>scripts/plot_results.py</a:t>
+            </a:r>
+            <a:pPr indent="0" marL="0">
+              <a:lnSpc>
+                <a:spcPct val="115000"/>
+              </a:lnSpc>
+              <a:buNone/>
+            </a:pPr>
+            <a:r>
+              <a:rPr lang="en-US" sz="1350" dirty="0">
+                <a:solidFill>
+                  <a:srgbClr val="1E293B"/>
+                </a:solidFill>
+                <a:latin typeface="Calibri" pitchFamily="34" charset="0"/>
+                <a:ea typeface="Calibri" pitchFamily="34" charset="-122"/>
+                <a:cs typeface="Calibri" pitchFamily="34" charset="-120"/>
+              </a:rPr>
+              <a:t> reads the CSV and creates the plots. The deck uses repository outputs only.</a:t>
+            </a:r>
+            <a:endParaRPr lang="en-US" sz="1350" dirty="0"/>
+          </a:p>
+        </p:txBody>
+      </p:sp>
+      <p:sp>
+        <p:nvSpPr>
+          <p:cNvPr id="30" name="Shape 28"/>
+          <p:cNvSpPr/>
+          <p:nvPr/>
+        </p:nvSpPr>
+        <p:spPr>
+          <a:xfrm>
+            <a:off x="548640" y="5989320"/>
+            <a:ext cx="11094415" cy="457200"/>
+          </a:xfrm>
+          <a:prstGeom prst="roundRect">
+            <a:avLst>
+              <a:gd name="adj" fmla="val 14000"/>
+            </a:avLst>
+          </a:prstGeom>
+          <a:solidFill>
+            <a:srgbClr val="F1F5F9"/>
+          </a:solidFill>
+          <a:ln/>
+        </p:spPr>
+      </p:sp>
+      <p:sp>
+        <p:nvSpPr>
+          <p:cNvPr id="31" name="Text 29"/>
+          <p:cNvSpPr/>
+          <p:nvPr/>
+        </p:nvSpPr>
+        <p:spPr>
+          <a:xfrm>
+            <a:off x="777240" y="5989320"/>
+            <a:ext cx="10637215" cy="457200"/>
+          </a:xfrm>
+          <a:prstGeom prst="rect">
+            <a:avLst/>
+          </a:prstGeom>
+          <a:noFill/>
+          <a:ln/>
+        </p:spPr>
+        <p:txBody>
+          <a:bodyPr wrap="square" lIns="0" tIns="0" rIns="0" bIns="0" rtlCol="0" anchor="ctr"/>
+          <a:lstStyle/>
+          <a:p>
+            <a:pPr algn="l" indent="0" marL="0">
+              <a:buNone/>
+            </a:pPr>
+            <a:r>
+              <a:rPr lang="en-US" sz="1350" b="1" i="1" dirty="0">
+                <a:solidFill>
+                  <a:srgbClr val="1E293B"/>
+                </a:solidFill>
+                <a:latin typeface="Calibri" pitchFamily="34" charset="0"/>
+                <a:ea typeface="Calibri" pitchFamily="34" charset="-122"/>
+                <a:cs typeface="Calibri" pitchFamily="34" charset="-120"/>
+              </a:rPr>
+              <a:t>The project is structured as a repeatable performance-evaluation pipeline, not a one-off script.</a:t>
+            </a:r>
+            <a:endParaRPr lang="en-US" sz="1350" dirty="0"/>
+          </a:p>
+        </p:txBody>
+      </p:sp>
+    </p:spTree>
+  </p:cSld>
+  <p:clrMapOvr>
+    <a:masterClrMapping/>
+  </p:clrMapOvr>
+</p:sld>
+</file>
+
+<file path=ppt/slides/slide15.xml><?xml version="1.0" encoding="utf-8"?>
+<p:sld xmlns:a="http://schemas.openxmlformats.org/drawingml/2006/main" xmlns:r="http://schemas.openxmlformats.org/officeDocument/2006/relationships" xmlns:p="http://schemas.openxmlformats.org/presentationml/2006/main">
+  <p:cSld name="Slide 15">
     <p:bg>
       <p:bgPr>
         <a:solidFill>
@@ -5392,7 +5860,7 @@
                 <a:ea typeface="Calibri" pitchFamily="34" charset="-122"/>
                 <a:cs typeface="Calibri" pitchFamily="34" charset="-120"/>
               </a:rPr>
-              <a:t>14</a:t>
+              <a:t>15</a:t>
             </a:r>
             <a:endParaRPr lang="en-US" sz="900" dirty="0"/>
           </a:p>
@@ -5516,17 +5984,17 @@
         </p:nvSpPr>
         <p:spPr>
           <a:xfrm>
-            <a:off x="548640" y="1188720"/>
-            <a:ext cx="6035040" cy="4663440"/>
-          </a:xfrm>
-          <a:prstGeom prst="rect">
-            <a:avLst/>
-          </a:prstGeom>
-          <a:noFill/>
-          <a:ln/>
-        </p:spPr>
-        <p:txBody>
-          <a:bodyPr wrap="square" lIns="0" tIns="0" rIns="0" bIns="0" rtlCol="0" anchor="ctr"/>
+            <a:off x="548640" y="1234440"/>
+            <a:ext cx="6035040" cy="1691640"/>
+          </a:xfrm>
+          <a:prstGeom prst="rect">
+            <a:avLst/>
+          </a:prstGeom>
+          <a:noFill/>
+          <a:ln/>
+        </p:spPr>
+        <p:txBody>
+          <a:bodyPr wrap="square" lIns="0" tIns="0" rIns="0" bIns="0" rtlCol="0" anchor="t"/>
           <a:lstStyle/>
           <a:p>
             <a:pPr marL="228600" indent="-228600">
@@ -5534,7 +6002,7 @@
                 <a:spcPct val="115000"/>
               </a:lnSpc>
               <a:spcAft>
-                <a:spcPts val="2200"/>
+                <a:spcPts val="1600"/>
               </a:spcAft>
               <a:buSzPct val="100000"/>
               <a:buChar char="•"/>
@@ -5548,7 +6016,7 @@
                 <a:ea typeface="Calibri" pitchFamily="34" charset="-122"/>
                 <a:cs typeface="Calibri" pitchFamily="34" charset="-120"/>
               </a:rPr>
-              <a:t>Each arriving ball must be assigned to a bin immediately — no batching, no undo.</a:t>
+              <a:t>Balls are incoming jobs, requests, or network flows.</a:t>
             </a:r>
             <a:endParaRPr lang="en-US" sz="1650" dirty="0"/>
           </a:p>
@@ -5558,7 +6026,7 @@
                 <a:spcPct val="115000"/>
               </a:lnSpc>
               <a:spcAft>
-                <a:spcPts val="2200"/>
+                <a:spcPts val="1600"/>
               </a:spcAft>
               <a:buSzPct val="100000"/>
               <a:buChar char="•"/>
@@ -5572,7 +6040,7 @@
                 <a:ea typeface="Calibri" pitchFamily="34" charset="-122"/>
                 <a:cs typeface="Calibri" pitchFamily="34" charset="-120"/>
               </a:rPr>
-              <a:t>Objective: minimize the maximum load and the imbalance across bins.</a:t>
+              <a:t>Bins are the servers, links, or queues that handle them.</a:t>
             </a:r>
             <a:endParaRPr lang="en-US" sz="1650" dirty="0"/>
           </a:p>
@@ -5582,7 +6050,7 @@
                 <a:spcPct val="115000"/>
               </a:lnSpc>
               <a:spcAft>
-                <a:spcPts val="2200"/>
+                <a:spcPts val="1600"/>
               </a:spcAft>
               <a:buSzPct val="100000"/>
               <a:buChar char="•"/>
@@ -5596,31 +6064,110 @@
                 <a:ea typeface="Calibri" pitchFamily="34" charset="-122"/>
                 <a:cs typeface="Calibri" pitchFamily="34" charset="-120"/>
               </a:rPr>
-              <a:t>Systems analogy: assigning jobs, network flows, or tasks to servers, links, or queues.</a:t>
+              <a:t>Each ball is placed the moment it arrives — no waiting, no do-overs.</a:t>
             </a:r>
             <a:endParaRPr lang="en-US" sz="1650" dirty="0"/>
           </a:p>
-          <a:p>
-            <a:pPr marL="228600" indent="-228600">
+        </p:txBody>
+      </p:sp>
+      <p:sp>
+        <p:nvSpPr>
+          <p:cNvPr id="5" name="Shape 3"/>
+          <p:cNvSpPr/>
+          <p:nvPr/>
+        </p:nvSpPr>
+        <p:spPr>
+          <a:xfrm>
+            <a:off x="548640" y="3063240"/>
+            <a:ext cx="6035040" cy="2331720"/>
+          </a:xfrm>
+          <a:prstGeom prst="roundRect">
+            <a:avLst>
+              <a:gd name="adj" fmla="val 3529"/>
+            </a:avLst>
+          </a:prstGeom>
+          <a:solidFill>
+            <a:srgbClr val="E8EFFD"/>
+          </a:solidFill>
+          <a:ln/>
+        </p:spPr>
+      </p:sp>
+      <p:sp>
+        <p:nvSpPr>
+          <p:cNvPr id="6" name="Text 4"/>
+          <p:cNvSpPr/>
+          <p:nvPr/>
+        </p:nvSpPr>
+        <p:spPr>
+          <a:xfrm>
+            <a:off x="822960" y="3246120"/>
+            <a:ext cx="5486400" cy="274320"/>
+          </a:xfrm>
+          <a:prstGeom prst="rect">
+            <a:avLst/>
+          </a:prstGeom>
+          <a:noFill/>
+          <a:ln/>
+        </p:spPr>
+        <p:txBody>
+          <a:bodyPr wrap="square" lIns="0" tIns="0" rIns="0" bIns="0" rtlCol="0" anchor="ctr"/>
+          <a:lstStyle/>
+          <a:p>
+            <a:pPr indent="0" marL="0">
+              <a:buNone/>
+            </a:pPr>
+            <a:r>
+              <a:rPr lang="en-US" sz="1100" b="1" spc="150" kern="0" dirty="0">
+                <a:solidFill>
+                  <a:srgbClr val="2563EB"/>
+                </a:solidFill>
+                <a:latin typeface="Calibri" pitchFamily="34" charset="0"/>
+                <a:ea typeface="Calibri" pitchFamily="34" charset="-122"/>
+                <a:cs typeface="Calibri" pitchFamily="34" charset="-120"/>
+              </a:rPr>
+              <a:t>WHY IT MATTERS</a:t>
+            </a:r>
+            <a:endParaRPr lang="en-US" sz="1100" dirty="0"/>
+          </a:p>
+        </p:txBody>
+      </p:sp>
+      <p:sp>
+        <p:nvSpPr>
+          <p:cNvPr id="7" name="Text 5"/>
+          <p:cNvSpPr/>
+          <p:nvPr/>
+        </p:nvSpPr>
+        <p:spPr>
+          <a:xfrm>
+            <a:off x="822960" y="3557016"/>
+            <a:ext cx="5486400" cy="822960"/>
+          </a:xfrm>
+          <a:prstGeom prst="rect">
+            <a:avLst/>
+          </a:prstGeom>
+          <a:noFill/>
+          <a:ln/>
+        </p:spPr>
+        <p:txBody>
+          <a:bodyPr wrap="square" lIns="0" tIns="0" rIns="0" bIns="0" rtlCol="0" anchor="t"/>
+          <a:lstStyle/>
+          <a:p>
+            <a:pPr indent="0" marL="0">
               <a:lnSpc>
-                <a:spcPct val="115000"/>
+                <a:spcPct val="110000"/>
               </a:lnSpc>
-              <a:spcAft>
-                <a:spcPts val="2200"/>
-              </a:spcAft>
-              <a:buSzPct val="100000"/>
-              <a:buChar char="•"/>
-            </a:pPr>
-            <a:r>
-              <a:rPr lang="en-US" sz="1650" dirty="0">
+              <a:buNone/>
+            </a:pPr>
+            <a:r>
+              <a:rPr lang="en-US" sz="1650" b="1" dirty="0">
                 <a:solidFill>
                   <a:srgbClr val="1E293B"/>
                 </a:solidFill>
-                <a:latin typeface="Calibri" pitchFamily="34" charset="0"/>
-                <a:ea typeface="Calibri" pitchFamily="34" charset="-122"/>
-                <a:cs typeface="Calibri" pitchFamily="34" charset="-120"/>
-              </a:rPr>
-              <a:t>Central question: how much state or load information should the allocator use?</a:t>
+                <a:latin typeface="Cambria" pitchFamily="34" charset="0"/>
+                <a:ea typeface="Cambria" pitchFamily="34" charset="-122"/>
+                <a:cs typeface="Cambria" pitchFamily="34" charset="-120"/>
+              </a:rPr>
+              <a:t>A few overloaded bins can hurt the system even when the average load looks completely fine.</a:t>
             </a:r>
             <a:endParaRPr lang="en-US" sz="1650" dirty="0"/>
           </a:p>
@@ -5628,7 +6175,111 @@
       </p:sp>
       <p:sp>
         <p:nvSpPr>
-          <p:cNvPr id="5" name="Text 3"/>
+          <p:cNvPr id="8" name="Shape 6"/>
+          <p:cNvSpPr/>
+          <p:nvPr/>
+        </p:nvSpPr>
+        <p:spPr>
+          <a:xfrm>
+            <a:off x="822960" y="4434840"/>
+            <a:ext cx="5486400" cy="0"/>
+          </a:xfrm>
+          <a:prstGeom prst="line">
+            <a:avLst/>
+          </a:prstGeom>
+          <a:noFill/>
+          <a:ln w="9525">
+            <a:solidFill>
+              <a:srgbClr val="C9D9F5"/>
+            </a:solidFill>
+            <a:prstDash val="solid"/>
+          </a:ln>
+        </p:spPr>
+      </p:sp>
+      <p:sp>
+        <p:nvSpPr>
+          <p:cNvPr id="9" name="Text 7"/>
+          <p:cNvSpPr/>
+          <p:nvPr/>
+        </p:nvSpPr>
+        <p:spPr>
+          <a:xfrm>
+            <a:off x="822960" y="4562856"/>
+            <a:ext cx="5486400" cy="256032"/>
+          </a:xfrm>
+          <a:prstGeom prst="rect">
+            <a:avLst/>
+          </a:prstGeom>
+          <a:noFill/>
+          <a:ln/>
+        </p:spPr>
+        <p:txBody>
+          <a:bodyPr wrap="square" lIns="0" tIns="0" rIns="0" bIns="0" rtlCol="0" anchor="ctr"/>
+          <a:lstStyle/>
+          <a:p>
+            <a:pPr indent="0" marL="0">
+              <a:buNone/>
+            </a:pPr>
+            <a:r>
+              <a:rPr lang="en-US" sz="1100" b="1" spc="150" kern="0" dirty="0">
+                <a:solidFill>
+                  <a:srgbClr val="2563EB"/>
+                </a:solidFill>
+                <a:latin typeface="Calibri" pitchFamily="34" charset="0"/>
+                <a:ea typeface="Calibri" pitchFamily="34" charset="-122"/>
+                <a:cs typeface="Calibri" pitchFamily="34" charset="-120"/>
+              </a:rPr>
+              <a:t>GOAL</a:t>
+            </a:r>
+            <a:endParaRPr lang="en-US" sz="1100" dirty="0"/>
+          </a:p>
+        </p:txBody>
+      </p:sp>
+      <p:sp>
+        <p:nvSpPr>
+          <p:cNvPr id="10" name="Text 8"/>
+          <p:cNvSpPr/>
+          <p:nvPr/>
+        </p:nvSpPr>
+        <p:spPr>
+          <a:xfrm>
+            <a:off x="822960" y="4855464"/>
+            <a:ext cx="5486400" cy="502920"/>
+          </a:xfrm>
+          <a:prstGeom prst="rect">
+            <a:avLst/>
+          </a:prstGeom>
+          <a:noFill/>
+          <a:ln/>
+        </p:spPr>
+        <p:txBody>
+          <a:bodyPr wrap="square" lIns="0" tIns="0" rIns="0" bIns="0" rtlCol="0" anchor="t"/>
+          <a:lstStyle/>
+          <a:p>
+            <a:pPr indent="0" marL="0">
+              <a:lnSpc>
+                <a:spcPct val="110000"/>
+              </a:lnSpc>
+              <a:buNone/>
+            </a:pPr>
+            <a:r>
+              <a:rPr lang="en-US" sz="1400" b="1" dirty="0">
+                <a:solidFill>
+                  <a:srgbClr val="1E293B"/>
+                </a:solidFill>
+                <a:latin typeface="Calibri" pitchFamily="34" charset="0"/>
+                <a:ea typeface="Calibri" pitchFamily="34" charset="-122"/>
+                <a:cs typeface="Calibri" pitchFamily="34" charset="-120"/>
+              </a:rPr>
+              <a:t>Keep the worst-loaded bin small, and keep load balanced across all bins.</a:t>
+            </a:r>
+            <a:endParaRPr lang="en-US" sz="1400" dirty="0"/>
+          </a:p>
+        </p:txBody>
+      </p:sp>
+      <p:sp>
+        <p:nvSpPr>
+          <p:cNvPr id="11" name="Text 9"/>
           <p:cNvSpPr/>
           <p:nvPr/>
         </p:nvSpPr>
@@ -5659,7 +6310,7 @@
                 <a:ea typeface="Calibri" pitchFamily="34" charset="-122"/>
                 <a:cs typeface="Calibri" pitchFamily="34" charset="-120"/>
               </a:rPr>
-              <a:t>ONLINE ALLOCATION, ONE BALL AT A TIME</a:t>
+              <a:t>PER-BALL DECISION FLOW</a:t>
             </a:r>
             <a:endParaRPr lang="en-US" sz="1050" dirty="0"/>
           </a:p>
@@ -5667,7 +6318,7 @@
       </p:sp>
       <p:sp>
         <p:nvSpPr>
-          <p:cNvPr id="6" name="Shape 4"/>
+          <p:cNvPr id="12" name="Shape 10"/>
           <p:cNvSpPr/>
           <p:nvPr/>
         </p:nvSpPr>
@@ -5689,24 +6340,26 @@
       </p:sp>
       <p:sp>
         <p:nvSpPr>
-          <p:cNvPr id="7" name="Shape 5"/>
-          <p:cNvSpPr/>
-          <p:nvPr/>
-        </p:nvSpPr>
-        <p:spPr>
-          <a:xfrm>
-            <a:off x="7498080" y="1965960"/>
-            <a:ext cx="256032" cy="256032"/>
-          </a:xfrm>
-          <a:prstGeom prst="ellipse">
-            <a:avLst/>
+          <p:cNvPr id="13" name="Shape 11"/>
+          <p:cNvSpPr/>
+          <p:nvPr/>
+        </p:nvSpPr>
+        <p:spPr>
+          <a:xfrm>
+            <a:off x="7452360" y="1965960"/>
+            <a:ext cx="3108960" cy="502920"/>
+          </a:xfrm>
+          <a:prstGeom prst="roundRect">
+            <a:avLst>
+              <a:gd name="adj" fmla="val 12727"/>
+            </a:avLst>
           </a:prstGeom>
           <a:solidFill>
-            <a:srgbClr val="2563EB"/>
+            <a:srgbClr val="FFFFFF"/>
           </a:solidFill>
           <a:ln w="12700">
             <a:solidFill>
-              <a:srgbClr val="FFFFFF"/>
+              <a:srgbClr val="E2E8F0"/>
             </a:solidFill>
             <a:prstDash val="solid"/>
           </a:ln>
@@ -5714,64 +6367,53 @@
       </p:sp>
       <p:sp>
         <p:nvSpPr>
-          <p:cNvPr id="8" name="Shape 6"/>
-          <p:cNvSpPr/>
-          <p:nvPr/>
-        </p:nvSpPr>
-        <p:spPr>
-          <a:xfrm>
-            <a:off x="8595360" y="1965960"/>
-            <a:ext cx="256032" cy="256032"/>
-          </a:xfrm>
-          <a:prstGeom prst="ellipse">
-            <a:avLst/>
-          </a:prstGeom>
-          <a:solidFill>
-            <a:srgbClr val="2563EB"/>
-          </a:solidFill>
-          <a:ln w="12700">
-            <a:solidFill>
-              <a:srgbClr val="FFFFFF"/>
-            </a:solidFill>
-            <a:prstDash val="solid"/>
-          </a:ln>
-        </p:spPr>
-      </p:sp>
-      <p:sp>
-        <p:nvSpPr>
-          <p:cNvPr id="9" name="Shape 7"/>
-          <p:cNvSpPr/>
-          <p:nvPr/>
-        </p:nvSpPr>
-        <p:spPr>
-          <a:xfrm>
-            <a:off x="9784080" y="1965960"/>
-            <a:ext cx="256032" cy="256032"/>
-          </a:xfrm>
-          <a:prstGeom prst="ellipse">
-            <a:avLst/>
-          </a:prstGeom>
-          <a:solidFill>
-            <a:srgbClr val="2563EB"/>
-          </a:solidFill>
-          <a:ln w="12700">
-            <a:solidFill>
-              <a:srgbClr val="FFFFFF"/>
-            </a:solidFill>
-            <a:prstDash val="solid"/>
-          </a:ln>
-        </p:spPr>
-      </p:sp>
-      <p:sp>
-        <p:nvSpPr>
-          <p:cNvPr id="10" name="Shape 8"/>
-          <p:cNvSpPr/>
-          <p:nvPr/>
-        </p:nvSpPr>
-        <p:spPr>
-          <a:xfrm>
-            <a:off x="8723376" y="2267712"/>
-            <a:ext cx="0" cy="502920"/>
+          <p:cNvPr id="14" name="Text 12"/>
+          <p:cNvSpPr/>
+          <p:nvPr/>
+        </p:nvSpPr>
+        <p:spPr>
+          <a:xfrm>
+            <a:off x="7452360" y="1965960"/>
+            <a:ext cx="3108960" cy="502920"/>
+          </a:xfrm>
+          <a:prstGeom prst="rect">
+            <a:avLst/>
+          </a:prstGeom>
+          <a:noFill/>
+          <a:ln/>
+        </p:spPr>
+        <p:txBody>
+          <a:bodyPr wrap="square" lIns="0" tIns="0" rIns="0" bIns="0" rtlCol="0" anchor="ctr"/>
+          <a:lstStyle/>
+          <a:p>
+            <a:pPr algn="ctr" indent="0" marL="0">
+              <a:buNone/>
+            </a:pPr>
+            <a:r>
+              <a:rPr lang="en-US" sz="1300" b="1" dirty="0">
+                <a:solidFill>
+                  <a:srgbClr val="1E293B"/>
+                </a:solidFill>
+                <a:latin typeface="Calibri" pitchFamily="34" charset="0"/>
+                <a:ea typeface="Calibri" pitchFamily="34" charset="-122"/>
+                <a:cs typeface="Calibri" pitchFamily="34" charset="-120"/>
+              </a:rPr>
+              <a:t>Incoming ball</a:t>
+            </a:r>
+            <a:endParaRPr lang="en-US" sz="1300" dirty="0"/>
+          </a:p>
+        </p:txBody>
+      </p:sp>
+      <p:sp>
+        <p:nvSpPr>
+          <p:cNvPr id="15" name="Shape 13"/>
+          <p:cNvSpPr/>
+          <p:nvPr/>
+        </p:nvSpPr>
+        <p:spPr>
+          <a:xfrm>
+            <a:off x="9006840" y="2505456"/>
+            <a:ext cx="0" cy="155448"/>
           </a:xfrm>
           <a:prstGeom prst="line">
             <a:avLst/>
@@ -5788,22 +6430,24 @@
       </p:sp>
       <p:sp>
         <p:nvSpPr>
-          <p:cNvPr id="11" name="Shape 9"/>
-          <p:cNvSpPr/>
-          <p:nvPr/>
-        </p:nvSpPr>
-        <p:spPr>
-          <a:xfrm>
-            <a:off x="6830568" y="2880360"/>
-            <a:ext cx="868680" cy="1737360"/>
-          </a:xfrm>
-          <a:prstGeom prst="rect">
-            <a:avLst/>
+          <p:cNvPr id="16" name="Shape 14"/>
+          <p:cNvSpPr/>
+          <p:nvPr/>
+        </p:nvSpPr>
+        <p:spPr>
+          <a:xfrm>
+            <a:off x="7452360" y="2697480"/>
+            <a:ext cx="3108960" cy="502920"/>
+          </a:xfrm>
+          <a:prstGeom prst="roundRect">
+            <a:avLst>
+              <a:gd name="adj" fmla="val 12727"/>
+            </a:avLst>
           </a:prstGeom>
           <a:solidFill>
-            <a:srgbClr val="FFFFFF"/>
+            <a:srgbClr val="E8EFFD"/>
           </a:solidFill>
-          <a:ln w="15875">
+          <a:ln w="12700">
             <a:solidFill>
               <a:srgbClr val="E2E8F0"/>
             </a:solidFill>
@@ -5813,42 +6457,87 @@
       </p:sp>
       <p:sp>
         <p:nvSpPr>
-          <p:cNvPr id="12" name="Shape 10"/>
-          <p:cNvSpPr/>
-          <p:nvPr/>
-        </p:nvSpPr>
-        <p:spPr>
-          <a:xfrm>
-            <a:off x="6830568" y="4009644"/>
-            <a:ext cx="868680" cy="608076"/>
-          </a:xfrm>
-          <a:prstGeom prst="rect">
-            <a:avLst/>
-          </a:prstGeom>
-          <a:solidFill>
-            <a:srgbClr val="2563EB"/>
-          </a:solidFill>
-          <a:ln/>
-        </p:spPr>
-      </p:sp>
-      <p:sp>
-        <p:nvSpPr>
-          <p:cNvPr id="13" name="Shape 11"/>
-          <p:cNvSpPr/>
-          <p:nvPr/>
-        </p:nvSpPr>
-        <p:spPr>
-          <a:xfrm>
-            <a:off x="7991856" y="2880360"/>
-            <a:ext cx="868680" cy="1737360"/>
-          </a:xfrm>
-          <a:prstGeom prst="rect">
-            <a:avLst/>
+          <p:cNvPr id="17" name="Text 15"/>
+          <p:cNvSpPr/>
+          <p:nvPr/>
+        </p:nvSpPr>
+        <p:spPr>
+          <a:xfrm>
+            <a:off x="7452360" y="2697480"/>
+            <a:ext cx="3108960" cy="502920"/>
+          </a:xfrm>
+          <a:prstGeom prst="rect">
+            <a:avLst/>
+          </a:prstGeom>
+          <a:noFill/>
+          <a:ln/>
+        </p:spPr>
+        <p:txBody>
+          <a:bodyPr wrap="square" lIns="0" tIns="0" rIns="0" bIns="0" rtlCol="0" anchor="ctr"/>
+          <a:lstStyle/>
+          <a:p>
+            <a:pPr algn="ctr" indent="0" marL="0">
+              <a:buNone/>
+            </a:pPr>
+            <a:r>
+              <a:rPr lang="en-US" sz="1300" b="1" dirty="0">
+                <a:solidFill>
+                  <a:srgbClr val="2563EB"/>
+                </a:solidFill>
+                <a:latin typeface="Calibri" pitchFamily="34" charset="0"/>
+                <a:ea typeface="Calibri" pitchFamily="34" charset="-122"/>
+                <a:cs typeface="Calibri" pitchFamily="34" charset="-120"/>
+              </a:rPr>
+              <a:t>Choose policy</a:t>
+            </a:r>
+            <a:endParaRPr lang="en-US" sz="1300" dirty="0"/>
+          </a:p>
+        </p:txBody>
+      </p:sp>
+      <p:sp>
+        <p:nvSpPr>
+          <p:cNvPr id="18" name="Shape 16"/>
+          <p:cNvSpPr/>
+          <p:nvPr/>
+        </p:nvSpPr>
+        <p:spPr>
+          <a:xfrm>
+            <a:off x="9006840" y="3236976"/>
+            <a:ext cx="0" cy="155448"/>
+          </a:xfrm>
+          <a:prstGeom prst="line">
+            <a:avLst/>
+          </a:prstGeom>
+          <a:noFill/>
+          <a:ln w="19050">
+            <a:solidFill>
+              <a:srgbClr val="64748B"/>
+            </a:solidFill>
+            <a:prstDash val="solid"/>
+            <a:tailEnd type="triangle"/>
+          </a:ln>
+        </p:spPr>
+      </p:sp>
+      <p:sp>
+        <p:nvSpPr>
+          <p:cNvPr id="19" name="Shape 17"/>
+          <p:cNvSpPr/>
+          <p:nvPr/>
+        </p:nvSpPr>
+        <p:spPr>
+          <a:xfrm>
+            <a:off x="7452360" y="3429000"/>
+            <a:ext cx="3108960" cy="502920"/>
+          </a:xfrm>
+          <a:prstGeom prst="roundRect">
+            <a:avLst>
+              <a:gd name="adj" fmla="val 12727"/>
+            </a:avLst>
           </a:prstGeom>
           <a:solidFill>
             <a:srgbClr val="FFFFFF"/>
           </a:solidFill>
-          <a:ln w="15875">
+          <a:ln w="12700">
             <a:solidFill>
               <a:srgbClr val="E2E8F0"/>
             </a:solidFill>
@@ -5858,42 +6547,87 @@
       </p:sp>
       <p:sp>
         <p:nvSpPr>
-          <p:cNvPr id="14" name="Shape 12"/>
-          <p:cNvSpPr/>
-          <p:nvPr/>
-        </p:nvSpPr>
-        <p:spPr>
-          <a:xfrm>
-            <a:off x="7991856" y="3140964"/>
-            <a:ext cx="868680" cy="1476756"/>
-          </a:xfrm>
-          <a:prstGeom prst="rect">
-            <a:avLst/>
-          </a:prstGeom>
-          <a:solidFill>
-            <a:srgbClr val="2563EB"/>
-          </a:solidFill>
-          <a:ln/>
-        </p:spPr>
-      </p:sp>
-      <p:sp>
-        <p:nvSpPr>
-          <p:cNvPr id="15" name="Shape 13"/>
-          <p:cNvSpPr/>
-          <p:nvPr/>
-        </p:nvSpPr>
-        <p:spPr>
-          <a:xfrm>
-            <a:off x="9153144" y="2880360"/>
-            <a:ext cx="868680" cy="1737360"/>
-          </a:xfrm>
-          <a:prstGeom prst="rect">
-            <a:avLst/>
+          <p:cNvPr id="20" name="Text 18"/>
+          <p:cNvSpPr/>
+          <p:nvPr/>
+        </p:nvSpPr>
+        <p:spPr>
+          <a:xfrm>
+            <a:off x="7452360" y="3429000"/>
+            <a:ext cx="3108960" cy="502920"/>
+          </a:xfrm>
+          <a:prstGeom prst="rect">
+            <a:avLst/>
+          </a:prstGeom>
+          <a:noFill/>
+          <a:ln/>
+        </p:spPr>
+        <p:txBody>
+          <a:bodyPr wrap="square" lIns="0" tIns="0" rIns="0" bIns="0" rtlCol="0" anchor="ctr"/>
+          <a:lstStyle/>
+          <a:p>
+            <a:pPr algn="ctr" indent="0" marL="0">
+              <a:buNone/>
+            </a:pPr>
+            <a:r>
+              <a:rPr lang="en-US" sz="1300" b="1" dirty="0">
+                <a:solidFill>
+                  <a:srgbClr val="1E293B"/>
+                </a:solidFill>
+                <a:latin typeface="Calibri" pitchFamily="34" charset="0"/>
+                <a:ea typeface="Calibri" pitchFamily="34" charset="-122"/>
+                <a:cs typeface="Calibri" pitchFamily="34" charset="-120"/>
+              </a:rPr>
+              <a:t>Assigned bin</a:t>
+            </a:r>
+            <a:endParaRPr lang="en-US" sz="1300" dirty="0"/>
+          </a:p>
+        </p:txBody>
+      </p:sp>
+      <p:sp>
+        <p:nvSpPr>
+          <p:cNvPr id="21" name="Shape 19"/>
+          <p:cNvSpPr/>
+          <p:nvPr/>
+        </p:nvSpPr>
+        <p:spPr>
+          <a:xfrm>
+            <a:off x="9006840" y="3968496"/>
+            <a:ext cx="0" cy="155448"/>
+          </a:xfrm>
+          <a:prstGeom prst="line">
+            <a:avLst/>
+          </a:prstGeom>
+          <a:noFill/>
+          <a:ln w="19050">
+            <a:solidFill>
+              <a:srgbClr val="64748B"/>
+            </a:solidFill>
+            <a:prstDash val="solid"/>
+            <a:tailEnd type="triangle"/>
+          </a:ln>
+        </p:spPr>
+      </p:sp>
+      <p:sp>
+        <p:nvSpPr>
+          <p:cNvPr id="22" name="Shape 20"/>
+          <p:cNvSpPr/>
+          <p:nvPr/>
+        </p:nvSpPr>
+        <p:spPr>
+          <a:xfrm>
+            <a:off x="7452360" y="4160520"/>
+            <a:ext cx="3108960" cy="502920"/>
+          </a:xfrm>
+          <a:prstGeom prst="roundRect">
+            <a:avLst>
+              <a:gd name="adj" fmla="val 12727"/>
+            </a:avLst>
           </a:prstGeom>
           <a:solidFill>
             <a:srgbClr val="FFFFFF"/>
           </a:solidFill>
-          <a:ln w="15875">
+          <a:ln w="12700">
             <a:solidFill>
               <a:srgbClr val="E2E8F0"/>
             </a:solidFill>
@@ -5903,79 +6637,14 @@
       </p:sp>
       <p:sp>
         <p:nvSpPr>
-          <p:cNvPr id="16" name="Shape 14"/>
-          <p:cNvSpPr/>
-          <p:nvPr/>
-        </p:nvSpPr>
-        <p:spPr>
-          <a:xfrm>
-            <a:off x="9153144" y="3662172"/>
-            <a:ext cx="868680" cy="955548"/>
-          </a:xfrm>
-          <a:prstGeom prst="rect">
-            <a:avLst/>
-          </a:prstGeom>
-          <a:solidFill>
-            <a:srgbClr val="2563EB"/>
-          </a:solidFill>
-          <a:ln/>
-        </p:spPr>
-      </p:sp>
-      <p:sp>
-        <p:nvSpPr>
-          <p:cNvPr id="17" name="Shape 15"/>
-          <p:cNvSpPr/>
-          <p:nvPr/>
-        </p:nvSpPr>
-        <p:spPr>
-          <a:xfrm>
-            <a:off x="10314432" y="2880360"/>
-            <a:ext cx="868680" cy="1737360"/>
-          </a:xfrm>
-          <a:prstGeom prst="rect">
-            <a:avLst/>
-          </a:prstGeom>
-          <a:solidFill>
-            <a:srgbClr val="FFFFFF"/>
-          </a:solidFill>
-          <a:ln w="15875">
-            <a:solidFill>
-              <a:srgbClr val="E2E8F0"/>
-            </a:solidFill>
-            <a:prstDash val="solid"/>
-          </a:ln>
-        </p:spPr>
-      </p:sp>
-      <p:sp>
-        <p:nvSpPr>
-          <p:cNvPr id="18" name="Shape 16"/>
-          <p:cNvSpPr/>
-          <p:nvPr/>
-        </p:nvSpPr>
-        <p:spPr>
-          <a:xfrm>
-            <a:off x="10314432" y="4183380"/>
-            <a:ext cx="868680" cy="434340"/>
-          </a:xfrm>
-          <a:prstGeom prst="rect">
-            <a:avLst/>
-          </a:prstGeom>
-          <a:solidFill>
-            <a:srgbClr val="2563EB"/>
-          </a:solidFill>
-          <a:ln/>
-        </p:spPr>
-      </p:sp>
-      <p:sp>
-        <p:nvSpPr>
-          <p:cNvPr id="19" name="Text 17"/>
-          <p:cNvSpPr/>
-          <p:nvPr/>
-        </p:nvSpPr>
-        <p:spPr>
-          <a:xfrm>
-            <a:off x="6903720" y="4727448"/>
-            <a:ext cx="4206240" cy="274320"/>
+          <p:cNvPr id="23" name="Text 21"/>
+          <p:cNvSpPr/>
+          <p:nvPr/>
+        </p:nvSpPr>
+        <p:spPr>
+          <a:xfrm>
+            <a:off x="7452360" y="4160520"/>
+            <a:ext cx="3108960" cy="502920"/>
           </a:xfrm>
           <a:prstGeom prst="rect">
             <a:avLst/>
@@ -5991,23 +6660,23 @@
               <a:buNone/>
             </a:pPr>
             <a:r>
-              <a:rPr lang="en-US" sz="1100" i="1" dirty="0">
-                <a:solidFill>
-                  <a:srgbClr val="64748B"/>
-                </a:solidFill>
-                <a:latin typeface="Calibri" pitchFamily="34" charset="0"/>
-                <a:ea typeface="Calibri" pitchFamily="34" charset="-122"/>
-                <a:cs typeface="Calibri" pitchFamily="34" charset="-120"/>
-              </a:rPr>
-              <a:t>bins start at different loads</a:t>
-            </a:r>
-            <a:endParaRPr lang="en-US" sz="1100" dirty="0"/>
-          </a:p>
-        </p:txBody>
-      </p:sp>
-      <p:sp>
-        <p:nvSpPr>
-          <p:cNvPr id="20" name="Shape 18"/>
+              <a:rPr lang="en-US" sz="1300" b="1" dirty="0">
+                <a:solidFill>
+                  <a:srgbClr val="1E293B"/>
+                </a:solidFill>
+                <a:latin typeface="Calibri" pitchFamily="34" charset="0"/>
+                <a:ea typeface="Calibri" pitchFamily="34" charset="-122"/>
+                <a:cs typeface="Calibri" pitchFamily="34" charset="-120"/>
+              </a:rPr>
+              <a:t>Load changes</a:t>
+            </a:r>
+            <a:endParaRPr lang="en-US" sz="1300" dirty="0"/>
+          </a:p>
+        </p:txBody>
+      </p:sp>
+      <p:sp>
+        <p:nvSpPr>
+          <p:cNvPr id="24" name="Shape 22"/>
           <p:cNvSpPr/>
           <p:nvPr/>
         </p:nvSpPr>
@@ -6029,7 +6698,7 @@
       </p:sp>
       <p:sp>
         <p:nvSpPr>
-          <p:cNvPr id="21" name="Text 19"/>
+          <p:cNvPr id="25" name="Text 23"/>
           <p:cNvSpPr/>
           <p:nvPr/>
         </p:nvSpPr>
@@ -6060,7 +6729,7 @@
                 <a:ea typeface="Calibri" pitchFamily="34" charset="-122"/>
                 <a:cs typeface="Calibri" pitchFamily="34" charset="-120"/>
               </a:rPr>
-              <a:t>This models any system that must commit a resource assignment immediately, with only partial knowledge of global state.</a:t>
+              <a:t>Key design question: how much information or state should the allocator use before placing each ball?</a:t>
             </a:r>
             <a:endParaRPr lang="en-US" sz="1350" dirty="0"/>
           </a:p>
@@ -9335,7 +10004,7 @@
                 <a:ea typeface="Cambria" pitchFamily="34" charset="-122"/>
                 <a:cs typeface="Cambria" pitchFamily="34" charset="-120"/>
               </a:rPr>
-              <a:t>Theory Anchor: Why Power-2 Matters</a:t>
+              <a:t>Simulation Structure: Objects and Flow</a:t>
             </a:r>
             <a:endParaRPr lang="en-US" sz="2900" dirty="0"/>
           </a:p>
@@ -9382,14 +10051,41 @@
       </p:sp>
       <p:sp>
         <p:nvSpPr>
-          <p:cNvPr id="4" name="Text 2"/>
-          <p:cNvSpPr/>
-          <p:nvPr/>
-        </p:nvSpPr>
-        <p:spPr>
-          <a:xfrm>
-            <a:off x="548640" y="1188720"/>
-            <a:ext cx="6309360" cy="4709160"/>
+          <p:cNvPr id="4" name="Shape 2"/>
+          <p:cNvSpPr/>
+          <p:nvPr/>
+        </p:nvSpPr>
+        <p:spPr>
+          <a:xfrm>
+            <a:off x="600304" y="1234440"/>
+            <a:ext cx="1572768" cy="777240"/>
+          </a:xfrm>
+          <a:prstGeom prst="roundRect">
+            <a:avLst>
+              <a:gd name="adj" fmla="val 9412"/>
+            </a:avLst>
+          </a:prstGeom>
+          <a:solidFill>
+            <a:srgbClr val="F1F5F9"/>
+          </a:solidFill>
+          <a:ln w="12700">
+            <a:solidFill>
+              <a:srgbClr val="E2E8F0"/>
+            </a:solidFill>
+            <a:prstDash val="solid"/>
+          </a:ln>
+        </p:spPr>
+      </p:sp>
+      <p:sp>
+        <p:nvSpPr>
+          <p:cNvPr id="5" name="Text 3"/>
+          <p:cNvSpPr/>
+          <p:nvPr/>
+        </p:nvSpPr>
+        <p:spPr>
+          <a:xfrm>
+            <a:off x="600304" y="1234440"/>
+            <a:ext cx="1572768" cy="777240"/>
           </a:xfrm>
           <a:prstGeom prst="rect">
             <a:avLst/>
@@ -9401,18 +10097,666 @@
           <a:bodyPr wrap="square" lIns="0" tIns="0" rIns="0" bIns="0" rtlCol="0" anchor="ctr"/>
           <a:lstStyle/>
           <a:p>
-            <a:pPr marL="228600" indent="-228600">
+            <a:pPr algn="ctr" indent="0" marL="0">
               <a:lnSpc>
-                <a:spcPct val="118000"/>
+                <a:spcPct val="100000"/>
+              </a:lnSpc>
+              <a:buNone/>
+            </a:pPr>
+            <a:r>
+              <a:rPr lang="en-US" sz="1150" b="1" dirty="0">
+                <a:solidFill>
+                  <a:srgbClr val="1E293B"/>
+                </a:solidFill>
+                <a:latin typeface="Calibri" pitchFamily="34" charset="0"/>
+                <a:ea typeface="Calibri" pitchFamily="34" charset="-122"/>
+                <a:cs typeface="Calibri" pitchFamily="34" charset="-120"/>
+              </a:rPr>
+              <a:t>Scenario</a:t>
+            </a:r>
+            <a:endParaRPr lang="en-US" sz="1150" dirty="0"/>
+          </a:p>
+        </p:txBody>
+      </p:sp>
+      <p:sp>
+        <p:nvSpPr>
+          <p:cNvPr id="6" name="Shape 4"/>
+          <p:cNvSpPr/>
+          <p:nvPr/>
+        </p:nvSpPr>
+        <p:spPr>
+          <a:xfrm>
+            <a:off x="2173072" y="1623060"/>
+            <a:ext cx="310896" cy="0"/>
+          </a:xfrm>
+          <a:prstGeom prst="line">
+            <a:avLst/>
+          </a:prstGeom>
+          <a:noFill/>
+          <a:ln w="19050">
+            <a:solidFill>
+              <a:srgbClr val="64748B"/>
+            </a:solidFill>
+            <a:prstDash val="solid"/>
+            <a:tailEnd type="triangle"/>
+          </a:ln>
+        </p:spPr>
+      </p:sp>
+      <p:sp>
+        <p:nvSpPr>
+          <p:cNvPr id="7" name="Shape 5"/>
+          <p:cNvSpPr/>
+          <p:nvPr/>
+        </p:nvSpPr>
+        <p:spPr>
+          <a:xfrm>
+            <a:off x="2483968" y="1234440"/>
+            <a:ext cx="1572768" cy="777240"/>
+          </a:xfrm>
+          <a:prstGeom prst="roundRect">
+            <a:avLst>
+              <a:gd name="adj" fmla="val 9412"/>
+            </a:avLst>
+          </a:prstGeom>
+          <a:solidFill>
+            <a:srgbClr val="F1F5F9"/>
+          </a:solidFill>
+          <a:ln w="12700">
+            <a:solidFill>
+              <a:srgbClr val="E2E8F0"/>
+            </a:solidFill>
+            <a:prstDash val="solid"/>
+          </a:ln>
+        </p:spPr>
+      </p:sp>
+      <p:sp>
+        <p:nvSpPr>
+          <p:cNvPr id="8" name="Text 6"/>
+          <p:cNvSpPr/>
+          <p:nvPr/>
+        </p:nvSpPr>
+        <p:spPr>
+          <a:xfrm>
+            <a:off x="2483968" y="1234440"/>
+            <a:ext cx="1572768" cy="777240"/>
+          </a:xfrm>
+          <a:prstGeom prst="rect">
+            <a:avLst/>
+          </a:prstGeom>
+          <a:noFill/>
+          <a:ln/>
+        </p:spPr>
+        <p:txBody>
+          <a:bodyPr wrap="square" lIns="0" tIns="0" rIns="0" bIns="0" rtlCol="0" anchor="ctr"/>
+          <a:lstStyle/>
+          <a:p>
+            <a:pPr algn="ctr" indent="0" marL="0">
+              <a:lnSpc>
+                <a:spcPct val="100000"/>
+              </a:lnSpc>
+              <a:buNone/>
+            </a:pPr>
+            <a:r>
+              <a:rPr lang="en-US" sz="1150" b="1" dirty="0">
+                <a:solidFill>
+                  <a:srgbClr val="1E293B"/>
+                </a:solidFill>
+                <a:latin typeface="Calibri" pitchFamily="34" charset="0"/>
+                <a:ea typeface="Calibri" pitchFamily="34" charset="-122"/>
+                <a:cs typeface="Calibri" pitchFamily="34" charset="-120"/>
+              </a:rPr>
+              <a:t>Simulator</a:t>
+            </a:r>
+            <a:endParaRPr lang="en-US" sz="1150" dirty="0"/>
+          </a:p>
+          <a:p>
+            <a:pPr algn="ctr" indent="0" marL="0">
+              <a:lnSpc>
+                <a:spcPct val="100000"/>
+              </a:lnSpc>
+              <a:buNone/>
+            </a:pPr>
+            <a:r>
+              <a:rPr lang="en-US" sz="1150" b="1" dirty="0">
+                <a:solidFill>
+                  <a:srgbClr val="1E293B"/>
+                </a:solidFill>
+                <a:latin typeface="Calibri" pitchFamily="34" charset="0"/>
+                <a:ea typeface="Calibri" pitchFamily="34" charset="-122"/>
+                <a:cs typeface="Calibri" pitchFamily="34" charset="-120"/>
+              </a:rPr>
+              <a:t>policy</a:t>
+            </a:r>
+            <a:endParaRPr lang="en-US" sz="1150" dirty="0"/>
+          </a:p>
+        </p:txBody>
+      </p:sp>
+      <p:sp>
+        <p:nvSpPr>
+          <p:cNvPr id="9" name="Shape 7"/>
+          <p:cNvSpPr/>
+          <p:nvPr/>
+        </p:nvSpPr>
+        <p:spPr>
+          <a:xfrm>
+            <a:off x="4056736" y="1623060"/>
+            <a:ext cx="310896" cy="0"/>
+          </a:xfrm>
+          <a:prstGeom prst="line">
+            <a:avLst/>
+          </a:prstGeom>
+          <a:noFill/>
+          <a:ln w="19050">
+            <a:solidFill>
+              <a:srgbClr val="64748B"/>
+            </a:solidFill>
+            <a:prstDash val="solid"/>
+            <a:tailEnd type="triangle"/>
+          </a:ln>
+        </p:spPr>
+      </p:sp>
+      <p:sp>
+        <p:nvSpPr>
+          <p:cNvPr id="10" name="Shape 8"/>
+          <p:cNvSpPr/>
+          <p:nvPr/>
+        </p:nvSpPr>
+        <p:spPr>
+          <a:xfrm>
+            <a:off x="4367632" y="1234440"/>
+            <a:ext cx="1572768" cy="777240"/>
+          </a:xfrm>
+          <a:prstGeom prst="roundRect">
+            <a:avLst>
+              <a:gd name="adj" fmla="val 9412"/>
+            </a:avLst>
+          </a:prstGeom>
+          <a:solidFill>
+            <a:srgbClr val="F1F5F9"/>
+          </a:solidFill>
+          <a:ln w="12700">
+            <a:solidFill>
+              <a:srgbClr val="E2E8F0"/>
+            </a:solidFill>
+            <a:prstDash val="solid"/>
+          </a:ln>
+        </p:spPr>
+      </p:sp>
+      <p:sp>
+        <p:nvSpPr>
+          <p:cNvPr id="11" name="Text 9"/>
+          <p:cNvSpPr/>
+          <p:nvPr/>
+        </p:nvSpPr>
+        <p:spPr>
+          <a:xfrm>
+            <a:off x="4367632" y="1234440"/>
+            <a:ext cx="1572768" cy="777240"/>
+          </a:xfrm>
+          <a:prstGeom prst="rect">
+            <a:avLst/>
+          </a:prstGeom>
+          <a:noFill/>
+          <a:ln/>
+        </p:spPr>
+        <p:txBody>
+          <a:bodyPr wrap="square" lIns="0" tIns="0" rIns="0" bIns="0" rtlCol="0" anchor="ctr"/>
+          <a:lstStyle/>
+          <a:p>
+            <a:pPr algn="ctr" indent="0" marL="0">
+              <a:lnSpc>
+                <a:spcPct val="100000"/>
+              </a:lnSpc>
+              <a:buNone/>
+            </a:pPr>
+            <a:r>
+              <a:rPr lang="en-US" sz="1150" b="1" dirty="0">
+                <a:solidFill>
+                  <a:srgbClr val="1E293B"/>
+                </a:solidFill>
+                <a:latin typeface="Calibri" pitchFamily="34" charset="0"/>
+                <a:ea typeface="Calibri" pitchFamily="34" charset="-122"/>
+                <a:cs typeface="Calibri" pitchFamily="34" charset="-120"/>
+              </a:rPr>
+              <a:t>Bin loads +</a:t>
+            </a:r>
+            <a:endParaRPr lang="en-US" sz="1150" dirty="0"/>
+          </a:p>
+          <a:p>
+            <a:pPr algn="ctr" indent="0" marL="0">
+              <a:lnSpc>
+                <a:spcPct val="100000"/>
+              </a:lnSpc>
+              <a:buNone/>
+            </a:pPr>
+            <a:r>
+              <a:rPr lang="en-US" sz="1150" b="1" dirty="0">
+                <a:solidFill>
+                  <a:srgbClr val="1E293B"/>
+                </a:solidFill>
+                <a:latin typeface="Calibri" pitchFamily="34" charset="0"/>
+                <a:ea typeface="Calibri" pitchFamily="34" charset="-122"/>
+                <a:cs typeface="Calibri" pitchFamily="34" charset="-120"/>
+              </a:rPr>
+              <a:t>cost model</a:t>
+            </a:r>
+            <a:endParaRPr lang="en-US" sz="1150" dirty="0"/>
+          </a:p>
+        </p:txBody>
+      </p:sp>
+      <p:sp>
+        <p:nvSpPr>
+          <p:cNvPr id="12" name="Shape 10"/>
+          <p:cNvSpPr/>
+          <p:nvPr/>
+        </p:nvSpPr>
+        <p:spPr>
+          <a:xfrm>
+            <a:off x="5940400" y="1623060"/>
+            <a:ext cx="310896" cy="0"/>
+          </a:xfrm>
+          <a:prstGeom prst="line">
+            <a:avLst/>
+          </a:prstGeom>
+          <a:noFill/>
+          <a:ln w="19050">
+            <a:solidFill>
+              <a:srgbClr val="64748B"/>
+            </a:solidFill>
+            <a:prstDash val="solid"/>
+            <a:tailEnd type="triangle"/>
+          </a:ln>
+        </p:spPr>
+      </p:sp>
+      <p:sp>
+        <p:nvSpPr>
+          <p:cNvPr id="13" name="Shape 11"/>
+          <p:cNvSpPr/>
+          <p:nvPr/>
+        </p:nvSpPr>
+        <p:spPr>
+          <a:xfrm>
+            <a:off x="6251296" y="1234440"/>
+            <a:ext cx="1572768" cy="777240"/>
+          </a:xfrm>
+          <a:prstGeom prst="roundRect">
+            <a:avLst>
+              <a:gd name="adj" fmla="val 9412"/>
+            </a:avLst>
+          </a:prstGeom>
+          <a:solidFill>
+            <a:srgbClr val="E8EFFD"/>
+          </a:solidFill>
+          <a:ln w="12700">
+            <a:solidFill>
+              <a:srgbClr val="E2E8F0"/>
+            </a:solidFill>
+            <a:prstDash val="solid"/>
+          </a:ln>
+        </p:spPr>
+      </p:sp>
+      <p:sp>
+        <p:nvSpPr>
+          <p:cNvPr id="14" name="Text 12"/>
+          <p:cNvSpPr/>
+          <p:nvPr/>
+        </p:nvSpPr>
+        <p:spPr>
+          <a:xfrm>
+            <a:off x="6251296" y="1234440"/>
+            <a:ext cx="1572768" cy="777240"/>
+          </a:xfrm>
+          <a:prstGeom prst="rect">
+            <a:avLst/>
+          </a:prstGeom>
+          <a:noFill/>
+          <a:ln/>
+        </p:spPr>
+        <p:txBody>
+          <a:bodyPr wrap="square" lIns="0" tIns="0" rIns="0" bIns="0" rtlCol="0" anchor="ctr"/>
+          <a:lstStyle/>
+          <a:p>
+            <a:pPr algn="ctr" indent="0" marL="0">
+              <a:lnSpc>
+                <a:spcPct val="100000"/>
+              </a:lnSpc>
+              <a:buNone/>
+            </a:pPr>
+            <a:r>
+              <a:rPr lang="en-US" sz="1150" b="1" dirty="0">
+                <a:solidFill>
+                  <a:srgbClr val="1E293B"/>
+                </a:solidFill>
+                <a:latin typeface="Calibri" pitchFamily="34" charset="0"/>
+                <a:ea typeface="Calibri" pitchFamily="34" charset="-122"/>
+                <a:cs typeface="Calibri" pitchFamily="34" charset="-120"/>
+              </a:rPr>
+              <a:t>Aggregated</a:t>
+            </a:r>
+            <a:endParaRPr lang="en-US" sz="1150" dirty="0"/>
+          </a:p>
+          <a:p>
+            <a:pPr algn="ctr" indent="0" marL="0">
+              <a:lnSpc>
+                <a:spcPct val="100000"/>
+              </a:lnSpc>
+              <a:buNone/>
+            </a:pPr>
+            <a:r>
+              <a:rPr lang="en-US" sz="1150" b="1" dirty="0">
+                <a:solidFill>
+                  <a:srgbClr val="1E293B"/>
+                </a:solidFill>
+                <a:latin typeface="Calibri" pitchFamily="34" charset="0"/>
+                <a:ea typeface="Calibri" pitchFamily="34" charset="-122"/>
+                <a:cs typeface="Calibri" pitchFamily="34" charset="-120"/>
+              </a:rPr>
+              <a:t>metrics</a:t>
+            </a:r>
+            <a:endParaRPr lang="en-US" sz="1150" dirty="0"/>
+          </a:p>
+        </p:txBody>
+      </p:sp>
+      <p:sp>
+        <p:nvSpPr>
+          <p:cNvPr id="15" name="Shape 13"/>
+          <p:cNvSpPr/>
+          <p:nvPr/>
+        </p:nvSpPr>
+        <p:spPr>
+          <a:xfrm>
+            <a:off x="7824064" y="1623060"/>
+            <a:ext cx="310896" cy="0"/>
+          </a:xfrm>
+          <a:prstGeom prst="line">
+            <a:avLst/>
+          </a:prstGeom>
+          <a:noFill/>
+          <a:ln w="19050">
+            <a:solidFill>
+              <a:srgbClr val="64748B"/>
+            </a:solidFill>
+            <a:prstDash val="solid"/>
+            <a:tailEnd type="triangle"/>
+          </a:ln>
+        </p:spPr>
+      </p:sp>
+      <p:sp>
+        <p:nvSpPr>
+          <p:cNvPr id="16" name="Shape 14"/>
+          <p:cNvSpPr/>
+          <p:nvPr/>
+        </p:nvSpPr>
+        <p:spPr>
+          <a:xfrm>
+            <a:off x="8134960" y="1234440"/>
+            <a:ext cx="1572768" cy="777240"/>
+          </a:xfrm>
+          <a:prstGeom prst="roundRect">
+            <a:avLst>
+              <a:gd name="adj" fmla="val 9412"/>
+            </a:avLst>
+          </a:prstGeom>
+          <a:solidFill>
+            <a:srgbClr val="F1F5F9"/>
+          </a:solidFill>
+          <a:ln w="12700">
+            <a:solidFill>
+              <a:srgbClr val="E2E8F0"/>
+            </a:solidFill>
+            <a:prstDash val="solid"/>
+          </a:ln>
+        </p:spPr>
+      </p:sp>
+      <p:sp>
+        <p:nvSpPr>
+          <p:cNvPr id="17" name="Text 15"/>
+          <p:cNvSpPr/>
+          <p:nvPr/>
+        </p:nvSpPr>
+        <p:spPr>
+          <a:xfrm>
+            <a:off x="8134960" y="1234440"/>
+            <a:ext cx="1572768" cy="777240"/>
+          </a:xfrm>
+          <a:prstGeom prst="rect">
+            <a:avLst/>
+          </a:prstGeom>
+          <a:noFill/>
+          <a:ln/>
+        </p:spPr>
+        <p:txBody>
+          <a:bodyPr wrap="square" lIns="0" tIns="0" rIns="0" bIns="0" rtlCol="0" anchor="ctr"/>
+          <a:lstStyle/>
+          <a:p>
+            <a:pPr algn="ctr" indent="0" marL="0">
+              <a:lnSpc>
+                <a:spcPct val="100000"/>
+              </a:lnSpc>
+              <a:buNone/>
+            </a:pPr>
+            <a:r>
+              <a:rPr lang="en-US" sz="1150" b="1" dirty="0">
+                <a:solidFill>
+                  <a:srgbClr val="1E293B"/>
+                </a:solidFill>
+                <a:latin typeface="Calibri" pitchFamily="34" charset="0"/>
+                <a:ea typeface="Calibri" pitchFamily="34" charset="-122"/>
+                <a:cs typeface="Calibri" pitchFamily="34" charset="-120"/>
+              </a:rPr>
+              <a:t>CSV</a:t>
+            </a:r>
+            <a:endParaRPr lang="en-US" sz="1150" dirty="0"/>
+          </a:p>
+        </p:txBody>
+      </p:sp>
+      <p:sp>
+        <p:nvSpPr>
+          <p:cNvPr id="18" name="Shape 16"/>
+          <p:cNvSpPr/>
+          <p:nvPr/>
+        </p:nvSpPr>
+        <p:spPr>
+          <a:xfrm>
+            <a:off x="9707728" y="1623060"/>
+            <a:ext cx="310896" cy="0"/>
+          </a:xfrm>
+          <a:prstGeom prst="line">
+            <a:avLst/>
+          </a:prstGeom>
+          <a:noFill/>
+          <a:ln w="19050">
+            <a:solidFill>
+              <a:srgbClr val="64748B"/>
+            </a:solidFill>
+            <a:prstDash val="solid"/>
+            <a:tailEnd type="triangle"/>
+          </a:ln>
+        </p:spPr>
+      </p:sp>
+      <p:sp>
+        <p:nvSpPr>
+          <p:cNvPr id="19" name="Shape 17"/>
+          <p:cNvSpPr/>
+          <p:nvPr/>
+        </p:nvSpPr>
+        <p:spPr>
+          <a:xfrm>
+            <a:off x="10018624" y="1234440"/>
+            <a:ext cx="1572768" cy="777240"/>
+          </a:xfrm>
+          <a:prstGeom prst="roundRect">
+            <a:avLst>
+              <a:gd name="adj" fmla="val 9412"/>
+            </a:avLst>
+          </a:prstGeom>
+          <a:solidFill>
+            <a:srgbClr val="F1F5F9"/>
+          </a:solidFill>
+          <a:ln w="12700">
+            <a:solidFill>
+              <a:srgbClr val="E2E8F0"/>
+            </a:solidFill>
+            <a:prstDash val="solid"/>
+          </a:ln>
+        </p:spPr>
+      </p:sp>
+      <p:sp>
+        <p:nvSpPr>
+          <p:cNvPr id="20" name="Text 18"/>
+          <p:cNvSpPr/>
+          <p:nvPr/>
+        </p:nvSpPr>
+        <p:spPr>
+          <a:xfrm>
+            <a:off x="10018624" y="1234440"/>
+            <a:ext cx="1572768" cy="777240"/>
+          </a:xfrm>
+          <a:prstGeom prst="rect">
+            <a:avLst/>
+          </a:prstGeom>
+          <a:noFill/>
+          <a:ln/>
+        </p:spPr>
+        <p:txBody>
+          <a:bodyPr wrap="square" lIns="0" tIns="0" rIns="0" bIns="0" rtlCol="0" anchor="ctr"/>
+          <a:lstStyle/>
+          <a:p>
+            <a:pPr algn="ctr" indent="0" marL="0">
+              <a:lnSpc>
+                <a:spcPct val="100000"/>
+              </a:lnSpc>
+              <a:buNone/>
+            </a:pPr>
+            <a:r>
+              <a:rPr lang="en-US" sz="1150" b="1" dirty="0">
+                <a:solidFill>
+                  <a:srgbClr val="1E293B"/>
+                </a:solidFill>
+                <a:latin typeface="Calibri" pitchFamily="34" charset="0"/>
+                <a:ea typeface="Calibri" pitchFamily="34" charset="-122"/>
+                <a:cs typeface="Calibri" pitchFamily="34" charset="-120"/>
+              </a:rPr>
+              <a:t>Plots</a:t>
+            </a:r>
+            <a:endParaRPr lang="en-US" sz="1150" dirty="0"/>
+          </a:p>
+        </p:txBody>
+      </p:sp>
+      <p:sp>
+        <p:nvSpPr>
+          <p:cNvPr id="21" name="Shape 19"/>
+          <p:cNvSpPr/>
+          <p:nvPr/>
+        </p:nvSpPr>
+        <p:spPr>
+          <a:xfrm>
+            <a:off x="548640" y="2423160"/>
+            <a:ext cx="3545738" cy="3337560"/>
+          </a:xfrm>
+          <a:prstGeom prst="roundRect">
+            <a:avLst>
+              <a:gd name="adj" fmla="val 1918"/>
+            </a:avLst>
+          </a:prstGeom>
+          <a:solidFill>
+            <a:srgbClr val="F1F5F9"/>
+          </a:solidFill>
+          <a:ln/>
+        </p:spPr>
+      </p:sp>
+      <p:sp>
+        <p:nvSpPr>
+          <p:cNvPr id="22" name="Shape 20"/>
+          <p:cNvSpPr/>
+          <p:nvPr/>
+        </p:nvSpPr>
+        <p:spPr>
+          <a:xfrm>
+            <a:off x="548640" y="2423160"/>
+            <a:ext cx="3545738" cy="54864"/>
+          </a:xfrm>
+          <a:prstGeom prst="rect">
+            <a:avLst/>
+          </a:prstGeom>
+          <a:solidFill>
+            <a:srgbClr val="2563EB"/>
+          </a:solidFill>
+          <a:ln/>
+        </p:spPr>
+      </p:sp>
+      <p:sp>
+        <p:nvSpPr>
+          <p:cNvPr id="23" name="Text 21"/>
+          <p:cNvSpPr/>
+          <p:nvPr/>
+        </p:nvSpPr>
+        <p:spPr>
+          <a:xfrm>
+            <a:off x="731520" y="2587752"/>
+            <a:ext cx="3179978" cy="292608"/>
+          </a:xfrm>
+          <a:prstGeom prst="rect">
+            <a:avLst/>
+          </a:prstGeom>
+          <a:noFill/>
+          <a:ln/>
+        </p:spPr>
+        <p:txBody>
+          <a:bodyPr wrap="square" lIns="0" tIns="0" rIns="0" bIns="0" rtlCol="0" anchor="ctr"/>
+          <a:lstStyle/>
+          <a:p>
+            <a:pPr indent="0" marL="0">
+              <a:buNone/>
+            </a:pPr>
+            <a:r>
+              <a:rPr lang="en-US" sz="1200" b="1" spc="50" kern="0" dirty="0">
+                <a:solidFill>
+                  <a:srgbClr val="2563EB"/>
+                </a:solidFill>
+                <a:latin typeface="Calibri" pitchFamily="34" charset="0"/>
+                <a:ea typeface="Calibri" pitchFamily="34" charset="-122"/>
+                <a:cs typeface="Calibri" pitchFamily="34" charset="-120"/>
+              </a:rPr>
+              <a:t>SCENARIO</a:t>
+            </a:r>
+            <a:endParaRPr lang="en-US" sz="1200" dirty="0"/>
+          </a:p>
+        </p:txBody>
+      </p:sp>
+      <p:sp>
+        <p:nvSpPr>
+          <p:cNvPr id="24" name="Text 22"/>
+          <p:cNvSpPr/>
+          <p:nvPr/>
+        </p:nvSpPr>
+        <p:spPr>
+          <a:xfrm>
+            <a:off x="731520" y="2953512"/>
+            <a:ext cx="3179978" cy="2670048"/>
+          </a:xfrm>
+          <a:prstGeom prst="rect">
+            <a:avLst/>
+          </a:prstGeom>
+          <a:noFill/>
+          <a:ln/>
+        </p:spPr>
+        <p:txBody>
+          <a:bodyPr wrap="square" lIns="0" tIns="0" rIns="0" bIns="0" rtlCol="0" anchor="t"/>
+          <a:lstStyle/>
+          <a:p>
+            <a:pPr marL="152400" indent="-152400">
+              <a:lnSpc>
+                <a:spcPct val="105000"/>
               </a:lnSpc>
               <a:spcAft>
-                <a:spcPts val="2600"/>
+                <a:spcPts val="700"/>
               </a:spcAft>
               <a:buSzPct val="100000"/>
               <a:buChar char="•"/>
             </a:pPr>
             <a:r>
-              <a:rPr lang="en-US" sz="1700" dirty="0">
+              <a:rPr lang="en-US" sz="1100" dirty="0">
                 <a:solidFill>
                   <a:srgbClr val="1E293B"/>
                 </a:solidFill>
@@ -9420,23 +10764,23 @@
                 <a:ea typeface="Calibri" pitchFamily="34" charset="-122"/>
                 <a:cs typeface="Calibri" pitchFamily="34" charset="-120"/>
               </a:rPr>
-              <a:t>Random allocation has a heavy maximum-load tail.</a:t>
-            </a:r>
-            <a:endParaRPr lang="en-US" sz="1700" dirty="0"/>
-          </a:p>
-          <a:p>
-            <a:pPr marL="228600" indent="-228600">
+              <a:t>10,000 balls · 16 or 32 bins · 10 trials</a:t>
+            </a:r>
+            <a:endParaRPr lang="en-US" sz="1100" dirty="0"/>
+          </a:p>
+          <a:p>
+            <a:pPr marL="152400" indent="-152400">
               <a:lnSpc>
-                <a:spcPct val="118000"/>
+                <a:spcPct val="105000"/>
               </a:lnSpc>
               <a:spcAft>
-                <a:spcPts val="2600"/>
+                <a:spcPts val="700"/>
               </a:spcAft>
               <a:buSzPct val="100000"/>
               <a:buChar char="•"/>
             </a:pPr>
             <a:r>
-              <a:rPr lang="en-US" sz="1700" dirty="0">
+              <a:rPr lang="en-US" sz="1100" dirty="0">
                 <a:solidFill>
                   <a:srgbClr val="1E293B"/>
                 </a:solidFill>
@@ -9444,23 +10788,23 @@
                 <a:ea typeface="Calibri" pitchFamily="34" charset="-122"/>
                 <a:cs typeface="Calibri" pitchFamily="34" charset="-120"/>
               </a:rPr>
-              <a:t>The Power of Two Choices result gives a dramatic theoretical improvement over a single random choice.</a:t>
-            </a:r>
-            <a:endParaRPr lang="en-US" sz="1700" dirty="0"/>
-          </a:p>
-          <a:p>
-            <a:pPr marL="228600" indent="-228600">
+              <a:t>Weighted or unweighted balls</a:t>
+            </a:r>
+            <a:endParaRPr lang="en-US" sz="1100" dirty="0"/>
+          </a:p>
+          <a:p>
+            <a:pPr marL="152400" indent="-152400">
               <a:lnSpc>
-                <a:spcPct val="118000"/>
+                <a:spcPct val="105000"/>
               </a:lnSpc>
               <a:spcAft>
-                <a:spcPts val="2600"/>
+                <a:spcPts val="700"/>
               </a:spcAft>
               <a:buSzPct val="100000"/>
               <a:buChar char="•"/>
             </a:pPr>
             <a:r>
-              <a:rPr lang="en-US" sz="1700" dirty="0">
+              <a:rPr lang="en-US" sz="1100" dirty="0">
                 <a:solidFill>
                   <a:srgbClr val="1E293B"/>
                 </a:solidFill>
@@ -9468,23 +10812,23 @@
                 <a:ea typeface="Calibri" pitchFamily="34" charset="-122"/>
                 <a:cs typeface="Calibri" pitchFamily="34" charset="-120"/>
               </a:rPr>
-              <a:t>Additional choices (k &gt; 2) help further, but with diminishing returns.</a:t>
-            </a:r>
-            <a:endParaRPr lang="en-US" sz="1700" dirty="0"/>
-          </a:p>
-          <a:p>
-            <a:pPr marL="228600" indent="-228600">
+              <a:t>Empty or randomly initialized bins</a:t>
+            </a:r>
+            <a:endParaRPr lang="en-US" sz="1100" dirty="0"/>
+          </a:p>
+          <a:p>
+            <a:pPr marL="152400" indent="-152400">
               <a:lnSpc>
-                <a:spcPct val="118000"/>
+                <a:spcPct val="105000"/>
               </a:lnSpc>
               <a:spcAft>
-                <a:spcPts val="2600"/>
+                <a:spcPts val="700"/>
               </a:spcAft>
               <a:buSzPct val="100000"/>
               <a:buChar char="•"/>
             </a:pPr>
             <a:r>
-              <a:rPr lang="en-US" sz="1700" dirty="0">
+              <a:rPr lang="en-US" sz="1100" dirty="0">
                 <a:solidFill>
                   <a:srgbClr val="1E293B"/>
                 </a:solidFill>
@@ -9492,44 +10836,88 @@
                 <a:ea typeface="Calibri" pitchFamily="34" charset="-122"/>
                 <a:cs typeface="Calibri" pitchFamily="34" charset="-120"/>
               </a:rPr>
-              <a:t>The simulation checks whether this still holds once cost, weights, and initialization are introduced.</a:t>
-            </a:r>
-            <a:endParaRPr lang="en-US" sz="1700" dirty="0"/>
-          </a:p>
-        </p:txBody>
-      </p:sp>
-      <p:sp>
-        <p:nvSpPr>
-          <p:cNvPr id="5" name="Shape 3"/>
-          <p:cNvSpPr/>
-          <p:nvPr/>
-        </p:nvSpPr>
-        <p:spPr>
-          <a:xfrm>
-            <a:off x="7178040" y="1965960"/>
-            <a:ext cx="4465015" cy="2286000"/>
+              <a:t>Selected policy + parameters (k, heap size s)</a:t>
+            </a:r>
+            <a:endParaRPr lang="en-US" sz="1100" dirty="0"/>
+          </a:p>
+          <a:p>
+            <a:pPr marL="152400" indent="-152400">
+              <a:lnSpc>
+                <a:spcPct val="105000"/>
+              </a:lnSpc>
+              <a:spcAft>
+                <a:spcPts val="700"/>
+              </a:spcAft>
+              <a:buSzPct val="100000"/>
+              <a:buChar char="•"/>
+            </a:pPr>
+            <a:r>
+              <a:rPr lang="en-US" sz="1100" dirty="0">
+                <a:solidFill>
+                  <a:srgbClr val="1E293B"/>
+                </a:solidFill>
+                <a:latin typeface="Calibri" pitchFamily="34" charset="0"/>
+                <a:ea typeface="Calibri" pitchFamily="34" charset="-122"/>
+                <a:cs typeface="Calibri" pitchFamily="34" charset="-120"/>
+              </a:rPr>
+              <a:t>Seeds and cost weights</a:t>
+            </a:r>
+            <a:endParaRPr lang="en-US" sz="1100" dirty="0"/>
+          </a:p>
+        </p:txBody>
+      </p:sp>
+      <p:sp>
+        <p:nvSpPr>
+          <p:cNvPr id="25" name="Shape 23"/>
+          <p:cNvSpPr/>
+          <p:nvPr/>
+        </p:nvSpPr>
+        <p:spPr>
+          <a:xfrm>
+            <a:off x="4322978" y="2423160"/>
+            <a:ext cx="3545738" cy="3337560"/>
           </a:xfrm>
           <a:prstGeom prst="roundRect">
             <a:avLst>
-              <a:gd name="adj" fmla="val 3600"/>
+              <a:gd name="adj" fmla="val 1918"/>
             </a:avLst>
           </a:prstGeom>
           <a:solidFill>
-            <a:srgbClr val="E8EFFD"/>
+            <a:srgbClr val="F1F5F9"/>
           </a:solidFill>
           <a:ln/>
         </p:spPr>
       </p:sp>
       <p:sp>
         <p:nvSpPr>
-          <p:cNvPr id="6" name="Text 4"/>
-          <p:cNvSpPr/>
-          <p:nvPr/>
-        </p:nvSpPr>
-        <p:spPr>
-          <a:xfrm>
-            <a:off x="7452360" y="2212848"/>
-            <a:ext cx="3916375" cy="274320"/>
+          <p:cNvPr id="26" name="Shape 24"/>
+          <p:cNvSpPr/>
+          <p:nvPr/>
+        </p:nvSpPr>
+        <p:spPr>
+          <a:xfrm>
+            <a:off x="4322978" y="2423160"/>
+            <a:ext cx="3545738" cy="54864"/>
+          </a:xfrm>
+          <a:prstGeom prst="rect">
+            <a:avLst/>
+          </a:prstGeom>
+          <a:solidFill>
+            <a:srgbClr val="15803D"/>
+          </a:solidFill>
+          <a:ln/>
+        </p:spPr>
+      </p:sp>
+      <p:sp>
+        <p:nvSpPr>
+          <p:cNvPr id="27" name="Text 25"/>
+          <p:cNvSpPr/>
+          <p:nvPr/>
+        </p:nvSpPr>
+        <p:spPr>
+          <a:xfrm>
+            <a:off x="4505858" y="2587752"/>
+            <a:ext cx="3179978" cy="292608"/>
           </a:xfrm>
           <a:prstGeom prst="rect">
             <a:avLst/>
@@ -9545,7 +10933,218 @@
               <a:buNone/>
             </a:pPr>
             <a:r>
-              <a:rPr lang="en-US" sz="1100" b="1" spc="150" kern="0" dirty="0">
+              <a:rPr lang="en-US" sz="1200" b="1" spc="50" kern="0" dirty="0">
+                <a:solidFill>
+                  <a:srgbClr val="15803D"/>
+                </a:solidFill>
+                <a:latin typeface="Calibri" pitchFamily="34" charset="0"/>
+                <a:ea typeface="Calibri" pitchFamily="34" charset="-122"/>
+                <a:cs typeface="Calibri" pitchFamily="34" charset="-120"/>
+              </a:rPr>
+              <a:t>SIMULATORS</a:t>
+            </a:r>
+            <a:endParaRPr lang="en-US" sz="1200" dirty="0"/>
+          </a:p>
+        </p:txBody>
+      </p:sp>
+      <p:sp>
+        <p:nvSpPr>
+          <p:cNvPr id="28" name="Shape 26"/>
+          <p:cNvSpPr/>
+          <p:nvPr/>
+        </p:nvSpPr>
+        <p:spPr>
+          <a:xfrm>
+            <a:off x="4505858" y="2935224"/>
+            <a:ext cx="3179978" cy="841248"/>
+          </a:xfrm>
+          <a:prstGeom prst="roundRect">
+            <a:avLst>
+              <a:gd name="adj" fmla="val 6522"/>
+            </a:avLst>
+          </a:prstGeom>
+          <a:solidFill>
+            <a:srgbClr val="FFFFFF"/>
+          </a:solidFill>
+          <a:ln w="12700">
+            <a:solidFill>
+              <a:srgbClr val="15803D"/>
+            </a:solidFill>
+            <a:prstDash val="dash"/>
+          </a:ln>
+        </p:spPr>
+      </p:sp>
+      <p:sp>
+        <p:nvSpPr>
+          <p:cNvPr id="29" name="Text 27"/>
+          <p:cNvSpPr/>
+          <p:nvPr/>
+        </p:nvSpPr>
+        <p:spPr>
+          <a:xfrm>
+            <a:off x="4615586" y="3026664"/>
+            <a:ext cx="2960522" cy="237744"/>
+          </a:xfrm>
+          <a:prstGeom prst="rect">
+            <a:avLst/>
+          </a:prstGeom>
+          <a:noFill/>
+          <a:ln/>
+        </p:spPr>
+        <p:txBody>
+          <a:bodyPr wrap="square" lIns="0" tIns="0" rIns="0" bIns="0" rtlCol="0" anchor="ctr"/>
+          <a:lstStyle/>
+          <a:p>
+            <a:pPr indent="0" marL="0">
+              <a:buNone/>
+            </a:pPr>
+            <a:r>
+              <a:rPr lang="en-US" sz="1150" b="1" dirty="0">
+                <a:solidFill>
+                  <a:srgbClr val="15803D"/>
+                </a:solidFill>
+                <a:latin typeface="Calibri" pitchFamily="34" charset="0"/>
+                <a:ea typeface="Calibri" pitchFamily="34" charset="-122"/>
+                <a:cs typeface="Calibri" pitchFamily="34" charset="-120"/>
+              </a:rPr>
+              <a:t>SimulationBase</a:t>
+            </a:r>
+            <a:pPr indent="0" marL="0">
+              <a:buNone/>
+            </a:pPr>
+            <a:r>
+              <a:rPr lang="en-US" sz="950" i="1" dirty="0">
+                <a:solidFill>
+                  <a:srgbClr val="64748B"/>
+                </a:solidFill>
+                <a:latin typeface="Calibri" pitchFamily="34" charset="0"/>
+                <a:ea typeface="Calibri" pitchFamily="34" charset="-122"/>
+                <a:cs typeface="Calibri" pitchFamily="34" charset="-120"/>
+              </a:rPr>
+              <a:t>  ‹abstract›</a:t>
+            </a:r>
+            <a:endParaRPr lang="en-US" sz="1150" dirty="0"/>
+          </a:p>
+        </p:txBody>
+      </p:sp>
+      <p:sp>
+        <p:nvSpPr>
+          <p:cNvPr id="30" name="Text 28"/>
+          <p:cNvSpPr/>
+          <p:nvPr/>
+        </p:nvSpPr>
+        <p:spPr>
+          <a:xfrm>
+            <a:off x="4615586" y="3264408"/>
+            <a:ext cx="2960522" cy="237744"/>
+          </a:xfrm>
+          <a:prstGeom prst="rect">
+            <a:avLst/>
+          </a:prstGeom>
+          <a:noFill/>
+          <a:ln/>
+        </p:spPr>
+        <p:txBody>
+          <a:bodyPr wrap="square" lIns="0" tIns="0" rIns="0" bIns="0" rtlCol="0" anchor="ctr"/>
+          <a:lstStyle/>
+          <a:p>
+            <a:pPr indent="0" marL="0">
+              <a:buNone/>
+            </a:pPr>
+            <a:r>
+              <a:rPr lang="en-US" sz="980" dirty="0">
+                <a:solidFill>
+                  <a:srgbClr val="64748B"/>
+                </a:solidFill>
+                <a:latin typeface="Calibri" pitchFamily="34" charset="0"/>
+                <a:ea typeface="Calibri" pitchFamily="34" charset="-122"/>
+                <a:cs typeface="Calibri" pitchFamily="34" charset="-120"/>
+              </a:rPr>
+              <a:t>Owns the load array, ball arrival, and cost accumulation.</a:t>
+            </a:r>
+            <a:endParaRPr lang="en-US" sz="980" dirty="0"/>
+          </a:p>
+        </p:txBody>
+      </p:sp>
+      <p:sp>
+        <p:nvSpPr>
+          <p:cNvPr id="31" name="Text 29"/>
+          <p:cNvSpPr/>
+          <p:nvPr/>
+        </p:nvSpPr>
+        <p:spPr>
+          <a:xfrm>
+            <a:off x="4615586" y="3493008"/>
+            <a:ext cx="2960522" cy="237744"/>
+          </a:xfrm>
+          <a:prstGeom prst="rect">
+            <a:avLst/>
+          </a:prstGeom>
+          <a:noFill/>
+          <a:ln/>
+        </p:spPr>
+        <p:txBody>
+          <a:bodyPr wrap="square" lIns="0" tIns="0" rIns="0" bIns="0" rtlCol="0" anchor="ctr"/>
+          <a:lstStyle/>
+          <a:p>
+            <a:pPr indent="0" marL="0">
+              <a:buNone/>
+            </a:pPr>
+            <a:r>
+              <a:rPr lang="en-US" sz="980" i="1" dirty="0">
+                <a:solidFill>
+                  <a:srgbClr val="64748B"/>
+                </a:solidFill>
+                <a:latin typeface="Calibri" pitchFamily="34" charset="0"/>
+                <a:ea typeface="Calibri" pitchFamily="34" charset="-122"/>
+                <a:cs typeface="Calibri" pitchFamily="34" charset="-120"/>
+              </a:rPr>
+              <a:t>Subclasses implement only: select bin.</a:t>
+            </a:r>
+            <a:endParaRPr lang="en-US" sz="980" dirty="0"/>
+          </a:p>
+        </p:txBody>
+      </p:sp>
+      <p:sp>
+        <p:nvSpPr>
+          <p:cNvPr id="32" name="Text 30"/>
+          <p:cNvSpPr/>
+          <p:nvPr/>
+        </p:nvSpPr>
+        <p:spPr>
+          <a:xfrm>
+            <a:off x="4505858" y="3922776"/>
+            <a:ext cx="3179978" cy="237744"/>
+          </a:xfrm>
+          <a:prstGeom prst="rect">
+            <a:avLst/>
+          </a:prstGeom>
+          <a:noFill/>
+          <a:ln/>
+        </p:spPr>
+        <p:txBody>
+          <a:bodyPr wrap="square" lIns="0" tIns="0" rIns="0" bIns="0" rtlCol="0" anchor="ctr"/>
+          <a:lstStyle/>
+          <a:p>
+            <a:pPr indent="0" marL="0">
+              <a:buNone/>
+            </a:pPr>
+            <a:r>
+              <a:rPr lang="en-US" sz="1080" b="1" dirty="0">
+                <a:solidFill>
+                  <a:srgbClr val="E2E8F0"/>
+                </a:solidFill>
+                <a:latin typeface="Calibri" pitchFamily="34" charset="0"/>
+                <a:ea typeface="Calibri" pitchFamily="34" charset="-122"/>
+                <a:cs typeface="Calibri" pitchFamily="34" charset="-120"/>
+              </a:rPr>
+              <a:t>↳ </a:t>
+            </a:r>
+            <a:pPr indent="0" marL="0">
+              <a:buNone/>
+            </a:pPr>
+            <a:r>
+              <a:rPr lang="en-US" sz="1080" b="1" dirty="0">
                 <a:solidFill>
                   <a:srgbClr val="2563EB"/>
                 </a:solidFill>
@@ -9553,93 +11152,461 @@
                 <a:ea typeface="Calibri" pitchFamily="34" charset="-122"/>
                 <a:cs typeface="Calibri" pitchFamily="34" charset="-120"/>
               </a:rPr>
-              <a:t>HYPOTHESIS</a:t>
+              <a:t>PowerKSimulator</a:t>
+            </a:r>
+            <a:endParaRPr lang="en-US" sz="1080" dirty="0"/>
+          </a:p>
+        </p:txBody>
+      </p:sp>
+      <p:sp>
+        <p:nvSpPr>
+          <p:cNvPr id="33" name="Text 31"/>
+          <p:cNvSpPr/>
+          <p:nvPr/>
+        </p:nvSpPr>
+        <p:spPr>
+          <a:xfrm>
+            <a:off x="4707026" y="4142232"/>
+            <a:ext cx="2978810" cy="219456"/>
+          </a:xfrm>
+          <a:prstGeom prst="rect">
+            <a:avLst/>
+          </a:prstGeom>
+          <a:noFill/>
+          <a:ln/>
+        </p:spPr>
+        <p:txBody>
+          <a:bodyPr wrap="square" lIns="0" tIns="0" rIns="0" bIns="0" rtlCol="0" anchor="ctr"/>
+          <a:lstStyle/>
+          <a:p>
+            <a:pPr indent="0" marL="0">
+              <a:buNone/>
+            </a:pPr>
+            <a:r>
+              <a:rPr lang="en-US" sz="980" dirty="0">
+                <a:solidFill>
+                  <a:srgbClr val="64748B"/>
+                </a:solidFill>
+                <a:latin typeface="Calibri" pitchFamily="34" charset="0"/>
+                <a:ea typeface="Calibri" pitchFamily="34" charset="-122"/>
+                <a:cs typeface="Calibri" pitchFamily="34" charset="-120"/>
+              </a:rPr>
+              <a:t>Random, Power-k, Absolute minimum</a:t>
+            </a:r>
+            <a:endParaRPr lang="en-US" sz="980" dirty="0"/>
+          </a:p>
+        </p:txBody>
+      </p:sp>
+      <p:sp>
+        <p:nvSpPr>
+          <p:cNvPr id="34" name="Text 32"/>
+          <p:cNvSpPr/>
+          <p:nvPr/>
+        </p:nvSpPr>
+        <p:spPr>
+          <a:xfrm>
+            <a:off x="4505858" y="4434840"/>
+            <a:ext cx="3179978" cy="237744"/>
+          </a:xfrm>
+          <a:prstGeom prst="rect">
+            <a:avLst/>
+          </a:prstGeom>
+          <a:noFill/>
+          <a:ln/>
+        </p:spPr>
+        <p:txBody>
+          <a:bodyPr wrap="square" lIns="0" tIns="0" rIns="0" bIns="0" rtlCol="0" anchor="ctr"/>
+          <a:lstStyle/>
+          <a:p>
+            <a:pPr indent="0" marL="0">
+              <a:buNone/>
+            </a:pPr>
+            <a:r>
+              <a:rPr lang="en-US" sz="1080" b="1" dirty="0">
+                <a:solidFill>
+                  <a:srgbClr val="E2E8F0"/>
+                </a:solidFill>
+                <a:latin typeface="Calibri" pitchFamily="34" charset="0"/>
+                <a:ea typeface="Calibri" pitchFamily="34" charset="-122"/>
+                <a:cs typeface="Calibri" pitchFamily="34" charset="-120"/>
+              </a:rPr>
+              <a:t>↳ </a:t>
+            </a:r>
+            <a:pPr indent="0" marL="0">
+              <a:buNone/>
+            </a:pPr>
+            <a:r>
+              <a:rPr lang="en-US" sz="1080" b="1" dirty="0">
+                <a:solidFill>
+                  <a:srgbClr val="15803D"/>
+                </a:solidFill>
+                <a:latin typeface="Calibri" pitchFamily="34" charset="0"/>
+                <a:ea typeface="Calibri" pitchFamily="34" charset="-122"/>
+                <a:cs typeface="Calibri" pitchFamily="34" charset="-120"/>
+              </a:rPr>
+              <a:t>StatefulRoundRobinSimulator</a:t>
+            </a:r>
+            <a:endParaRPr lang="en-US" sz="1080" dirty="0"/>
+          </a:p>
+        </p:txBody>
+      </p:sp>
+      <p:sp>
+        <p:nvSpPr>
+          <p:cNvPr id="35" name="Text 33"/>
+          <p:cNvSpPr/>
+          <p:nvPr/>
+        </p:nvSpPr>
+        <p:spPr>
+          <a:xfrm>
+            <a:off x="4707026" y="4654296"/>
+            <a:ext cx="2978810" cy="219456"/>
+          </a:xfrm>
+          <a:prstGeom prst="rect">
+            <a:avLst/>
+          </a:prstGeom>
+          <a:noFill/>
+          <a:ln/>
+        </p:spPr>
+        <p:txBody>
+          <a:bodyPr wrap="square" lIns="0" tIns="0" rIns="0" bIns="0" rtlCol="0" anchor="ctr"/>
+          <a:lstStyle/>
+          <a:p>
+            <a:pPr indent="0" marL="0">
+              <a:buNone/>
+            </a:pPr>
+            <a:r>
+              <a:rPr lang="en-US" sz="980" dirty="0">
+                <a:solidFill>
+                  <a:srgbClr val="64748B"/>
+                </a:solidFill>
+                <a:latin typeface="Calibri" pitchFamily="34" charset="0"/>
+                <a:ea typeface="Calibri" pitchFamily="34" charset="-122"/>
+                <a:cs typeface="Calibri" pitchFamily="34" charset="-120"/>
+              </a:rPr>
+              <a:t>Round-robin pointer state</a:t>
+            </a:r>
+            <a:endParaRPr lang="en-US" sz="980" dirty="0"/>
+          </a:p>
+        </p:txBody>
+      </p:sp>
+      <p:sp>
+        <p:nvSpPr>
+          <p:cNvPr id="36" name="Text 34"/>
+          <p:cNvSpPr/>
+          <p:nvPr/>
+        </p:nvSpPr>
+        <p:spPr>
+          <a:xfrm>
+            <a:off x="4505858" y="4946904"/>
+            <a:ext cx="3179978" cy="237744"/>
+          </a:xfrm>
+          <a:prstGeom prst="rect">
+            <a:avLst/>
+          </a:prstGeom>
+          <a:noFill/>
+          <a:ln/>
+        </p:spPr>
+        <p:txBody>
+          <a:bodyPr wrap="square" lIns="0" tIns="0" rIns="0" bIns="0" rtlCol="0" anchor="ctr"/>
+          <a:lstStyle/>
+          <a:p>
+            <a:pPr indent="0" marL="0">
+              <a:buNone/>
+            </a:pPr>
+            <a:r>
+              <a:rPr lang="en-US" sz="1080" b="1" dirty="0">
+                <a:solidFill>
+                  <a:srgbClr val="E2E8F0"/>
+                </a:solidFill>
+                <a:latin typeface="Calibri" pitchFamily="34" charset="0"/>
+                <a:ea typeface="Calibri" pitchFamily="34" charset="-122"/>
+                <a:cs typeface="Calibri" pitchFamily="34" charset="-120"/>
+              </a:rPr>
+              <a:t>↳ </a:t>
+            </a:r>
+            <a:pPr indent="0" marL="0">
+              <a:buNone/>
+            </a:pPr>
+            <a:r>
+              <a:rPr lang="en-US" sz="1080" b="1" dirty="0">
+                <a:solidFill>
+                  <a:srgbClr val="C2660D"/>
+                </a:solidFill>
+                <a:latin typeface="Calibri" pitchFamily="34" charset="0"/>
+                <a:ea typeface="Calibri" pitchFamily="34" charset="-122"/>
+                <a:cs typeface="Calibri" pitchFamily="34" charset="-120"/>
+              </a:rPr>
+              <a:t>HeapSizeSPowerOfKSimulator</a:t>
+            </a:r>
+            <a:endParaRPr lang="en-US" sz="1080" dirty="0"/>
+          </a:p>
+        </p:txBody>
+      </p:sp>
+      <p:sp>
+        <p:nvSpPr>
+          <p:cNvPr id="37" name="Text 35"/>
+          <p:cNvSpPr/>
+          <p:nvPr/>
+        </p:nvSpPr>
+        <p:spPr>
+          <a:xfrm>
+            <a:off x="4707026" y="5166360"/>
+            <a:ext cx="2978810" cy="219456"/>
+          </a:xfrm>
+          <a:prstGeom prst="rect">
+            <a:avLst/>
+          </a:prstGeom>
+          <a:noFill/>
+          <a:ln/>
+        </p:spPr>
+        <p:txBody>
+          <a:bodyPr wrap="square" lIns="0" tIns="0" rIns="0" bIns="0" rtlCol="0" anchor="ctr"/>
+          <a:lstStyle/>
+          <a:p>
+            <a:pPr indent="0" marL="0">
+              <a:buNone/>
+            </a:pPr>
+            <a:r>
+              <a:rPr lang="en-US" sz="980" dirty="0">
+                <a:solidFill>
+                  <a:srgbClr val="64748B"/>
+                </a:solidFill>
+                <a:latin typeface="Calibri" pitchFamily="34" charset="0"/>
+                <a:ea typeface="Calibri" pitchFamily="34" charset="-122"/>
+                <a:cs typeface="Calibri" pitchFamily="34" charset="-120"/>
+              </a:rPr>
+              <a:t>Partial heap / full heap state</a:t>
+            </a:r>
+            <a:endParaRPr lang="en-US" sz="980" dirty="0"/>
+          </a:p>
+        </p:txBody>
+      </p:sp>
+      <p:sp>
+        <p:nvSpPr>
+          <p:cNvPr id="38" name="Shape 36"/>
+          <p:cNvSpPr/>
+          <p:nvPr/>
+        </p:nvSpPr>
+        <p:spPr>
+          <a:xfrm>
+            <a:off x="8097317" y="2423160"/>
+            <a:ext cx="3545738" cy="3337560"/>
+          </a:xfrm>
+          <a:prstGeom prst="roundRect">
+            <a:avLst>
+              <a:gd name="adj" fmla="val 1918"/>
+            </a:avLst>
+          </a:prstGeom>
+          <a:solidFill>
+            <a:srgbClr val="F1F5F9"/>
+          </a:solidFill>
+          <a:ln/>
+        </p:spPr>
+      </p:sp>
+      <p:sp>
+        <p:nvSpPr>
+          <p:cNvPr id="39" name="Shape 37"/>
+          <p:cNvSpPr/>
+          <p:nvPr/>
+        </p:nvSpPr>
+        <p:spPr>
+          <a:xfrm>
+            <a:off x="8097317" y="2423160"/>
+            <a:ext cx="3545738" cy="54864"/>
+          </a:xfrm>
+          <a:prstGeom prst="rect">
+            <a:avLst/>
+          </a:prstGeom>
+          <a:solidFill>
+            <a:srgbClr val="C2660D"/>
+          </a:solidFill>
+          <a:ln/>
+        </p:spPr>
+      </p:sp>
+      <p:sp>
+        <p:nvSpPr>
+          <p:cNvPr id="40" name="Text 38"/>
+          <p:cNvSpPr/>
+          <p:nvPr/>
+        </p:nvSpPr>
+        <p:spPr>
+          <a:xfrm>
+            <a:off x="8280197" y="2587752"/>
+            <a:ext cx="3179978" cy="292608"/>
+          </a:xfrm>
+          <a:prstGeom prst="rect">
+            <a:avLst/>
+          </a:prstGeom>
+          <a:noFill/>
+          <a:ln/>
+        </p:spPr>
+        <p:txBody>
+          <a:bodyPr wrap="square" lIns="0" tIns="0" rIns="0" bIns="0" rtlCol="0" anchor="ctr"/>
+          <a:lstStyle/>
+          <a:p>
+            <a:pPr indent="0" marL="0">
+              <a:buNone/>
+            </a:pPr>
+            <a:r>
+              <a:rPr lang="en-US" sz="1200" b="1" spc="50" kern="0" dirty="0">
+                <a:solidFill>
+                  <a:srgbClr val="C2660D"/>
+                </a:solidFill>
+                <a:latin typeface="Calibri" pitchFamily="34" charset="0"/>
+                <a:ea typeface="Calibri" pitchFamily="34" charset="-122"/>
+                <a:cs typeface="Calibri" pitchFamily="34" charset="-120"/>
+              </a:rPr>
+              <a:t>METRICS &amp; OUTPUT</a:t>
+            </a:r>
+            <a:endParaRPr lang="en-US" sz="1200" dirty="0"/>
+          </a:p>
+        </p:txBody>
+      </p:sp>
+      <p:sp>
+        <p:nvSpPr>
+          <p:cNvPr id="41" name="Text 39"/>
+          <p:cNvSpPr/>
+          <p:nvPr/>
+        </p:nvSpPr>
+        <p:spPr>
+          <a:xfrm>
+            <a:off x="8280197" y="2953512"/>
+            <a:ext cx="3179978" cy="2670048"/>
+          </a:xfrm>
+          <a:prstGeom prst="rect">
+            <a:avLst/>
+          </a:prstGeom>
+          <a:noFill/>
+          <a:ln/>
+        </p:spPr>
+        <p:txBody>
+          <a:bodyPr wrap="square" lIns="0" tIns="0" rIns="0" bIns="0" rtlCol="0" anchor="t"/>
+          <a:lstStyle/>
+          <a:p>
+            <a:pPr marL="152400" indent="-152400">
+              <a:lnSpc>
+                <a:spcPct val="105000"/>
+              </a:lnSpc>
+              <a:spcAft>
+                <a:spcPts val="700"/>
+              </a:spcAft>
+              <a:buSzPct val="100000"/>
+              <a:buChar char="•"/>
+            </a:pPr>
+            <a:r>
+              <a:rPr lang="en-US" sz="1100" dirty="0">
+                <a:solidFill>
+                  <a:srgbClr val="1E293B"/>
+                </a:solidFill>
+                <a:latin typeface="Calibri" pitchFamily="34" charset="0"/>
+                <a:ea typeface="Calibri" pitchFamily="34" charset="-122"/>
+                <a:cs typeface="Calibri" pitchFamily="34" charset="-120"/>
+              </a:rPr>
+              <a:t>Max load, min load, max–min gap, CV / imbalance</a:t>
             </a:r>
             <a:endParaRPr lang="en-US" sz="1100" dirty="0"/>
           </a:p>
-        </p:txBody>
-      </p:sp>
-      <p:sp>
-        <p:nvSpPr>
-          <p:cNvPr id="7" name="Text 5"/>
-          <p:cNvSpPr/>
-          <p:nvPr/>
-        </p:nvSpPr>
-        <p:spPr>
-          <a:xfrm>
-            <a:off x="7452360" y="2542032"/>
-            <a:ext cx="3916375" cy="1463040"/>
-          </a:xfrm>
-          <a:prstGeom prst="rect">
-            <a:avLst/>
-          </a:prstGeom>
-          <a:noFill/>
-          <a:ln/>
-        </p:spPr>
-        <p:txBody>
-          <a:bodyPr wrap="square" lIns="0" tIns="0" rIns="0" bIns="0" rtlCol="0" anchor="t"/>
-          <a:lstStyle/>
-          <a:p>
-            <a:pPr indent="0" marL="0">
-              <a:buNone/>
-            </a:pPr>
-            <a:r>
-              <a:rPr lang="en-US" sz="2000" b="1" dirty="0">
+          <a:p>
+            <a:pPr marL="152400" indent="-152400">
+              <a:lnSpc>
+                <a:spcPct val="105000"/>
+              </a:lnSpc>
+              <a:spcAft>
+                <a:spcPts val="700"/>
+              </a:spcAft>
+              <a:buSzPct val="100000"/>
+              <a:buChar char="•"/>
+            </a:pPr>
+            <a:r>
+              <a:rPr lang="en-US" sz="1100" dirty="0">
                 <a:solidFill>
                   <a:srgbClr val="1E293B"/>
                 </a:solidFill>
-                <a:latin typeface="Cambria" pitchFamily="34" charset="0"/>
-                <a:ea typeface="Cambria" pitchFamily="34" charset="-122"/>
-                <a:cs typeface="Cambria" pitchFamily="34" charset="-120"/>
-              </a:rPr>
-              <a:t>Small local information captures most of the benefit.</a:t>
-            </a:r>
-            <a:endParaRPr lang="en-US" sz="2000" dirty="0"/>
-          </a:p>
-        </p:txBody>
-      </p:sp>
-      <p:sp>
-        <p:nvSpPr>
-          <p:cNvPr id="8" name="Text 6"/>
-          <p:cNvSpPr/>
-          <p:nvPr/>
-        </p:nvSpPr>
-        <p:spPr>
-          <a:xfrm>
-            <a:off x="7178040" y="4526280"/>
-            <a:ext cx="4465015" cy="640080"/>
-          </a:xfrm>
-          <a:prstGeom prst="rect">
-            <a:avLst/>
-          </a:prstGeom>
-          <a:noFill/>
-          <a:ln/>
-        </p:spPr>
-        <p:txBody>
-          <a:bodyPr wrap="square" lIns="0" tIns="0" rIns="0" bIns="0" rtlCol="0" anchor="t"/>
-          <a:lstStyle/>
-          <a:p>
-            <a:pPr indent="0" marL="0">
-              <a:buNone/>
-            </a:pPr>
-            <a:r>
-              <a:rPr lang="en-US" sz="1250" i="1" dirty="0">
-                <a:solidFill>
-                  <a:srgbClr val="64748B"/>
-                </a:solidFill>
-                <a:latin typeface="Calibri" pitchFamily="34" charset="0"/>
-                <a:ea typeface="Calibri" pitchFamily="34" charset="-122"/>
-                <a:cs typeface="Calibri" pitchFamily="34" charset="-120"/>
-              </a:rPr>
-              <a:t>No proof here — the rest of this deck tests the hypothesis empirically.</a:t>
-            </a:r>
-            <a:endParaRPr lang="en-US" sz="1250" dirty="0"/>
-          </a:p>
-        </p:txBody>
-      </p:sp>
-      <p:sp>
-        <p:nvSpPr>
-          <p:cNvPr id="9" name="Shape 7"/>
+                <a:latin typeface="Calibri" pitchFamily="34" charset="0"/>
+                <a:ea typeface="Calibri" pitchFamily="34" charset="-122"/>
+                <a:cs typeface="Calibri" pitchFamily="34" charset="-120"/>
+              </a:rPr>
+              <a:t>Cost per ball and total cost</a:t>
+            </a:r>
+            <a:endParaRPr lang="en-US" sz="1100" dirty="0"/>
+          </a:p>
+          <a:p>
+            <a:pPr marL="152400" indent="-152400">
+              <a:lnSpc>
+                <a:spcPct val="105000"/>
+              </a:lnSpc>
+              <a:spcAft>
+                <a:spcPts val="700"/>
+              </a:spcAft>
+              <a:buSzPct val="100000"/>
+              <a:buChar char="•"/>
+            </a:pPr>
+            <a:r>
+              <a:rPr lang="en-US" sz="1100" dirty="0">
+                <a:solidFill>
+                  <a:srgbClr val="1E293B"/>
+                </a:solidFill>
+                <a:latin typeface="Calibri" pitchFamily="34" charset="0"/>
+                <a:ea typeface="Calibri" pitchFamily="34" charset="-122"/>
+                <a:cs typeface="Calibri" pitchFamily="34" charset="-120"/>
+              </a:rPr>
+              <a:t>Aggregated across all 10 trials</a:t>
+            </a:r>
+            <a:endParaRPr lang="en-US" sz="1100" dirty="0"/>
+          </a:p>
+          <a:p>
+            <a:pPr marL="152400" indent="-152400">
+              <a:lnSpc>
+                <a:spcPct val="105000"/>
+              </a:lnSpc>
+              <a:spcAft>
+                <a:spcPts val="700"/>
+              </a:spcAft>
+              <a:buSzPct val="100000"/>
+              <a:buChar char="•"/>
+            </a:pPr>
+            <a:r>
+              <a:rPr lang="en-US" sz="1100" dirty="0">
+                <a:solidFill>
+                  <a:srgbClr val="1E293B"/>
+                </a:solidFill>
+                <a:latin typeface="Calibri" pitchFamily="34" charset="0"/>
+                <a:ea typeface="Calibri" pitchFamily="34" charset="-122"/>
+                <a:cs typeface="Calibri" pitchFamily="34" charset="-120"/>
+              </a:rPr>
+              <a:t>Written to a results CSV</a:t>
+            </a:r>
+            <a:endParaRPr lang="en-US" sz="1100" dirty="0"/>
+          </a:p>
+          <a:p>
+            <a:pPr marL="152400" indent="-152400">
+              <a:lnSpc>
+                <a:spcPct val="105000"/>
+              </a:lnSpc>
+              <a:spcAft>
+                <a:spcPts val="700"/>
+              </a:spcAft>
+              <a:buSzPct val="100000"/>
+              <a:buChar char="•"/>
+            </a:pPr>
+            <a:r>
+              <a:rPr lang="en-US" sz="1100" dirty="0">
+                <a:solidFill>
+                  <a:srgbClr val="1E293B"/>
+                </a:solidFill>
+                <a:latin typeface="Calibri" pitchFamily="34" charset="0"/>
+                <a:ea typeface="Calibri" pitchFamily="34" charset="-122"/>
+                <a:cs typeface="Calibri" pitchFamily="34" charset="-120"/>
+              </a:rPr>
+              <a:t>Plotting script turns the CSV into the deck's plots</a:t>
+            </a:r>
+            <a:endParaRPr lang="en-US" sz="1100" dirty="0"/>
+          </a:p>
+        </p:txBody>
+      </p:sp>
+      <p:sp>
+        <p:nvSpPr>
+          <p:cNvPr id="42" name="Shape 40"/>
           <p:cNvSpPr/>
           <p:nvPr/>
         </p:nvSpPr>
@@ -9661,7 +11628,7 @@
       </p:sp>
       <p:sp>
         <p:nvSpPr>
-          <p:cNvPr id="10" name="Text 8"/>
+          <p:cNvPr id="43" name="Text 41"/>
           <p:cNvSpPr/>
           <p:nvPr/>
         </p:nvSpPr>
@@ -9692,7 +11659,7 @@
                 <a:ea typeface="Calibri" pitchFamily="34" charset="-122"/>
                 <a:cs typeface="Calibri" pitchFamily="34" charset="-120"/>
               </a:rPr>
-              <a:t>Theory motivates Power-2 as the practical randomized baseline — the rest of the deck checks it against real cost.</a:t>
+              <a:t>All three simulators inherit from a shared SimulationBase — they differ only in how each selects a bin.</a:t>
             </a:r>
             <a:endParaRPr lang="en-US" sz="1350" dirty="0"/>
           </a:p>
@@ -9763,7 +11730,7 @@
                 <a:ea typeface="Cambria" pitchFamily="34" charset="-122"/>
                 <a:cs typeface="Cambria" pitchFamily="34" charset="-120"/>
               </a:rPr>
-              <a:t>Clean Baseline: Power-2 Captures Most of the Gain</a:t>
+              <a:t>Theory Anchor: Why Power-2 Matters</a:t>
             </a:r>
             <a:endParaRPr lang="en-US" sz="2900" dirty="0"/>
           </a:p>
@@ -9808,117 +11775,289 @@
           </a:p>
         </p:txBody>
       </p:sp>
-      <p:pic>
-        <p:nvPicPr>
-          <p:cNvPr id="4" name="Image 0" descr="/home/claude/work/assets/plot_clean_baseline.png">    </p:cNvPr>
-          <p:cNvPicPr>
-            <a:picLocks noChangeAspect="1"/>
-          </p:cNvPicPr>
-          <p:nvPr/>
-        </p:nvPicPr>
-        <p:blipFill>
-          <a:blip r:embed="rId1"/>
-          <a:stretch>
-            <a:fillRect/>
-          </a:stretch>
-        </p:blipFill>
-        <p:spPr>
-          <a:xfrm>
-            <a:off x="548640" y="1188720"/>
-            <a:ext cx="6858000" cy="4572000"/>
-          </a:xfrm>
-          <a:prstGeom prst="rect">
-            <a:avLst/>
-          </a:prstGeom>
-        </p:spPr>
-      </p:pic>
-      <p:sp>
-        <p:nvSpPr>
-          <p:cNvPr id="5" name="Shape 2"/>
-          <p:cNvSpPr/>
-          <p:nvPr/>
-        </p:nvSpPr>
-        <p:spPr>
-          <a:xfrm>
-            <a:off x="7635240" y="1188720"/>
-            <a:ext cx="4007815" cy="1417320"/>
+      <p:sp>
+        <p:nvSpPr>
+          <p:cNvPr id="4" name="Text 2"/>
+          <p:cNvSpPr/>
+          <p:nvPr/>
+        </p:nvSpPr>
+        <p:spPr>
+          <a:xfrm>
+            <a:off x="548640" y="1417320"/>
+            <a:ext cx="6309360" cy="4480560"/>
+          </a:xfrm>
+          <a:prstGeom prst="rect">
+            <a:avLst/>
+          </a:prstGeom>
+          <a:noFill/>
+          <a:ln/>
+        </p:spPr>
+        <p:txBody>
+          <a:bodyPr wrap="square" lIns="0" tIns="0" rIns="0" bIns="0" rtlCol="0" anchor="t"/>
+          <a:lstStyle/>
+          <a:p>
+            <a:pPr marL="228600" indent="-228600">
+              <a:lnSpc>
+                <a:spcPct val="118000"/>
+              </a:lnSpc>
+              <a:spcAft>
+                <a:spcPts val="2400"/>
+              </a:spcAft>
+              <a:buSzPct val="100000"/>
+              <a:buChar char="•"/>
+            </a:pPr>
+            <a:r>
+              <a:rPr lang="en-US" sz="1650" dirty="0">
+                <a:solidFill>
+                  <a:srgbClr val="1E293B"/>
+                </a:solidFill>
+                <a:latin typeface="Calibri" pitchFamily="34" charset="0"/>
+                <a:ea typeface="Calibri" pitchFamily="34" charset="-122"/>
+                <a:cs typeface="Calibri" pitchFamily="34" charset="-120"/>
+              </a:rPr>
+              <a:t>One random choice leaves a small set of bins overloaded — the classic balls-in-bins bottleneck.</a:t>
+            </a:r>
+            <a:endParaRPr lang="en-US" sz="1650" dirty="0"/>
+          </a:p>
+          <a:p>
+            <a:pPr marL="228600" indent="-228600">
+              <a:lnSpc>
+                <a:spcPct val="118000"/>
+              </a:lnSpc>
+              <a:spcAft>
+                <a:spcPts val="2400"/>
+              </a:spcAft>
+              <a:buSzPct val="100000"/>
+              <a:buChar char="•"/>
+            </a:pPr>
+            <a:r>
+              <a:rPr lang="en-US" sz="1650" dirty="0">
+                <a:solidFill>
+                  <a:srgbClr val="1E293B"/>
+                </a:solidFill>
+                <a:latin typeface="Calibri" pitchFamily="34" charset="0"/>
+                <a:ea typeface="Calibri" pitchFamily="34" charset="-122"/>
+                <a:cs typeface="Calibri" pitchFamily="34" charset="-120"/>
+              </a:rPr>
+              <a:t>Sampling just two bins and keeping the less-loaded one cuts that bottleneck exponentially, not just by a constant factor.</a:t>
+            </a:r>
+            <a:endParaRPr lang="en-US" sz="1650" dirty="0"/>
+          </a:p>
+          <a:p>
+            <a:pPr marL="228600" indent="-228600">
+              <a:lnSpc>
+                <a:spcPct val="118000"/>
+              </a:lnSpc>
+              <a:spcAft>
+                <a:spcPts val="2400"/>
+              </a:spcAft>
+              <a:buSzPct val="100000"/>
+              <a:buChar char="•"/>
+            </a:pPr>
+            <a:r>
+              <a:rPr lang="en-US" sz="1650" dirty="0">
+                <a:solidFill>
+                  <a:srgbClr val="1E293B"/>
+                </a:solidFill>
+                <a:latin typeface="Calibri" pitchFamily="34" charset="0"/>
+                <a:ea typeface="Calibri" pitchFamily="34" charset="-122"/>
+                <a:cs typeface="Calibri" pitchFamily="34" charset="-120"/>
+              </a:rPr>
+              <a:t>This is the power-of-two-choices result (Mitzenmacher, 2001): a couple bits of local information go a very long way.</a:t>
+            </a:r>
+            <a:endParaRPr lang="en-US" sz="1650" dirty="0"/>
+          </a:p>
+          <a:p>
+            <a:pPr marL="228600" indent="-228600">
+              <a:lnSpc>
+                <a:spcPct val="118000"/>
+              </a:lnSpc>
+              <a:spcAft>
+                <a:spcPts val="2400"/>
+              </a:spcAft>
+              <a:buSzPct val="100000"/>
+              <a:buChar char="•"/>
+            </a:pPr>
+            <a:r>
+              <a:rPr lang="en-US" sz="1650" dirty="0">
+                <a:solidFill>
+                  <a:srgbClr val="1E293B"/>
+                </a:solidFill>
+                <a:latin typeface="Calibri" pitchFamily="34" charset="0"/>
+                <a:ea typeface="Calibri" pitchFamily="34" charset="-122"/>
+                <a:cs typeface="Calibri" pitchFamily="34" charset="-120"/>
+              </a:rPr>
+              <a:t>Beyond two choices, more sampling keeps helping, but only by changing the base of an already-tiny logarithm — diminishing returns, fast.</a:t>
+            </a:r>
+            <a:endParaRPr lang="en-US" sz="1650" dirty="0"/>
+          </a:p>
+        </p:txBody>
+      </p:sp>
+      <p:sp>
+        <p:nvSpPr>
+          <p:cNvPr id="5" name="Shape 3"/>
+          <p:cNvSpPr/>
+          <p:nvPr/>
+        </p:nvSpPr>
+        <p:spPr>
+          <a:xfrm>
+            <a:off x="7178040" y="1325880"/>
+            <a:ext cx="4465015" cy="2788920"/>
           </a:xfrm>
           <a:prstGeom prst="roundRect">
             <a:avLst>
-              <a:gd name="adj" fmla="val 5161"/>
+              <a:gd name="adj" fmla="val 2951"/>
             </a:avLst>
           </a:prstGeom>
           <a:solidFill>
-            <a:srgbClr val="F1F5F9"/>
+            <a:srgbClr val="E8EFFD"/>
           </a:solidFill>
           <a:ln/>
         </p:spPr>
       </p:sp>
       <p:sp>
         <p:nvSpPr>
-          <p:cNvPr id="6" name="Text 3"/>
-          <p:cNvSpPr/>
-          <p:nvPr/>
-        </p:nvSpPr>
-        <p:spPr>
-          <a:xfrm>
-            <a:off x="7799832" y="1261872"/>
-            <a:ext cx="3678631" cy="822046"/>
-          </a:xfrm>
-          <a:prstGeom prst="rect">
-            <a:avLst/>
-          </a:prstGeom>
-          <a:noFill/>
-          <a:ln/>
-        </p:spPr>
-        <p:txBody>
-          <a:bodyPr wrap="square" lIns="0" tIns="0" rIns="0" bIns="0" rtlCol="0" anchor="b"/>
-          <a:lstStyle/>
-          <a:p>
-            <a:pPr algn="l" indent="0" marL="0">
-              <a:buNone/>
-            </a:pPr>
-            <a:r>
-              <a:rPr lang="en-US" sz="2200" b="1" dirty="0">
+          <p:cNvPr id="6" name="Text 4"/>
+          <p:cNvSpPr/>
+          <p:nvPr/>
+        </p:nvSpPr>
+        <p:spPr>
+          <a:xfrm>
+            <a:off x="7434072" y="1481328"/>
+            <a:ext cx="3952951" cy="274320"/>
+          </a:xfrm>
+          <a:prstGeom prst="rect">
+            <a:avLst/>
+          </a:prstGeom>
+          <a:noFill/>
+          <a:ln/>
+        </p:spPr>
+        <p:txBody>
+          <a:bodyPr wrap="square" lIns="0" tIns="0" rIns="0" bIns="0" rtlCol="0" anchor="ctr"/>
+          <a:lstStyle/>
+          <a:p>
+            <a:pPr indent="0" marL="0">
+              <a:buNone/>
+            </a:pPr>
+            <a:r>
+              <a:rPr lang="en-US" sz="1000" b="1" spc="100" kern="0" dirty="0">
                 <a:solidFill>
                   <a:srgbClr val="2563EB"/>
+                </a:solidFill>
+                <a:latin typeface="Calibri" pitchFamily="34" charset="0"/>
+                <a:ea typeface="Calibri" pitchFamily="34" charset="-122"/>
+                <a:cs typeface="Calibri" pitchFamily="34" charset="-120"/>
+              </a:rPr>
+              <a:t>MAX LOAD, n BALLS INTO n BINS (WHP)</a:t>
+            </a:r>
+            <a:endParaRPr lang="en-US" sz="1000" dirty="0"/>
+          </a:p>
+        </p:txBody>
+      </p:sp>
+      <p:sp>
+        <p:nvSpPr>
+          <p:cNvPr id="7" name="Text 5"/>
+          <p:cNvSpPr/>
+          <p:nvPr/>
+        </p:nvSpPr>
+        <p:spPr>
+          <a:xfrm>
+            <a:off x="7434072" y="1828800"/>
+            <a:ext cx="3952951" cy="237744"/>
+          </a:xfrm>
+          <a:prstGeom prst="rect">
+            <a:avLst/>
+          </a:prstGeom>
+          <a:noFill/>
+          <a:ln/>
+        </p:spPr>
+        <p:txBody>
+          <a:bodyPr wrap="square" lIns="0" tIns="0" rIns="0" bIns="0" rtlCol="0" anchor="ctr"/>
+          <a:lstStyle/>
+          <a:p>
+            <a:pPr indent="0" marL="0">
+              <a:buNone/>
+            </a:pPr>
+            <a:r>
+              <a:rPr lang="en-US" sz="1150" b="1" dirty="0">
+                <a:solidFill>
+                  <a:srgbClr val="475569"/>
+                </a:solidFill>
+                <a:latin typeface="Calibri" pitchFamily="34" charset="0"/>
+                <a:ea typeface="Calibri" pitchFamily="34" charset="-122"/>
+                <a:cs typeface="Calibri" pitchFamily="34" charset="-120"/>
+              </a:rPr>
+              <a:t>1 random choice</a:t>
+            </a:r>
+            <a:endParaRPr lang="en-US" sz="1150" dirty="0"/>
+          </a:p>
+        </p:txBody>
+      </p:sp>
+      <p:sp>
+        <p:nvSpPr>
+          <p:cNvPr id="8" name="Text 6"/>
+          <p:cNvSpPr/>
+          <p:nvPr/>
+        </p:nvSpPr>
+        <p:spPr>
+          <a:xfrm>
+            <a:off x="7434072" y="2057400"/>
+            <a:ext cx="3952951" cy="320040"/>
+          </a:xfrm>
+          <a:prstGeom prst="rect">
+            <a:avLst/>
+          </a:prstGeom>
+          <a:noFill/>
+          <a:ln/>
+        </p:spPr>
+        <p:txBody>
+          <a:bodyPr wrap="square" lIns="0" tIns="0" rIns="0" bIns="0" rtlCol="0" anchor="ctr"/>
+          <a:lstStyle/>
+          <a:p>
+            <a:pPr indent="0" marL="0">
+              <a:buNone/>
+            </a:pPr>
+            <a:r>
+              <a:rPr lang="en-US" sz="1700" b="1" dirty="0">
+                <a:solidFill>
+                  <a:srgbClr val="1E293B"/>
                 </a:solidFill>
                 <a:latin typeface="Cambria" pitchFamily="34" charset="0"/>
                 <a:ea typeface="Cambria" pitchFamily="34" charset="-122"/>
                 <a:cs typeface="Cambria" pitchFamily="34" charset="-120"/>
               </a:rPr>
-              <a:t>666.1 → 626.4</a:t>
-            </a:r>
-            <a:endParaRPr lang="en-US" sz="2200" dirty="0"/>
-          </a:p>
-        </p:txBody>
-      </p:sp>
-      <p:sp>
-        <p:nvSpPr>
-          <p:cNvPr id="7" name="Text 4"/>
-          <p:cNvSpPr/>
-          <p:nvPr/>
-        </p:nvSpPr>
-        <p:spPr>
-          <a:xfrm>
-            <a:off x="7799832" y="2039112"/>
-            <a:ext cx="3678631" cy="510235"/>
-          </a:xfrm>
-          <a:prstGeom prst="rect">
-            <a:avLst/>
-          </a:prstGeom>
-          <a:noFill/>
-          <a:ln/>
-        </p:spPr>
-        <p:txBody>
-          <a:bodyPr wrap="square" lIns="0" tIns="0" rIns="0" bIns="0" rtlCol="0" anchor="t"/>
-          <a:lstStyle/>
-          <a:p>
-            <a:pPr algn="l" indent="0" marL="0">
-              <a:buNone/>
-            </a:pPr>
-            <a:r>
-              <a:rPr lang="en-US" sz="1050" dirty="0">
+              <a:t>Θ( log n / log log n )</a:t>
+            </a:r>
+            <a:endParaRPr lang="en-US" sz="1700" dirty="0"/>
+          </a:p>
+        </p:txBody>
+      </p:sp>
+      <p:sp>
+        <p:nvSpPr>
+          <p:cNvPr id="9" name="Text 7"/>
+          <p:cNvSpPr/>
+          <p:nvPr/>
+        </p:nvSpPr>
+        <p:spPr>
+          <a:xfrm>
+            <a:off x="7434072" y="2359152"/>
+            <a:ext cx="3952951" cy="201168"/>
+          </a:xfrm>
+          <a:prstGeom prst="rect">
+            <a:avLst/>
+          </a:prstGeom>
+          <a:noFill/>
+          <a:ln/>
+        </p:spPr>
+        <p:txBody>
+          <a:bodyPr wrap="square" lIns="0" tIns="0" rIns="0" bIns="0" rtlCol="0" anchor="ctr"/>
+          <a:lstStyle/>
+          <a:p>
+            <a:pPr indent="0" marL="0">
+              <a:buNone/>
+            </a:pPr>
+            <a:r>
+              <a:rPr lang="en-US" sz="950" i="1" dirty="0">
                 <a:solidFill>
                   <a:srgbClr val="64748B"/>
                 </a:solidFill>
@@ -9926,83 +12065,312 @@
                 <a:ea typeface="Calibri" pitchFamily="34" charset="-122"/>
                 <a:cs typeface="Calibri" pitchFamily="34" charset="-120"/>
               </a:rPr>
-              <a:t>MAX LOAD, n=16  (RANDOM → POWER-2)</a:t>
-            </a:r>
-            <a:endParaRPr lang="en-US" sz="1050" dirty="0"/>
-          </a:p>
-        </p:txBody>
-      </p:sp>
-      <p:sp>
-        <p:nvSpPr>
-          <p:cNvPr id="8" name="Shape 5"/>
-          <p:cNvSpPr/>
-          <p:nvPr/>
-        </p:nvSpPr>
-        <p:spPr>
-          <a:xfrm>
-            <a:off x="7635240" y="2743200"/>
-            <a:ext cx="4007815" cy="1417320"/>
-          </a:xfrm>
-          <a:prstGeom prst="roundRect">
-            <a:avLst>
-              <a:gd name="adj" fmla="val 5161"/>
-            </a:avLst>
-          </a:prstGeom>
-          <a:solidFill>
-            <a:srgbClr val="F1F5F9"/>
-          </a:solidFill>
-          <a:ln/>
-        </p:spPr>
-      </p:sp>
-      <p:sp>
-        <p:nvSpPr>
-          <p:cNvPr id="9" name="Text 6"/>
-          <p:cNvSpPr/>
-          <p:nvPr/>
-        </p:nvSpPr>
-        <p:spPr>
-          <a:xfrm>
-            <a:off x="7799832" y="2816352"/>
-            <a:ext cx="3678631" cy="822046"/>
-          </a:xfrm>
-          <a:prstGeom prst="rect">
-            <a:avLst/>
-          </a:prstGeom>
-          <a:noFill/>
-          <a:ln/>
-        </p:spPr>
-        <p:txBody>
-          <a:bodyPr wrap="square" lIns="0" tIns="0" rIns="0" bIns="0" rtlCol="0" anchor="b"/>
-          <a:lstStyle/>
-          <a:p>
-            <a:pPr algn="l" indent="0" marL="0">
-              <a:buNone/>
-            </a:pPr>
-            <a:r>
-              <a:rPr lang="en-US" sz="2200" b="1" dirty="0">
+              <a:t>Propositions 2 &amp; 5</a:t>
+            </a:r>
+            <a:endParaRPr lang="en-US" sz="950" dirty="0"/>
+          </a:p>
+        </p:txBody>
+      </p:sp>
+      <p:sp>
+        <p:nvSpPr>
+          <p:cNvPr id="10" name="Text 8"/>
+          <p:cNvSpPr/>
+          <p:nvPr/>
+        </p:nvSpPr>
+        <p:spPr>
+          <a:xfrm>
+            <a:off x="7434072" y="2542032"/>
+            <a:ext cx="3952951" cy="237744"/>
+          </a:xfrm>
+          <a:prstGeom prst="rect">
+            <a:avLst/>
+          </a:prstGeom>
+          <a:noFill/>
+          <a:ln/>
+        </p:spPr>
+        <p:txBody>
+          <a:bodyPr wrap="square" lIns="0" tIns="0" rIns="0" bIns="0" rtlCol="0" anchor="ctr"/>
+          <a:lstStyle/>
+          <a:p>
+            <a:pPr indent="0" marL="0">
+              <a:buNone/>
+            </a:pPr>
+            <a:r>
+              <a:rPr lang="en-US" sz="1150" b="1" dirty="0">
                 <a:solidFill>
                   <a:srgbClr val="2563EB"/>
+                </a:solidFill>
+                <a:latin typeface="Calibri" pitchFamily="34" charset="0"/>
+                <a:ea typeface="Calibri" pitchFamily="34" charset="-122"/>
+                <a:cs typeface="Calibri" pitchFamily="34" charset="-120"/>
+              </a:rPr>
+              <a:t>2 choices — Power-2</a:t>
+            </a:r>
+            <a:endParaRPr lang="en-US" sz="1150" dirty="0"/>
+          </a:p>
+        </p:txBody>
+      </p:sp>
+      <p:sp>
+        <p:nvSpPr>
+          <p:cNvPr id="11" name="Text 9"/>
+          <p:cNvSpPr/>
+          <p:nvPr/>
+        </p:nvSpPr>
+        <p:spPr>
+          <a:xfrm>
+            <a:off x="7434072" y="2770632"/>
+            <a:ext cx="3952951" cy="320040"/>
+          </a:xfrm>
+          <a:prstGeom prst="rect">
+            <a:avLst/>
+          </a:prstGeom>
+          <a:noFill/>
+          <a:ln/>
+        </p:spPr>
+        <p:txBody>
+          <a:bodyPr wrap="square" lIns="0" tIns="0" rIns="0" bIns="0" rtlCol="0" anchor="ctr"/>
+          <a:lstStyle/>
+          <a:p>
+            <a:pPr indent="0" marL="0">
+              <a:buNone/>
+            </a:pPr>
+            <a:r>
+              <a:rPr lang="en-US" sz="1700" b="1" dirty="0">
+                <a:solidFill>
+                  <a:srgbClr val="1E293B"/>
                 </a:solidFill>
                 <a:latin typeface="Cambria" pitchFamily="34" charset="0"/>
                 <a:ea typeface="Cambria" pitchFamily="34" charset="-122"/>
                 <a:cs typeface="Cambria" pitchFamily="34" charset="-120"/>
               </a:rPr>
-              <a:t>345.3 → 313.9</a:t>
-            </a:r>
-            <a:endParaRPr lang="en-US" sz="2200" dirty="0"/>
-          </a:p>
-        </p:txBody>
-      </p:sp>
-      <p:sp>
-        <p:nvSpPr>
-          <p:cNvPr id="10" name="Text 7"/>
-          <p:cNvSpPr/>
-          <p:nvPr/>
-        </p:nvSpPr>
-        <p:spPr>
-          <a:xfrm>
-            <a:off x="7799832" y="3593592"/>
-            <a:ext cx="3678631" cy="510235"/>
+              <a:t>log</a:t>
+            </a:r>
+            <a:pPr indent="0" marL="0">
+              <a:buNone/>
+            </a:pPr>
+            <a:r>
+              <a:rPr lang="en-US" sz="1700" b="1" baseline="-40000" dirty="0">
+                <a:solidFill>
+                  <a:srgbClr val="1E293B"/>
+                </a:solidFill>
+                <a:latin typeface="Cambria" pitchFamily="34" charset="0"/>
+                <a:ea typeface="Cambria" pitchFamily="34" charset="-122"/>
+                <a:cs typeface="Cambria" pitchFamily="34" charset="-120"/>
+              </a:rPr>
+              <a:t>2</a:t>
+            </a:r>
+            <a:pPr indent="0" marL="0">
+              <a:buNone/>
+            </a:pPr>
+            <a:r>
+              <a:rPr lang="en-US" sz="1700" b="1" dirty="0">
+                <a:solidFill>
+                  <a:srgbClr val="1E293B"/>
+                </a:solidFill>
+                <a:latin typeface="Cambria" pitchFamily="34" charset="0"/>
+                <a:ea typeface="Cambria" pitchFamily="34" charset="-122"/>
+                <a:cs typeface="Cambria" pitchFamily="34" charset="-120"/>
+              </a:rPr>
+              <a:t>(log n) + O(1)</a:t>
+            </a:r>
+            <a:endParaRPr lang="en-US" sz="1700" dirty="0"/>
+          </a:p>
+        </p:txBody>
+      </p:sp>
+      <p:sp>
+        <p:nvSpPr>
+          <p:cNvPr id="12" name="Text 10"/>
+          <p:cNvSpPr/>
+          <p:nvPr/>
+        </p:nvSpPr>
+        <p:spPr>
+          <a:xfrm>
+            <a:off x="7434072" y="3072384"/>
+            <a:ext cx="3952951" cy="201168"/>
+          </a:xfrm>
+          <a:prstGeom prst="rect">
+            <a:avLst/>
+          </a:prstGeom>
+          <a:noFill/>
+          <a:ln/>
+        </p:spPr>
+        <p:txBody>
+          <a:bodyPr wrap="square" lIns="0" tIns="0" rIns="0" bIns="0" rtlCol="0" anchor="ctr"/>
+          <a:lstStyle/>
+          <a:p>
+            <a:pPr indent="0" marL="0">
+              <a:buNone/>
+            </a:pPr>
+            <a:r>
+              <a:rPr lang="en-US" sz="950" i="1" dirty="0">
+                <a:solidFill>
+                  <a:srgbClr val="64748B"/>
+                </a:solidFill>
+                <a:latin typeface="Calibri" pitchFamily="34" charset="0"/>
+                <a:ea typeface="Calibri" pitchFamily="34" charset="-122"/>
+                <a:cs typeface="Calibri" pitchFamily="34" charset="-120"/>
+              </a:rPr>
+              <a:t>Theorem 2 (Mitzenmacher, 2001)</a:t>
+            </a:r>
+            <a:endParaRPr lang="en-US" sz="950" dirty="0"/>
+          </a:p>
+        </p:txBody>
+      </p:sp>
+      <p:sp>
+        <p:nvSpPr>
+          <p:cNvPr id="13" name="Text 11"/>
+          <p:cNvSpPr/>
+          <p:nvPr/>
+        </p:nvSpPr>
+        <p:spPr>
+          <a:xfrm>
+            <a:off x="7434072" y="3255264"/>
+            <a:ext cx="3952951" cy="237744"/>
+          </a:xfrm>
+          <a:prstGeom prst="rect">
+            <a:avLst/>
+          </a:prstGeom>
+          <a:noFill/>
+          <a:ln/>
+        </p:spPr>
+        <p:txBody>
+          <a:bodyPr wrap="square" lIns="0" tIns="0" rIns="0" bIns="0" rtlCol="0" anchor="ctr"/>
+          <a:lstStyle/>
+          <a:p>
+            <a:pPr indent="0" marL="0">
+              <a:buNone/>
+            </a:pPr>
+            <a:r>
+              <a:rPr lang="en-US" sz="1150" b="1" dirty="0">
+                <a:solidFill>
+                  <a:srgbClr val="2563EB"/>
+                </a:solidFill>
+                <a:latin typeface="Calibri" pitchFamily="34" charset="0"/>
+                <a:ea typeface="Calibri" pitchFamily="34" charset="-122"/>
+                <a:cs typeface="Calibri" pitchFamily="34" charset="-120"/>
+              </a:rPr>
+              <a:t>d choices</a:t>
+            </a:r>
+            <a:endParaRPr lang="en-US" sz="1150" dirty="0"/>
+          </a:p>
+        </p:txBody>
+      </p:sp>
+      <p:sp>
+        <p:nvSpPr>
+          <p:cNvPr id="14" name="Text 12"/>
+          <p:cNvSpPr/>
+          <p:nvPr/>
+        </p:nvSpPr>
+        <p:spPr>
+          <a:xfrm>
+            <a:off x="7434072" y="3483864"/>
+            <a:ext cx="3952951" cy="320040"/>
+          </a:xfrm>
+          <a:prstGeom prst="rect">
+            <a:avLst/>
+          </a:prstGeom>
+          <a:noFill/>
+          <a:ln/>
+        </p:spPr>
+        <p:txBody>
+          <a:bodyPr wrap="square" lIns="0" tIns="0" rIns="0" bIns="0" rtlCol="0" anchor="ctr"/>
+          <a:lstStyle/>
+          <a:p>
+            <a:pPr indent="0" marL="0">
+              <a:buNone/>
+            </a:pPr>
+            <a:r>
+              <a:rPr lang="en-US" sz="1700" b="1" dirty="0">
+                <a:solidFill>
+                  <a:srgbClr val="1E293B"/>
+                </a:solidFill>
+                <a:latin typeface="Cambria" pitchFamily="34" charset="0"/>
+                <a:ea typeface="Cambria" pitchFamily="34" charset="-122"/>
+                <a:cs typeface="Cambria" pitchFamily="34" charset="-120"/>
+              </a:rPr>
+              <a:t>log</a:t>
+            </a:r>
+            <a:pPr indent="0" marL="0">
+              <a:buNone/>
+            </a:pPr>
+            <a:r>
+              <a:rPr lang="en-US" sz="1700" b="1" baseline="-40000" dirty="0">
+                <a:solidFill>
+                  <a:srgbClr val="1E293B"/>
+                </a:solidFill>
+                <a:latin typeface="Cambria" pitchFamily="34" charset="0"/>
+                <a:ea typeface="Cambria" pitchFamily="34" charset="-122"/>
+                <a:cs typeface="Cambria" pitchFamily="34" charset="-120"/>
+              </a:rPr>
+              <a:t>d</a:t>
+            </a:r>
+            <a:pPr indent="0" marL="0">
+              <a:buNone/>
+            </a:pPr>
+            <a:r>
+              <a:rPr lang="en-US" sz="1700" b="1" dirty="0">
+                <a:solidFill>
+                  <a:srgbClr val="1E293B"/>
+                </a:solidFill>
+                <a:latin typeface="Cambria" pitchFamily="34" charset="0"/>
+                <a:ea typeface="Cambria" pitchFamily="34" charset="-122"/>
+                <a:cs typeface="Cambria" pitchFamily="34" charset="-120"/>
+              </a:rPr>
+              <a:t>(log n) + O(1)</a:t>
+            </a:r>
+            <a:endParaRPr lang="en-US" sz="1700" dirty="0"/>
+          </a:p>
+        </p:txBody>
+      </p:sp>
+      <p:sp>
+        <p:nvSpPr>
+          <p:cNvPr id="15" name="Text 13"/>
+          <p:cNvSpPr/>
+          <p:nvPr/>
+        </p:nvSpPr>
+        <p:spPr>
+          <a:xfrm>
+            <a:off x="7434072" y="3785616"/>
+            <a:ext cx="3952951" cy="201168"/>
+          </a:xfrm>
+          <a:prstGeom prst="rect">
+            <a:avLst/>
+          </a:prstGeom>
+          <a:noFill/>
+          <a:ln/>
+        </p:spPr>
+        <p:txBody>
+          <a:bodyPr wrap="square" lIns="0" tIns="0" rIns="0" bIns="0" rtlCol="0" anchor="ctr"/>
+          <a:lstStyle/>
+          <a:p>
+            <a:pPr indent="0" marL="0">
+              <a:buNone/>
+            </a:pPr>
+            <a:r>
+              <a:rPr lang="en-US" sz="950" i="1" dirty="0">
+                <a:solidFill>
+                  <a:srgbClr val="64748B"/>
+                </a:solidFill>
+                <a:latin typeface="Calibri" pitchFamily="34" charset="0"/>
+                <a:ea typeface="Calibri" pitchFamily="34" charset="-122"/>
+                <a:cs typeface="Calibri" pitchFamily="34" charset="-120"/>
+              </a:rPr>
+              <a:t>Theorem 3</a:t>
+            </a:r>
+            <a:endParaRPr lang="en-US" sz="950" dirty="0"/>
+          </a:p>
+        </p:txBody>
+      </p:sp>
+      <p:sp>
+        <p:nvSpPr>
+          <p:cNvPr id="16" name="Text 14"/>
+          <p:cNvSpPr/>
+          <p:nvPr/>
+        </p:nvSpPr>
+        <p:spPr>
+          <a:xfrm>
+            <a:off x="7178040" y="4224528"/>
+            <a:ext cx="4465015" cy="777240"/>
           </a:xfrm>
           <a:prstGeom prst="rect">
             <a:avLst/>
@@ -10014,11 +12382,14 @@
           <a:bodyPr wrap="square" lIns="0" tIns="0" rIns="0" bIns="0" rtlCol="0" anchor="t"/>
           <a:lstStyle/>
           <a:p>
-            <a:pPr algn="l" indent="0" marL="0">
-              <a:buNone/>
-            </a:pPr>
-            <a:r>
-              <a:rPr lang="en-US" sz="1050" dirty="0">
+            <a:pPr indent="0" marL="0">
+              <a:lnSpc>
+                <a:spcPct val="112000"/>
+              </a:lnSpc>
+              <a:buNone/>
+            </a:pPr>
+            <a:r>
+              <a:rPr lang="en-US" sz="1100" i="1" dirty="0">
                 <a:solidFill>
                   <a:srgbClr val="64748B"/>
                 </a:solidFill>
@@ -10026,22 +12397,22 @@
                 <a:ea typeface="Calibri" pitchFamily="34" charset="-122"/>
                 <a:cs typeface="Calibri" pitchFamily="34" charset="-120"/>
               </a:rPr>
-              <a:t>MAX LOAD, n=32  (RANDOM → POWER-2)</a:t>
-            </a:r>
-            <a:endParaRPr lang="en-US" sz="1050" dirty="0"/>
-          </a:p>
-        </p:txBody>
-      </p:sp>
-      <p:sp>
-        <p:nvSpPr>
-          <p:cNvPr id="11" name="Text 8"/>
-          <p:cNvSpPr/>
-          <p:nvPr/>
-        </p:nvSpPr>
-        <p:spPr>
-          <a:xfrm>
-            <a:off x="7635240" y="4343400"/>
-            <a:ext cx="4007815" cy="1097280"/>
+              <a:t>These bounds assume n balls into n bins. Our simulation runs heavily loaded — 10,000 balls into 16–32 bins — a different regime, but the same qualitative gap motivates Power-2.</a:t>
+            </a:r>
+            <a:endParaRPr lang="en-US" sz="1100" dirty="0"/>
+          </a:p>
+        </p:txBody>
+      </p:sp>
+      <p:sp>
+        <p:nvSpPr>
+          <p:cNvPr id="17" name="Text 15"/>
+          <p:cNvSpPr/>
+          <p:nvPr/>
+        </p:nvSpPr>
+        <p:spPr>
+          <a:xfrm>
+            <a:off x="7178040" y="5074920"/>
+            <a:ext cx="4465015" cy="777240"/>
           </a:xfrm>
           <a:prstGeom prst="rect">
             <a:avLst/>
@@ -10054,26 +12425,46 @@
           <a:lstStyle/>
           <a:p>
             <a:pPr indent="0" marL="0">
-              <a:buNone/>
-            </a:pPr>
-            <a:r>
-              <a:rPr lang="en-US" sz="1250" i="1" dirty="0">
-                <a:solidFill>
-                  <a:srgbClr val="64748B"/>
-                </a:solidFill>
-                <a:latin typeface="Calibri" pitchFamily="34" charset="0"/>
-                <a:ea typeface="Calibri" pitchFamily="34" charset="-122"/>
-                <a:cs typeface="Calibri" pitchFamily="34" charset="-120"/>
-              </a:rPr>
-              <a:t>Absolute minimum adds only a small improvement beyond Power-2 — at much higher cost.</a:t>
-            </a:r>
-            <a:endParaRPr lang="en-US" sz="1250" dirty="0"/>
-          </a:p>
-        </p:txBody>
-      </p:sp>
-      <p:sp>
-        <p:nvSpPr>
-          <p:cNvPr id="12" name="Shape 9"/>
+              <a:lnSpc>
+                <a:spcPct val="115000"/>
+              </a:lnSpc>
+              <a:buNone/>
+            </a:pPr>
+            <a:r>
+              <a:rPr lang="en-US" sz="1200" b="1" dirty="0">
+                <a:solidFill>
+                  <a:srgbClr val="2563EB"/>
+                </a:solidFill>
+                <a:latin typeface="Calibri" pitchFamily="34" charset="0"/>
+                <a:ea typeface="Calibri" pitchFamily="34" charset="-122"/>
+                <a:cs typeface="Calibri" pitchFamily="34" charset="-120"/>
+              </a:rPr>
+              <a:t>Hypothesis:  </a:t>
+            </a:r>
+            <a:pPr indent="0" marL="0">
+              <a:lnSpc>
+                <a:spcPct val="115000"/>
+              </a:lnSpc>
+              <a:buNone/>
+            </a:pPr>
+            <a:r>
+              <a:rPr lang="en-US" sz="1200" dirty="0">
+                <a:solidFill>
+                  <a:srgbClr val="1E293B"/>
+                </a:solidFill>
+                <a:latin typeface="Calibri" pitchFamily="34" charset="0"/>
+                <a:ea typeface="Calibri" pitchFamily="34" charset="-122"/>
+                <a:cs typeface="Calibri" pitchFamily="34" charset="-120"/>
+              </a:rPr>
+              <a:t>small local information captures most of the benefit. No proof here — the rest of this deck tests it empirically.</a:t>
+            </a:r>
+            <a:endParaRPr lang="en-US" sz="1200" dirty="0"/>
+          </a:p>
+        </p:txBody>
+      </p:sp>
+      <p:sp>
+        <p:nvSpPr>
+          <p:cNvPr id="18" name="Shape 16"/>
           <p:cNvSpPr/>
           <p:nvPr/>
         </p:nvSpPr>
@@ -10095,7 +12486,7 @@
       </p:sp>
       <p:sp>
         <p:nvSpPr>
-          <p:cNvPr id="13" name="Text 10"/>
+          <p:cNvPr id="19" name="Text 17"/>
           <p:cNvSpPr/>
           <p:nvPr/>
         </p:nvSpPr>
@@ -10126,7 +12517,7 @@
                 <a:ea typeface="Calibri" pitchFamily="34" charset="-122"/>
                 <a:cs typeface="Calibri" pitchFamily="34" charset="-120"/>
               </a:rPr>
-              <a:t>Power-2 nearly closes the gap to the ideal policy in the clean, unweighted case.</a:t>
+              <a:t>Theory motivates Power-2 as the practical randomized baseline — the rest of the deck checks it against real cost.</a:t>
             </a:r>
             <a:endParaRPr lang="en-US" sz="1350" dirty="0"/>
           </a:p>
@@ -10197,7 +12588,7 @@
                 <a:ea typeface="Cambria" pitchFamily="34" charset="-122"/>
                 <a:cs typeface="Cambria" pitchFamily="34" charset="-120"/>
               </a:rPr>
-              <a:t>Diminishing Returns of k</a:t>
+              <a:t>Clean Baseline: Power-2 Captures Most of the Gain</a:t>
             </a:r>
             <a:endParaRPr lang="en-US" sz="2900" dirty="0"/>
           </a:p>
@@ -10244,7 +12635,7 @@
       </p:sp>
       <p:pic>
         <p:nvPicPr>
-          <p:cNvPr id="4" name="Image 0" descr="/home/claude/work/assets/plot_diminishing_returns.png">    </p:cNvPr>
+          <p:cNvPr id="4" name="Image 0" descr="/home/claude/work/assets/plot_clean_baseline.png">    </p:cNvPr>
           <p:cNvPicPr>
             <a:picLocks noChangeAspect="1"/>
           </p:cNvPicPr>
@@ -10275,11 +12666,11 @@
         <p:spPr>
           <a:xfrm>
             <a:off x="7635240" y="1188720"/>
-            <a:ext cx="4007815" cy="1554480"/>
+            <a:ext cx="4007815" cy="1417320"/>
           </a:xfrm>
           <a:prstGeom prst="roundRect">
             <a:avLst>
-              <a:gd name="adj" fmla="val 4706"/>
+              <a:gd name="adj" fmla="val 5161"/>
             </a:avLst>
           </a:prstGeom>
           <a:solidFill>
@@ -10297,7 +12688,7 @@
         <p:spPr>
           <a:xfrm>
             <a:off x="7799832" y="1261872"/>
-            <a:ext cx="3678631" cy="901598"/>
+            <a:ext cx="3678631" cy="822046"/>
           </a:xfrm>
           <a:prstGeom prst="rect">
             <a:avLst/>
@@ -10321,7 +12712,7 @@
                 <a:ea typeface="Cambria" pitchFamily="34" charset="-122"/>
                 <a:cs typeface="Cambria" pitchFamily="34" charset="-120"/>
               </a:rPr>
-              <a:t>626.4 / 626.0 / 625.9</a:t>
+              <a:t>666.1 → 626.4</a:t>
             </a:r>
             <a:endParaRPr lang="en-US" sz="2200" dirty="0"/>
           </a:p>
@@ -10335,8 +12726,8 @@
         </p:nvSpPr>
         <p:spPr>
           <a:xfrm>
-            <a:off x="7799832" y="2121408"/>
-            <a:ext cx="3678631" cy="559613"/>
+            <a:off x="7799832" y="2039112"/>
+            <a:ext cx="3678631" cy="510235"/>
           </a:xfrm>
           <a:prstGeom prst="rect">
             <a:avLst/>
@@ -10360,7 +12751,7 @@
                 <a:ea typeface="Calibri" pitchFamily="34" charset="-122"/>
                 <a:cs typeface="Calibri" pitchFamily="34" charset="-120"/>
               </a:rPr>
-              <a:t>MAX LOAD, n=16 — POWER 2 / 3 / 4</a:t>
+              <a:t>MAX LOAD, n=16  (RANDOM → POWER-2)</a:t>
             </a:r>
             <a:endParaRPr lang="en-US" sz="1050" dirty="0"/>
           </a:p>
@@ -10368,57 +12759,18 @@
       </p:sp>
       <p:sp>
         <p:nvSpPr>
-          <p:cNvPr id="8" name="Text 5"/>
-          <p:cNvSpPr/>
-          <p:nvPr/>
-        </p:nvSpPr>
-        <p:spPr>
-          <a:xfrm>
-            <a:off x="7799832" y="2395728"/>
-            <a:ext cx="3678631" cy="274320"/>
-          </a:xfrm>
-          <a:prstGeom prst="rect">
-            <a:avLst/>
-          </a:prstGeom>
-          <a:noFill/>
-          <a:ln/>
-        </p:spPr>
-        <p:txBody>
-          <a:bodyPr wrap="square" lIns="0" tIns="0" rIns="0" bIns="0" rtlCol="0" anchor="ctr"/>
-          <a:lstStyle/>
-          <a:p>
-            <a:pPr indent="0" marL="0">
-              <a:buNone/>
-            </a:pPr>
-            <a:r>
-              <a:rPr lang="en-US" sz="1150" dirty="0">
-                <a:solidFill>
-                  <a:srgbClr val="64748B"/>
-                </a:solidFill>
-                <a:latin typeface="Calibri" pitchFamily="34" charset="0"/>
-                <a:ea typeface="Calibri" pitchFamily="34" charset="-122"/>
-                <a:cs typeface="Calibri" pitchFamily="34" charset="-120"/>
-              </a:rPr>
-              <a:t>Cost per ball: 9 / 14 / 19</a:t>
-            </a:r>
-            <a:endParaRPr lang="en-US" sz="1150" dirty="0"/>
-          </a:p>
-        </p:txBody>
-      </p:sp>
-      <p:sp>
-        <p:nvSpPr>
-          <p:cNvPr id="9" name="Shape 6"/>
-          <p:cNvSpPr/>
-          <p:nvPr/>
-        </p:nvSpPr>
-        <p:spPr>
-          <a:xfrm>
-            <a:off x="7635240" y="2926080"/>
-            <a:ext cx="4007815" cy="1554480"/>
+          <p:cNvPr id="8" name="Shape 5"/>
+          <p:cNvSpPr/>
+          <p:nvPr/>
+        </p:nvSpPr>
+        <p:spPr>
+          <a:xfrm>
+            <a:off x="7635240" y="2743200"/>
+            <a:ext cx="4007815" cy="1417320"/>
           </a:xfrm>
           <a:prstGeom prst="roundRect">
             <a:avLst>
-              <a:gd name="adj" fmla="val 4706"/>
+              <a:gd name="adj" fmla="val 5161"/>
             </a:avLst>
           </a:prstGeom>
           <a:solidFill>
@@ -10429,14 +12781,14 @@
       </p:sp>
       <p:sp>
         <p:nvSpPr>
-          <p:cNvPr id="10" name="Text 7"/>
-          <p:cNvSpPr/>
-          <p:nvPr/>
-        </p:nvSpPr>
-        <p:spPr>
-          <a:xfrm>
-            <a:off x="7799832" y="2999232"/>
-            <a:ext cx="3678631" cy="901598"/>
+          <p:cNvPr id="9" name="Text 6"/>
+          <p:cNvSpPr/>
+          <p:nvPr/>
+        </p:nvSpPr>
+        <p:spPr>
+          <a:xfrm>
+            <a:off x="7799832" y="2816352"/>
+            <a:ext cx="3678631" cy="822046"/>
           </a:xfrm>
           <a:prstGeom prst="rect">
             <a:avLst/>
@@ -10460,7 +12812,7 @@
                 <a:ea typeface="Cambria" pitchFamily="34" charset="-122"/>
                 <a:cs typeface="Cambria" pitchFamily="34" charset="-120"/>
               </a:rPr>
-              <a:t>313.9 / 313.6 / 313.0</a:t>
+              <a:t>345.3 → 313.9</a:t>
             </a:r>
             <a:endParaRPr lang="en-US" sz="2200" dirty="0"/>
           </a:p>
@@ -10468,14 +12820,53 @@
       </p:sp>
       <p:sp>
         <p:nvSpPr>
+          <p:cNvPr id="10" name="Text 7"/>
+          <p:cNvSpPr/>
+          <p:nvPr/>
+        </p:nvSpPr>
+        <p:spPr>
+          <a:xfrm>
+            <a:off x="7799832" y="3593592"/>
+            <a:ext cx="3678631" cy="510235"/>
+          </a:xfrm>
+          <a:prstGeom prst="rect">
+            <a:avLst/>
+          </a:prstGeom>
+          <a:noFill/>
+          <a:ln/>
+        </p:spPr>
+        <p:txBody>
+          <a:bodyPr wrap="square" lIns="0" tIns="0" rIns="0" bIns="0" rtlCol="0" anchor="t"/>
+          <a:lstStyle/>
+          <a:p>
+            <a:pPr algn="l" indent="0" marL="0">
+              <a:buNone/>
+            </a:pPr>
+            <a:r>
+              <a:rPr lang="en-US" sz="1050" dirty="0">
+                <a:solidFill>
+                  <a:srgbClr val="64748B"/>
+                </a:solidFill>
+                <a:latin typeface="Calibri" pitchFamily="34" charset="0"/>
+                <a:ea typeface="Calibri" pitchFamily="34" charset="-122"/>
+                <a:cs typeface="Calibri" pitchFamily="34" charset="-120"/>
+              </a:rPr>
+              <a:t>MAX LOAD, n=32  (RANDOM → POWER-2)</a:t>
+            </a:r>
+            <a:endParaRPr lang="en-US" sz="1050" dirty="0"/>
+          </a:p>
+        </p:txBody>
+      </p:sp>
+      <p:sp>
+        <p:nvSpPr>
           <p:cNvPr id="11" name="Text 8"/>
           <p:cNvSpPr/>
           <p:nvPr/>
         </p:nvSpPr>
         <p:spPr>
           <a:xfrm>
-            <a:off x="7799832" y="3858768"/>
-            <a:ext cx="3678631" cy="559613"/>
+            <a:off x="7635240" y="4343400"/>
+            <a:ext cx="4007815" cy="1097280"/>
           </a:xfrm>
           <a:prstGeom prst="rect">
             <a:avLst/>
@@ -10487,11 +12878,11 @@
           <a:bodyPr wrap="square" lIns="0" tIns="0" rIns="0" bIns="0" rtlCol="0" anchor="t"/>
           <a:lstStyle/>
           <a:p>
-            <a:pPr algn="l" indent="0" marL="0">
-              <a:buNone/>
-            </a:pPr>
-            <a:r>
-              <a:rPr lang="en-US" sz="1050" dirty="0">
+            <a:pPr indent="0" marL="0">
+              <a:buNone/>
+            </a:pPr>
+            <a:r>
+              <a:rPr lang="en-US" sz="1250" i="1" dirty="0">
                 <a:solidFill>
                   <a:srgbClr val="64748B"/>
                 </a:solidFill>
@@ -10499,85 +12890,7 @@
                 <a:ea typeface="Calibri" pitchFamily="34" charset="-122"/>
                 <a:cs typeface="Calibri" pitchFamily="34" charset="-120"/>
               </a:rPr>
-              <a:t>MAX LOAD, n=32 — POWER 2 / 3 / 4</a:t>
-            </a:r>
-            <a:endParaRPr lang="en-US" sz="1050" dirty="0"/>
-          </a:p>
-        </p:txBody>
-      </p:sp>
-      <p:sp>
-        <p:nvSpPr>
-          <p:cNvPr id="12" name="Text 9"/>
-          <p:cNvSpPr/>
-          <p:nvPr/>
-        </p:nvSpPr>
-        <p:spPr>
-          <a:xfrm>
-            <a:off x="7799832" y="4133088"/>
-            <a:ext cx="3678631" cy="274320"/>
-          </a:xfrm>
-          <a:prstGeom prst="rect">
-            <a:avLst/>
-          </a:prstGeom>
-          <a:noFill/>
-          <a:ln/>
-        </p:spPr>
-        <p:txBody>
-          <a:bodyPr wrap="square" lIns="0" tIns="0" rIns="0" bIns="0" rtlCol="0" anchor="ctr"/>
-          <a:lstStyle/>
-          <a:p>
-            <a:pPr indent="0" marL="0">
-              <a:buNone/>
-            </a:pPr>
-            <a:r>
-              <a:rPr lang="en-US" sz="1150" dirty="0">
-                <a:solidFill>
-                  <a:srgbClr val="64748B"/>
-                </a:solidFill>
-                <a:latin typeface="Calibri" pitchFamily="34" charset="0"/>
-                <a:ea typeface="Calibri" pitchFamily="34" charset="-122"/>
-                <a:cs typeface="Calibri" pitchFamily="34" charset="-120"/>
-              </a:rPr>
-              <a:t>Cost per ball: 9 / 14 / 19</a:t>
-            </a:r>
-            <a:endParaRPr lang="en-US" sz="1150" dirty="0"/>
-          </a:p>
-        </p:txBody>
-      </p:sp>
-      <p:sp>
-        <p:nvSpPr>
-          <p:cNvPr id="13" name="Text 10"/>
-          <p:cNvSpPr/>
-          <p:nvPr/>
-        </p:nvSpPr>
-        <p:spPr>
-          <a:xfrm>
-            <a:off x="7635240" y="4709160"/>
-            <a:ext cx="4007815" cy="731520"/>
-          </a:xfrm>
-          <a:prstGeom prst="rect">
-            <a:avLst/>
-          </a:prstGeom>
-          <a:noFill/>
-          <a:ln/>
-        </p:spPr>
-        <p:txBody>
-          <a:bodyPr wrap="square" lIns="0" tIns="0" rIns="0" bIns="0" rtlCol="0" anchor="t"/>
-          <a:lstStyle/>
-          <a:p>
-            <a:pPr indent="0" marL="0">
-              <a:buNone/>
-            </a:pPr>
-            <a:r>
-              <a:rPr lang="en-US" sz="1250" i="1" dirty="0">
-                <a:solidFill>
-                  <a:srgbClr val="64748B"/>
-                </a:solidFill>
-                <a:latin typeface="Calibri" pitchFamily="34" charset="0"/>
-                <a:ea typeface="Calibri" pitchFamily="34" charset="-122"/>
-                <a:cs typeface="Calibri" pitchFamily="34" charset="-120"/>
-              </a:rPr>
-              <a:t>Cost grows roughly linearly with k — quality gain does not.</a:t>
+              <a:t>Absolute minimum adds only a small improvement beyond Power-2 — at much higher cost.</a:t>
             </a:r>
             <a:endParaRPr lang="en-US" sz="1250" dirty="0"/>
           </a:p>
@@ -10585,7 +12898,7 @@
       </p:sp>
       <p:sp>
         <p:nvSpPr>
-          <p:cNvPr id="14" name="Shape 11"/>
+          <p:cNvPr id="12" name="Shape 9"/>
           <p:cNvSpPr/>
           <p:nvPr/>
         </p:nvSpPr>
@@ -10607,7 +12920,7 @@
       </p:sp>
       <p:sp>
         <p:nvSpPr>
-          <p:cNvPr id="15" name="Text 12"/>
+          <p:cNvPr id="13" name="Text 10"/>
           <p:cNvSpPr/>
           <p:nvPr/>
         </p:nvSpPr>
@@ -10638,7 +12951,7 @@
                 <a:ea typeface="Calibri" pitchFamily="34" charset="-122"/>
                 <a:cs typeface="Calibri" pitchFamily="34" charset="-120"/>
               </a:rPr>
-              <a:t>The big improvement is k=1 → k=2. Larger k mostly increases cost.</a:t>
+              <a:t>Power-2 nearly closes the gap to the ideal policy in the clean, unweighted case.</a:t>
             </a:r>
             <a:endParaRPr lang="en-US" sz="1350" dirty="0"/>
           </a:p>
@@ -10709,7 +13022,7 @@
                 <a:ea typeface="Cambria" pitchFamily="34" charset="-122"/>
                 <a:cs typeface="Cambria" pitchFamily="34" charset="-120"/>
               </a:rPr>
-              <a:t>Cost–Quality Tradeoff</a:t>
+              <a:t>Diminishing Returns of k</a:t>
             </a:r>
             <a:endParaRPr lang="en-US" sz="2900" dirty="0"/>
           </a:p>
@@ -10756,7 +13069,7 @@
       </p:sp>
       <p:pic>
         <p:nvPicPr>
-          <p:cNvPr id="4" name="Image 0" descr="/home/claude/work/assets/plot_cost_quality_clean.png">    </p:cNvPr>
+          <p:cNvPr id="4" name="Image 0" descr="/home/claude/work/assets/plot_diminishing_returns.png">    </p:cNvPr>
           <p:cNvPicPr>
             <a:picLocks noChangeAspect="1"/>
           </p:cNvPicPr>
@@ -10770,8 +13083,8 @@
         </p:blipFill>
         <p:spPr>
           <a:xfrm>
-            <a:off x="1340968" y="1143000"/>
-            <a:ext cx="9509760" cy="4075611"/>
+            <a:off x="548640" y="1188720"/>
+            <a:ext cx="6858000" cy="4572000"/>
           </a:xfrm>
           <a:prstGeom prst="rect">
             <a:avLst/>
@@ -10786,12 +13099,12 @@
         </p:nvSpPr>
         <p:spPr>
           <a:xfrm>
-            <a:off x="548640" y="5440680"/>
-            <a:ext cx="3576218" cy="502920"/>
+            <a:off x="7635240" y="1188720"/>
+            <a:ext cx="4007815" cy="1554480"/>
           </a:xfrm>
           <a:prstGeom prst="roundRect">
             <a:avLst>
-              <a:gd name="adj" fmla="val 10909"/>
+              <a:gd name="adj" fmla="val 4706"/>
             </a:avLst>
           </a:prstGeom>
           <a:solidFill>
@@ -10808,8 +13121,86 @@
         </p:nvSpPr>
         <p:spPr>
           <a:xfrm>
-            <a:off x="713232" y="5440680"/>
-            <a:ext cx="3247034" cy="502920"/>
+            <a:off x="7799832" y="1261872"/>
+            <a:ext cx="3678631" cy="901598"/>
+          </a:xfrm>
+          <a:prstGeom prst="rect">
+            <a:avLst/>
+          </a:prstGeom>
+          <a:noFill/>
+          <a:ln/>
+        </p:spPr>
+        <p:txBody>
+          <a:bodyPr wrap="square" lIns="0" tIns="0" rIns="0" bIns="0" rtlCol="0" anchor="b"/>
+          <a:lstStyle/>
+          <a:p>
+            <a:pPr algn="l" indent="0" marL="0">
+              <a:buNone/>
+            </a:pPr>
+            <a:r>
+              <a:rPr lang="en-US" sz="2200" b="1" dirty="0">
+                <a:solidFill>
+                  <a:srgbClr val="2563EB"/>
+                </a:solidFill>
+                <a:latin typeface="Cambria" pitchFamily="34" charset="0"/>
+                <a:ea typeface="Cambria" pitchFamily="34" charset="-122"/>
+                <a:cs typeface="Cambria" pitchFamily="34" charset="-120"/>
+              </a:rPr>
+              <a:t>626.4 / 626.0 / 625.9</a:t>
+            </a:r>
+            <a:endParaRPr lang="en-US" sz="2200" dirty="0"/>
+          </a:p>
+        </p:txBody>
+      </p:sp>
+      <p:sp>
+        <p:nvSpPr>
+          <p:cNvPr id="7" name="Text 4"/>
+          <p:cNvSpPr/>
+          <p:nvPr/>
+        </p:nvSpPr>
+        <p:spPr>
+          <a:xfrm>
+            <a:off x="7799832" y="2121408"/>
+            <a:ext cx="3678631" cy="559613"/>
+          </a:xfrm>
+          <a:prstGeom prst="rect">
+            <a:avLst/>
+          </a:prstGeom>
+          <a:noFill/>
+          <a:ln/>
+        </p:spPr>
+        <p:txBody>
+          <a:bodyPr wrap="square" lIns="0" tIns="0" rIns="0" bIns="0" rtlCol="0" anchor="t"/>
+          <a:lstStyle/>
+          <a:p>
+            <a:pPr algn="l" indent="0" marL="0">
+              <a:buNone/>
+            </a:pPr>
+            <a:r>
+              <a:rPr lang="en-US" sz="1050" dirty="0">
+                <a:solidFill>
+                  <a:srgbClr val="64748B"/>
+                </a:solidFill>
+                <a:latin typeface="Calibri" pitchFamily="34" charset="0"/>
+                <a:ea typeface="Calibri" pitchFamily="34" charset="-122"/>
+                <a:cs typeface="Calibri" pitchFamily="34" charset="-120"/>
+              </a:rPr>
+              <a:t>MAX LOAD, n=16 — POWER 2 / 3 / 4</a:t>
+            </a:r>
+            <a:endParaRPr lang="en-US" sz="1050" dirty="0"/>
+          </a:p>
+        </p:txBody>
+      </p:sp>
+      <p:sp>
+        <p:nvSpPr>
+          <p:cNvPr id="8" name="Text 5"/>
+          <p:cNvSpPr/>
+          <p:nvPr/>
+        </p:nvSpPr>
+        <p:spPr>
+          <a:xfrm>
+            <a:off x="7799832" y="2395728"/>
+            <a:ext cx="3678631" cy="274320"/>
           </a:xfrm>
           <a:prstGeom prst="rect">
             <a:avLst/>
@@ -10825,20 +13216,6 @@
               <a:buNone/>
             </a:pPr>
             <a:r>
-              <a:rPr lang="en-US" sz="1150" b="1" dirty="0">
-                <a:solidFill>
-                  <a:srgbClr val="2563EB"/>
-                </a:solidFill>
-                <a:latin typeface="Calibri" pitchFamily="34" charset="0"/>
-                <a:ea typeface="Calibri" pitchFamily="34" charset="-122"/>
-                <a:cs typeface="Calibri" pitchFamily="34" charset="-120"/>
-              </a:rPr>
-              <a:t>Absolute minimum  </a:t>
-            </a:r>
-            <a:pPr indent="0" marL="0">
-              <a:buNone/>
-            </a:pPr>
-            <a:r>
               <a:rPr lang="en-US" sz="1150" dirty="0">
                 <a:solidFill>
                   <a:srgbClr val="64748B"/>
@@ -10847,7 +13224,7 @@
                 <a:ea typeface="Calibri" pitchFamily="34" charset="-122"/>
                 <a:cs typeface="Calibri" pitchFamily="34" charset="-120"/>
               </a:rPr>
-              <a:t>Near-optimal — but expensive</a:t>
+              <a:t>Cost per ball: 9 / 14 / 19</a:t>
             </a:r>
             <a:endParaRPr lang="en-US" sz="1150" dirty="0"/>
           </a:p>
@@ -10855,18 +13232,18 @@
       </p:sp>
       <p:sp>
         <p:nvSpPr>
-          <p:cNvPr id="7" name="Shape 4"/>
-          <p:cNvSpPr/>
-          <p:nvPr/>
-        </p:nvSpPr>
-        <p:spPr>
-          <a:xfrm>
-            <a:off x="4307738" y="5440680"/>
-            <a:ext cx="3576218" cy="502920"/>
+          <p:cNvPr id="9" name="Shape 6"/>
+          <p:cNvSpPr/>
+          <p:nvPr/>
+        </p:nvSpPr>
+        <p:spPr>
+          <a:xfrm>
+            <a:off x="7635240" y="2926080"/>
+            <a:ext cx="4007815" cy="1554480"/>
           </a:xfrm>
           <a:prstGeom prst="roundRect">
             <a:avLst>
-              <a:gd name="adj" fmla="val 10909"/>
+              <a:gd name="adj" fmla="val 4706"/>
             </a:avLst>
           </a:prstGeom>
           <a:solidFill>
@@ -10877,14 +13254,92 @@
       </p:sp>
       <p:sp>
         <p:nvSpPr>
-          <p:cNvPr id="8" name="Text 5"/>
-          <p:cNvSpPr/>
-          <p:nvPr/>
-        </p:nvSpPr>
-        <p:spPr>
-          <a:xfrm>
-            <a:off x="4472330" y="5440680"/>
-            <a:ext cx="3247034" cy="502920"/>
+          <p:cNvPr id="10" name="Text 7"/>
+          <p:cNvSpPr/>
+          <p:nvPr/>
+        </p:nvSpPr>
+        <p:spPr>
+          <a:xfrm>
+            <a:off x="7799832" y="2999232"/>
+            <a:ext cx="3678631" cy="901598"/>
+          </a:xfrm>
+          <a:prstGeom prst="rect">
+            <a:avLst/>
+          </a:prstGeom>
+          <a:noFill/>
+          <a:ln/>
+        </p:spPr>
+        <p:txBody>
+          <a:bodyPr wrap="square" lIns="0" tIns="0" rIns="0" bIns="0" rtlCol="0" anchor="b"/>
+          <a:lstStyle/>
+          <a:p>
+            <a:pPr algn="l" indent="0" marL="0">
+              <a:buNone/>
+            </a:pPr>
+            <a:r>
+              <a:rPr lang="en-US" sz="2200" b="1" dirty="0">
+                <a:solidFill>
+                  <a:srgbClr val="2563EB"/>
+                </a:solidFill>
+                <a:latin typeface="Cambria" pitchFamily="34" charset="0"/>
+                <a:ea typeface="Cambria" pitchFamily="34" charset="-122"/>
+                <a:cs typeface="Cambria" pitchFamily="34" charset="-120"/>
+              </a:rPr>
+              <a:t>313.9 / 313.6 / 313.0</a:t>
+            </a:r>
+            <a:endParaRPr lang="en-US" sz="2200" dirty="0"/>
+          </a:p>
+        </p:txBody>
+      </p:sp>
+      <p:sp>
+        <p:nvSpPr>
+          <p:cNvPr id="11" name="Text 8"/>
+          <p:cNvSpPr/>
+          <p:nvPr/>
+        </p:nvSpPr>
+        <p:spPr>
+          <a:xfrm>
+            <a:off x="7799832" y="3858768"/>
+            <a:ext cx="3678631" cy="559613"/>
+          </a:xfrm>
+          <a:prstGeom prst="rect">
+            <a:avLst/>
+          </a:prstGeom>
+          <a:noFill/>
+          <a:ln/>
+        </p:spPr>
+        <p:txBody>
+          <a:bodyPr wrap="square" lIns="0" tIns="0" rIns="0" bIns="0" rtlCol="0" anchor="t"/>
+          <a:lstStyle/>
+          <a:p>
+            <a:pPr algn="l" indent="0" marL="0">
+              <a:buNone/>
+            </a:pPr>
+            <a:r>
+              <a:rPr lang="en-US" sz="1050" dirty="0">
+                <a:solidFill>
+                  <a:srgbClr val="64748B"/>
+                </a:solidFill>
+                <a:latin typeface="Calibri" pitchFamily="34" charset="0"/>
+                <a:ea typeface="Calibri" pitchFamily="34" charset="-122"/>
+                <a:cs typeface="Calibri" pitchFamily="34" charset="-120"/>
+              </a:rPr>
+              <a:t>MAX LOAD, n=32 — POWER 2 / 3 / 4</a:t>
+            </a:r>
+            <a:endParaRPr lang="en-US" sz="1050" dirty="0"/>
+          </a:p>
+        </p:txBody>
+      </p:sp>
+      <p:sp>
+        <p:nvSpPr>
+          <p:cNvPr id="12" name="Text 9"/>
+          <p:cNvSpPr/>
+          <p:nvPr/>
+        </p:nvSpPr>
+        <p:spPr>
+          <a:xfrm>
+            <a:off x="7799832" y="4133088"/>
+            <a:ext cx="3678631" cy="274320"/>
           </a:xfrm>
           <a:prstGeom prst="rect">
             <a:avLst/>
@@ -10900,21 +13355,46 @@
               <a:buNone/>
             </a:pPr>
             <a:r>
-              <a:rPr lang="en-US" sz="1150" b="1" dirty="0">
-                <a:solidFill>
-                  <a:srgbClr val="15803D"/>
-                </a:solidFill>
-                <a:latin typeface="Calibri" pitchFamily="34" charset="0"/>
-                <a:ea typeface="Calibri" pitchFamily="34" charset="-122"/>
-                <a:cs typeface="Calibri" pitchFamily="34" charset="-120"/>
-              </a:rPr>
-              <a:t>Round-robin  </a:t>
-            </a:r>
+              <a:rPr lang="en-US" sz="1150" dirty="0">
+                <a:solidFill>
+                  <a:srgbClr val="64748B"/>
+                </a:solidFill>
+                <a:latin typeface="Calibri" pitchFamily="34" charset="0"/>
+                <a:ea typeface="Calibri" pitchFamily="34" charset="-122"/>
+                <a:cs typeface="Calibri" pitchFamily="34" charset="-120"/>
+              </a:rPr>
+              <a:t>Cost per ball: 9 / 14 / 19</a:t>
+            </a:r>
+            <a:endParaRPr lang="en-US" sz="1150" dirty="0"/>
+          </a:p>
+        </p:txBody>
+      </p:sp>
+      <p:sp>
+        <p:nvSpPr>
+          <p:cNvPr id="13" name="Text 10"/>
+          <p:cNvSpPr/>
+          <p:nvPr/>
+        </p:nvSpPr>
+        <p:spPr>
+          <a:xfrm>
+            <a:off x="7635240" y="4709160"/>
+            <a:ext cx="4007815" cy="731520"/>
+          </a:xfrm>
+          <a:prstGeom prst="rect">
+            <a:avLst/>
+          </a:prstGeom>
+          <a:noFill/>
+          <a:ln/>
+        </p:spPr>
+        <p:txBody>
+          <a:bodyPr wrap="square" lIns="0" tIns="0" rIns="0" bIns="0" rtlCol="0" anchor="t"/>
+          <a:lstStyle/>
+          <a:p>
             <a:pPr indent="0" marL="0">
               <a:buNone/>
             </a:pPr>
             <a:r>
-              <a:rPr lang="en-US" sz="1150" dirty="0">
+              <a:rPr lang="en-US" sz="1250" i="1" dirty="0">
                 <a:solidFill>
                   <a:srgbClr val="64748B"/>
                 </a:solidFill>
@@ -10922,90 +13402,15 @@
                 <a:ea typeface="Calibri" pitchFamily="34" charset="-122"/>
                 <a:cs typeface="Calibri" pitchFamily="34" charset="-120"/>
               </a:rPr>
-              <a:t>Looks excellent here — but fragile</a:t>
-            </a:r>
-            <a:endParaRPr lang="en-US" sz="1150" dirty="0"/>
-          </a:p>
-        </p:txBody>
-      </p:sp>
-      <p:sp>
-        <p:nvSpPr>
-          <p:cNvPr id="9" name="Shape 6"/>
-          <p:cNvSpPr/>
-          <p:nvPr/>
-        </p:nvSpPr>
-        <p:spPr>
-          <a:xfrm>
-            <a:off x="8066837" y="5440680"/>
-            <a:ext cx="3576218" cy="502920"/>
-          </a:xfrm>
-          <a:prstGeom prst="roundRect">
-            <a:avLst>
-              <a:gd name="adj" fmla="val 10909"/>
-            </a:avLst>
-          </a:prstGeom>
-          <a:solidFill>
-            <a:srgbClr val="F1F5F9"/>
-          </a:solidFill>
-          <a:ln/>
-        </p:spPr>
-      </p:sp>
-      <p:sp>
-        <p:nvSpPr>
-          <p:cNvPr id="10" name="Text 7"/>
-          <p:cNvSpPr/>
-          <p:nvPr/>
-        </p:nvSpPr>
-        <p:spPr>
-          <a:xfrm>
-            <a:off x="8231429" y="5440680"/>
-            <a:ext cx="3247034" cy="502920"/>
-          </a:xfrm>
-          <a:prstGeom prst="rect">
-            <a:avLst/>
-          </a:prstGeom>
-          <a:noFill/>
-          <a:ln/>
-        </p:spPr>
-        <p:txBody>
-          <a:bodyPr wrap="square" lIns="0" tIns="0" rIns="0" bIns="0" rtlCol="0" anchor="ctr"/>
-          <a:lstStyle/>
-          <a:p>
-            <a:pPr indent="0" marL="0">
-              <a:buNone/>
-            </a:pPr>
-            <a:r>
-              <a:rPr lang="en-US" sz="1150" b="1" dirty="0">
-                <a:solidFill>
-                  <a:srgbClr val="C2660D"/>
-                </a:solidFill>
-                <a:latin typeface="Calibri" pitchFamily="34" charset="0"/>
-                <a:ea typeface="Calibri" pitchFamily="34" charset="-122"/>
-                <a:cs typeface="Calibri" pitchFamily="34" charset="-120"/>
-              </a:rPr>
-              <a:t>Power-2  </a:t>
-            </a:r>
-            <a:pPr indent="0" marL="0">
-              <a:buNone/>
-            </a:pPr>
-            <a:r>
-              <a:rPr lang="en-US" sz="1150" dirty="0">
-                <a:solidFill>
-                  <a:srgbClr val="64748B"/>
-                </a:solidFill>
-                <a:latin typeface="Calibri" pitchFamily="34" charset="0"/>
-                <a:ea typeface="Calibri" pitchFamily="34" charset="-122"/>
-                <a:cs typeface="Calibri" pitchFamily="34" charset="-120"/>
-              </a:rPr>
-              <a:t>The knee of the curve</a:t>
-            </a:r>
-            <a:endParaRPr lang="en-US" sz="1150" dirty="0"/>
-          </a:p>
-        </p:txBody>
-      </p:sp>
-      <p:sp>
-        <p:nvSpPr>
-          <p:cNvPr id="11" name="Shape 8"/>
+              <a:t>Cost grows roughly linearly with k — quality gain does not.</a:t>
+            </a:r>
+            <a:endParaRPr lang="en-US" sz="1250" dirty="0"/>
+          </a:p>
+        </p:txBody>
+      </p:sp>
+      <p:sp>
+        <p:nvSpPr>
+          <p:cNvPr id="14" name="Shape 11"/>
           <p:cNvSpPr/>
           <p:nvPr/>
         </p:nvSpPr>
@@ -11027,7 +13432,7 @@
       </p:sp>
       <p:sp>
         <p:nvSpPr>
-          <p:cNvPr id="12" name="Text 9"/>
+          <p:cNvPr id="15" name="Text 12"/>
           <p:cNvSpPr/>
           <p:nvPr/>
         </p:nvSpPr>
@@ -11058,7 +13463,7 @@
                 <a:ea typeface="Calibri" pitchFamily="34" charset="-122"/>
                 <a:cs typeface="Calibri" pitchFamily="34" charset="-120"/>
               </a:rPr>
-              <a:t>Power-2 delivers most of the achievable quality for a small, flat cost — the knee of the curve.</a:t>
+              <a:t>The big improvement is k=1 → k=2. Larger k mostly increases cost.</a:t>
             </a:r>
             <a:endParaRPr lang="en-US" sz="1350" dirty="0"/>
           </a:p>
@@ -11129,7 +13534,7 @@
                 <a:ea typeface="Cambria" pitchFamily="34" charset="-122"/>
                 <a:cs typeface="Cambria" pitchFamily="34" charset="-120"/>
               </a:rPr>
-              <a:t>Weighted Balls Break Count Fairness</a:t>
+              <a:t>Cost–Quality Tradeoff</a:t>
             </a:r>
             <a:endParaRPr lang="en-US" sz="2900" dirty="0"/>
           </a:p>
@@ -11176,7 +13581,7 @@
       </p:sp>
       <p:pic>
         <p:nvPicPr>
-          <p:cNvPr id="4" name="Image 0" descr="/home/claude/work/assets/plot_weighted_breaks.png">    </p:cNvPr>
+          <p:cNvPr id="4" name="Image 0" descr="/home/claude/work/assets/plot_cost_quality_clean.png">    </p:cNvPr>
           <p:cNvPicPr>
             <a:picLocks noChangeAspect="1"/>
           </p:cNvPicPr>
@@ -11190,8 +13595,8 @@
         </p:blipFill>
         <p:spPr>
           <a:xfrm>
-            <a:off x="548640" y="1188720"/>
-            <a:ext cx="6858000" cy="4572000"/>
+            <a:off x="1340968" y="1143000"/>
+            <a:ext cx="9509760" cy="4075611"/>
           </a:xfrm>
           <a:prstGeom prst="rect">
             <a:avLst/>
@@ -11206,12 +13611,12 @@
         </p:nvSpPr>
         <p:spPr>
           <a:xfrm>
-            <a:off x="7635240" y="1188720"/>
-            <a:ext cx="4007815" cy="1417320"/>
+            <a:off x="548640" y="5440680"/>
+            <a:ext cx="3576218" cy="502920"/>
           </a:xfrm>
           <a:prstGeom prst="roundRect">
             <a:avLst>
-              <a:gd name="adj" fmla="val 5161"/>
+              <a:gd name="adj" fmla="val 10909"/>
             </a:avLst>
           </a:prstGeom>
           <a:solidFill>
@@ -11228,63 +13633,113 @@
         </p:nvSpPr>
         <p:spPr>
           <a:xfrm>
-            <a:off x="7799832" y="1261872"/>
-            <a:ext cx="3678631" cy="822046"/>
-          </a:xfrm>
-          <a:prstGeom prst="rect">
-            <a:avLst/>
-          </a:prstGeom>
-          <a:noFill/>
-          <a:ln/>
-        </p:spPr>
-        <p:txBody>
-          <a:bodyPr wrap="square" lIns="0" tIns="0" rIns="0" bIns="0" rtlCol="0" anchor="b"/>
-          <a:lstStyle/>
-          <a:p>
-            <a:pPr algn="l" indent="0" marL="0">
-              <a:buNone/>
-            </a:pPr>
-            <a:r>
-              <a:rPr lang="en-US" sz="2200" b="1" dirty="0">
+            <a:off x="713232" y="5440680"/>
+            <a:ext cx="3247034" cy="502920"/>
+          </a:xfrm>
+          <a:prstGeom prst="rect">
+            <a:avLst/>
+          </a:prstGeom>
+          <a:noFill/>
+          <a:ln/>
+        </p:spPr>
+        <p:txBody>
+          <a:bodyPr wrap="square" lIns="0" tIns="0" rIns="0" bIns="0" rtlCol="0" anchor="ctr"/>
+          <a:lstStyle/>
+          <a:p>
+            <a:pPr indent="0" marL="0">
+              <a:buNone/>
+            </a:pPr>
+            <a:r>
+              <a:rPr lang="en-US" sz="1150" b="1" dirty="0">
+                <a:solidFill>
+                  <a:srgbClr val="2563EB"/>
+                </a:solidFill>
+                <a:latin typeface="Calibri" pitchFamily="34" charset="0"/>
+                <a:ea typeface="Calibri" pitchFamily="34" charset="-122"/>
+                <a:cs typeface="Calibri" pitchFamily="34" charset="-120"/>
+              </a:rPr>
+              <a:t>Absolute minimum  </a:t>
+            </a:r>
+            <a:pPr indent="0" marL="0">
+              <a:buNone/>
+            </a:pPr>
+            <a:r>
+              <a:rPr lang="en-US" sz="1150" dirty="0">
+                <a:solidFill>
+                  <a:srgbClr val="64748B"/>
+                </a:solidFill>
+                <a:latin typeface="Calibri" pitchFamily="34" charset="0"/>
+                <a:ea typeface="Calibri" pitchFamily="34" charset="-122"/>
+                <a:cs typeface="Calibri" pitchFamily="34" charset="-120"/>
+              </a:rPr>
+              <a:t>Near-optimal — but expensive</a:t>
+            </a:r>
+            <a:endParaRPr lang="en-US" sz="1150" dirty="0"/>
+          </a:p>
+        </p:txBody>
+      </p:sp>
+      <p:sp>
+        <p:nvSpPr>
+          <p:cNvPr id="7" name="Shape 4"/>
+          <p:cNvSpPr/>
+          <p:nvPr/>
+        </p:nvSpPr>
+        <p:spPr>
+          <a:xfrm>
+            <a:off x="4307738" y="5440680"/>
+            <a:ext cx="3576218" cy="502920"/>
+          </a:xfrm>
+          <a:prstGeom prst="roundRect">
+            <a:avLst>
+              <a:gd name="adj" fmla="val 10909"/>
+            </a:avLst>
+          </a:prstGeom>
+          <a:solidFill>
+            <a:srgbClr val="F1F5F9"/>
+          </a:solidFill>
+          <a:ln/>
+        </p:spPr>
+      </p:sp>
+      <p:sp>
+        <p:nvSpPr>
+          <p:cNvPr id="8" name="Text 5"/>
+          <p:cNvSpPr/>
+          <p:nvPr/>
+        </p:nvSpPr>
+        <p:spPr>
+          <a:xfrm>
+            <a:off x="4472330" y="5440680"/>
+            <a:ext cx="3247034" cy="502920"/>
+          </a:xfrm>
+          <a:prstGeom prst="rect">
+            <a:avLst/>
+          </a:prstGeom>
+          <a:noFill/>
+          <a:ln/>
+        </p:spPr>
+        <p:txBody>
+          <a:bodyPr wrap="square" lIns="0" tIns="0" rIns="0" bIns="0" rtlCol="0" anchor="ctr"/>
+          <a:lstStyle/>
+          <a:p>
+            <a:pPr indent="0" marL="0">
+              <a:buNone/>
+            </a:pPr>
+            <a:r>
+              <a:rPr lang="en-US" sz="1150" b="1" dirty="0">
                 <a:solidFill>
                   <a:srgbClr val="15803D"/>
                 </a:solidFill>
-                <a:latin typeface="Cambria" pitchFamily="34" charset="0"/>
-                <a:ea typeface="Cambria" pitchFamily="34" charset="-122"/>
-                <a:cs typeface="Cambria" pitchFamily="34" charset="-120"/>
-              </a:rPr>
-              <a:t>1812.6  vs  1731.6</a:t>
-            </a:r>
-            <a:endParaRPr lang="en-US" sz="2200" dirty="0"/>
-          </a:p>
-        </p:txBody>
-      </p:sp>
-      <p:sp>
-        <p:nvSpPr>
-          <p:cNvPr id="7" name="Text 4"/>
-          <p:cNvSpPr/>
-          <p:nvPr/>
-        </p:nvSpPr>
-        <p:spPr>
-          <a:xfrm>
-            <a:off x="7799832" y="2039112"/>
-            <a:ext cx="3678631" cy="510235"/>
-          </a:xfrm>
-          <a:prstGeom prst="rect">
-            <a:avLst/>
-          </a:prstGeom>
-          <a:noFill/>
-          <a:ln/>
-        </p:spPr>
-        <p:txBody>
-          <a:bodyPr wrap="square" lIns="0" tIns="0" rIns="0" bIns="0" rtlCol="0" anchor="t"/>
-          <a:lstStyle/>
-          <a:p>
-            <a:pPr algn="l" indent="0" marL="0">
-              <a:buNone/>
-            </a:pPr>
-            <a:r>
-              <a:rPr lang="en-US" sz="1050" dirty="0">
+                <a:latin typeface="Calibri" pitchFamily="34" charset="0"/>
+                <a:ea typeface="Calibri" pitchFamily="34" charset="-122"/>
+                <a:cs typeface="Calibri" pitchFamily="34" charset="-120"/>
+              </a:rPr>
+              <a:t>Round-robin  </a:t>
+            </a:r>
+            <a:pPr indent="0" marL="0">
+              <a:buNone/>
+            </a:pPr>
+            <a:r>
+              <a:rPr lang="en-US" sz="1150" dirty="0">
                 <a:solidFill>
                   <a:srgbClr val="64748B"/>
                 </a:solidFill>
@@ -11292,83 +13747,74 @@
                 <a:ea typeface="Calibri" pitchFamily="34" charset="-122"/>
                 <a:cs typeface="Calibri" pitchFamily="34" charset="-120"/>
               </a:rPr>
-              <a:t>MAX LOAD, WEIGHTED n=32 — ROUND-ROBIN vs POWER-2</a:t>
-            </a:r>
-            <a:endParaRPr lang="en-US" sz="1050" dirty="0"/>
-          </a:p>
-        </p:txBody>
-      </p:sp>
-      <p:sp>
-        <p:nvSpPr>
-          <p:cNvPr id="8" name="Text 5"/>
-          <p:cNvSpPr/>
-          <p:nvPr/>
-        </p:nvSpPr>
-        <p:spPr>
-          <a:xfrm>
-            <a:off x="7635240" y="2788920"/>
-            <a:ext cx="4007815" cy="1005840"/>
-          </a:xfrm>
-          <a:prstGeom prst="rect">
-            <a:avLst/>
-          </a:prstGeom>
-          <a:noFill/>
-          <a:ln/>
-        </p:spPr>
-        <p:txBody>
-          <a:bodyPr wrap="square" lIns="0" tIns="0" rIns="0" bIns="0" rtlCol="0" anchor="t"/>
+              <a:t>Looks excellent here — but fragile</a:t>
+            </a:r>
+            <a:endParaRPr lang="en-US" sz="1150" dirty="0"/>
+          </a:p>
+        </p:txBody>
+      </p:sp>
+      <p:sp>
+        <p:nvSpPr>
+          <p:cNvPr id="9" name="Shape 6"/>
+          <p:cNvSpPr/>
+          <p:nvPr/>
+        </p:nvSpPr>
+        <p:spPr>
+          <a:xfrm>
+            <a:off x="8066837" y="5440680"/>
+            <a:ext cx="3576218" cy="502920"/>
+          </a:xfrm>
+          <a:prstGeom prst="roundRect">
+            <a:avLst>
+              <a:gd name="adj" fmla="val 10909"/>
+            </a:avLst>
+          </a:prstGeom>
+          <a:solidFill>
+            <a:srgbClr val="F1F5F9"/>
+          </a:solidFill>
+          <a:ln/>
+        </p:spPr>
+      </p:sp>
+      <p:sp>
+        <p:nvSpPr>
+          <p:cNvPr id="10" name="Text 7"/>
+          <p:cNvSpPr/>
+          <p:nvPr/>
+        </p:nvSpPr>
+        <p:spPr>
+          <a:xfrm>
+            <a:off x="8231429" y="5440680"/>
+            <a:ext cx="3247034" cy="502920"/>
+          </a:xfrm>
+          <a:prstGeom prst="rect">
+            <a:avLst/>
+          </a:prstGeom>
+          <a:noFill/>
+          <a:ln/>
+        </p:spPr>
+        <p:txBody>
+          <a:bodyPr wrap="square" lIns="0" tIns="0" rIns="0" bIns="0" rtlCol="0" anchor="ctr"/>
           <a:lstStyle/>
           <a:p>
             <a:pPr indent="0" marL="0">
-              <a:lnSpc>
-                <a:spcPct val="115000"/>
-              </a:lnSpc>
-              <a:buNone/>
-            </a:pPr>
-            <a:r>
-              <a:rPr lang="en-US" sz="1300" dirty="0">
-                <a:solidFill>
-                  <a:srgbClr val="1E293B"/>
-                </a:solidFill>
-                <a:latin typeface="Calibri" pitchFamily="34" charset="0"/>
-                <a:ea typeface="Calibri" pitchFamily="34" charset="-122"/>
-                <a:cs typeface="Calibri" pitchFamily="34" charset="-120"/>
-              </a:rPr>
-              <a:t>Fair by count can still be bad by load. Power-2 reads current load and adapts; round-robin does not.</a:t>
-            </a:r>
-            <a:endParaRPr lang="en-US" sz="1300" dirty="0"/>
-          </a:p>
-        </p:txBody>
-      </p:sp>
-      <p:sp>
-        <p:nvSpPr>
-          <p:cNvPr id="9" name="Text 6"/>
-          <p:cNvSpPr/>
-          <p:nvPr/>
-        </p:nvSpPr>
-        <p:spPr>
-          <a:xfrm>
-            <a:off x="7635240" y="3977640"/>
-            <a:ext cx="4007815" cy="1005840"/>
-          </a:xfrm>
-          <a:prstGeom prst="rect">
-            <a:avLst/>
-          </a:prstGeom>
-          <a:noFill/>
-          <a:ln/>
-        </p:spPr>
-        <p:txBody>
-          <a:bodyPr wrap="square" lIns="0" tIns="0" rIns="0" bIns="0" rtlCol="0" anchor="t"/>
-          <a:lstStyle/>
-          <a:p>
+              <a:buNone/>
+            </a:pPr>
+            <a:r>
+              <a:rPr lang="en-US" sz="1150" b="1" dirty="0">
+                <a:solidFill>
+                  <a:srgbClr val="C2660D"/>
+                </a:solidFill>
+                <a:latin typeface="Calibri" pitchFamily="34" charset="0"/>
+                <a:ea typeface="Calibri" pitchFamily="34" charset="-122"/>
+                <a:cs typeface="Calibri" pitchFamily="34" charset="-120"/>
+              </a:rPr>
+              <a:t>Power-2  </a:t>
+            </a:r>
             <a:pPr indent="0" marL="0">
-              <a:lnSpc>
-                <a:spcPct val="115000"/>
-              </a:lnSpc>
-              <a:buNone/>
-            </a:pPr>
-            <a:r>
-              <a:rPr lang="en-US" sz="1250" i="1" dirty="0">
+              <a:buNone/>
+            </a:pPr>
+            <a:r>
+              <a:rPr lang="en-US" sz="1150" dirty="0">
                 <a:solidFill>
                   <a:srgbClr val="64748B"/>
                 </a:solidFill>
@@ -11376,15 +13822,15 @@
                 <a:ea typeface="Calibri" pitchFamily="34" charset="-122"/>
                 <a:cs typeface="Calibri" pitchFamily="34" charset="-120"/>
               </a:rPr>
-              <a:t>The same pattern appears at n=16: round-robin's clean-case advantage disappears once balls carry weight.</a:t>
-            </a:r>
-            <a:endParaRPr lang="en-US" sz="1250" dirty="0"/>
-          </a:p>
-        </p:txBody>
-      </p:sp>
-      <p:sp>
-        <p:nvSpPr>
-          <p:cNvPr id="10" name="Shape 7"/>
+              <a:t>The knee of the curve</a:t>
+            </a:r>
+            <a:endParaRPr lang="en-US" sz="1150" dirty="0"/>
+          </a:p>
+        </p:txBody>
+      </p:sp>
+      <p:sp>
+        <p:nvSpPr>
+          <p:cNvPr id="11" name="Shape 8"/>
           <p:cNvSpPr/>
           <p:nvPr/>
         </p:nvSpPr>
@@ -11406,7 +13852,7 @@
       </p:sp>
       <p:sp>
         <p:nvSpPr>
-          <p:cNvPr id="11" name="Text 8"/>
+          <p:cNvPr id="12" name="Text 9"/>
           <p:cNvSpPr/>
           <p:nvPr/>
         </p:nvSpPr>
@@ -11437,7 +13883,7 @@
                 <a:ea typeface="Calibri" pitchFamily="34" charset="-122"/>
                 <a:cs typeface="Calibri" pitchFamily="34" charset="-120"/>
               </a:rPr>
-              <a:t>Round-robin balances counts, not load — weighted balls expose that weakness.</a:t>
+              <a:t>Power-2 delivers most of the achievable quality for a small, flat cost — the knee of the curve.</a:t>
             </a:r>
             <a:endParaRPr lang="en-US" sz="1350" dirty="0"/>
           </a:p>
